--- a/CPU_Process_Scheduling.pptx
+++ b/CPU_Process_Scheduling.pptx
@@ -4,6 +4,9 @@
   <p:sldMasterIdLst>
     <p:sldMasterId id="2147483648" r:id="rId1"/>
   </p:sldMasterIdLst>
+  <p:notesMasterIdLst>
+    <p:notesMasterId r:id="rId20"/>
+  </p:notesMasterIdLst>
   <p:sldIdLst>
     <p:sldId id="256" r:id="rId2"/>
     <p:sldId id="257" r:id="rId3"/>
@@ -24,9 +27,6 @@
     <p:sldId id="272" r:id="rId18"/>
     <p:sldId id="273" r:id="rId19"/>
   </p:sldIdLst>
-  <p:notesMasterIdLst>
-    <p:notesMasterId r:id="rId20"/>
-  </p:notesMasterIdLst>
   <p:sldSz cx="12192000" cy="6858000"/>
   <p:notesSz cx="6858000" cy="12192000"/>
   <p:defaultTextStyle>
@@ -121,13 +121,20 @@
       </a:defRPr>
     </a:lvl9pPr>
   </p:defaultTextStyle>
+  <p:extLst>
+    <p:ext uri="{EFAFB233-063F-42B5-8137-9DF3F51BA10A}">
+      <p15:sldGuideLst xmlns:p15="http://schemas.microsoft.com/office/powerpoint/2012/main"/>
+    </p:ext>
+  </p:extLst>
 </p:presentation>
 </file>
 
 <file path=ppt/charts/chart1.xml><?xml version="1.0" encoding="utf-8"?>
 <c:chartSpace xmlns:c="http://schemas.openxmlformats.org/drawingml/2006/chart" xmlns:a="http://schemas.openxmlformats.org/drawingml/2006/main" xmlns:r="http://schemas.openxmlformats.org/officeDocument/2006/relationships">
   <c:date1904 val="0"/>
+  <c:lang val="th-TH"/>
   <c:roundedCorners val="1"/>
+  <c:style val="2"/>
   <c:chart>
     <c:title>
       <c:tx>
@@ -155,7 +162,6 @@
           </a:p>
         </c:rich>
       </c:tx>
-      <c:layout/>
       <c:overlay val="0"/>
     </c:title>
     <c:autoTitleDeleted val="0"/>
@@ -188,18 +194,26 @@
           <c:invertIfNegative val="0"/>
           <c:dLbls>
             <c:numFmt formatCode="#,##0" sourceLinked="0"/>
+            <c:spPr>
+              <a:noFill/>
+              <a:ln>
+                <a:noFill/>
+              </a:ln>
+              <a:effectLst/>
+            </c:spPr>
             <c:txPr>
               <a:bodyPr/>
               <a:lstStyle/>
               <a:p>
                 <a:pPr>
-                  <a:defRPr b="0" i="0" strike="noStrike" sz="1000" u="none">
+                  <a:defRPr sz="1000" b="0" i="0" u="none" strike="noStrike">
                     <a:solidFill>
                       <a:srgbClr val="000000"/>
                     </a:solidFill>
                     <a:latin typeface="Arial"/>
                   </a:defRPr>
                 </a:pPr>
+                <a:endParaRPr lang="th-TH"/>
               </a:p>
             </c:txPr>
             <c:showLegendKey val="0"/>
@@ -209,25 +223,28 @@
             <c:showPercent val="0"/>
             <c:showBubbleSize val="0"/>
             <c:showLeaderLines val="0"/>
+            <c:extLst>
+              <c:ext xmlns:c15="http://schemas.microsoft.com/office/drawing/2012/chart" uri="{CE6537A1-D6FC-4f65-9D91-7224C49458BB}">
+                <c15:showLeaderLines val="0"/>
+              </c:ext>
+            </c:extLst>
           </c:dLbls>
           <c:cat>
-            <c:multiLvlStrRef>
+            <c:strRef>
               <c:f>Sheet1!$A$2:$A$4</c:f>
-              <c:multiLvlStrCache>
+              <c:strCache>
                 <c:ptCount val="3"/>
-                <c:lvl>
-                  <c:pt idx="0">
-                    <c:v>Avg Waiting</c:v>
-                  </c:pt>
-                  <c:pt idx="1">
-                    <c:v>Avg Turnaround</c:v>
-                  </c:pt>
-                  <c:pt idx="2">
-                    <c:v>Avg 1st Response</c:v>
-                  </c:pt>
-                </c:lvl>
-              </c:multiLvlStrCache>
-            </c:multiLvlStrRef>
+                <c:pt idx="0">
+                  <c:v>Avg Waiting</c:v>
+                </c:pt>
+                <c:pt idx="1">
+                  <c:v>Avg Turnaround</c:v>
+                </c:pt>
+                <c:pt idx="2">
+                  <c:v>Avg 1st Response</c:v>
+                </c:pt>
+              </c:strCache>
+            </c:strRef>
           </c:cat>
           <c:val>
             <c:numRef>
@@ -271,18 +288,26 @@
           <c:invertIfNegative val="0"/>
           <c:dLbls>
             <c:numFmt formatCode="#,##0" sourceLinked="0"/>
+            <c:spPr>
+              <a:noFill/>
+              <a:ln>
+                <a:noFill/>
+              </a:ln>
+              <a:effectLst/>
+            </c:spPr>
             <c:txPr>
               <a:bodyPr/>
               <a:lstStyle/>
               <a:p>
                 <a:pPr>
-                  <a:defRPr b="0" i="0" strike="noStrike" sz="1000" u="none">
+                  <a:defRPr sz="1000" b="0" i="0" u="none" strike="noStrike">
                     <a:solidFill>
                       <a:srgbClr val="000000"/>
                     </a:solidFill>
                     <a:latin typeface="Arial"/>
                   </a:defRPr>
                 </a:pPr>
+                <a:endParaRPr lang="th-TH"/>
               </a:p>
             </c:txPr>
             <c:showLegendKey val="0"/>
@@ -292,25 +317,28 @@
             <c:showPercent val="0"/>
             <c:showBubbleSize val="0"/>
             <c:showLeaderLines val="0"/>
+            <c:extLst>
+              <c:ext xmlns:c15="http://schemas.microsoft.com/office/drawing/2012/chart" uri="{CE6537A1-D6FC-4f65-9D91-7224C49458BB}">
+                <c15:showLeaderLines val="0"/>
+              </c:ext>
+            </c:extLst>
           </c:dLbls>
           <c:cat>
-            <c:multiLvlStrRef>
+            <c:strRef>
               <c:f>Sheet1!$A$2:$A$4</c:f>
-              <c:multiLvlStrCache>
+              <c:strCache>
                 <c:ptCount val="3"/>
-                <c:lvl>
-                  <c:pt idx="0">
-                    <c:v>Avg Waiting</c:v>
-                  </c:pt>
-                  <c:pt idx="1">
-                    <c:v>Avg Turnaround</c:v>
-                  </c:pt>
-                  <c:pt idx="2">
-                    <c:v>Avg 1st Response</c:v>
-                  </c:pt>
-                </c:lvl>
-              </c:multiLvlStrCache>
-            </c:multiLvlStrRef>
+                <c:pt idx="0">
+                  <c:v>Avg Waiting</c:v>
+                </c:pt>
+                <c:pt idx="1">
+                  <c:v>Avg Turnaround</c:v>
+                </c:pt>
+                <c:pt idx="2">
+                  <c:v>Avg 1st Response</c:v>
+                </c:pt>
+              </c:strCache>
+            </c:strRef>
           </c:cat>
           <c:val>
             <c:numRef>
@@ -332,37 +360,19 @@
           </c:val>
         </c:ser>
         <c:dLbls>
-          <c:numFmt formatCode="#,##0" sourceLinked="0"/>
-          <c:txPr>
-            <a:bodyPr/>
-            <a:lstStyle/>
-            <a:p>
-              <a:pPr>
-                <a:defRPr b="0" i="0" strike="noStrike" sz="1000" u="none">
-                  <a:solidFill>
-                    <a:srgbClr val="000000"/>
-                  </a:solidFill>
-                  <a:latin typeface="Arial"/>
-                </a:defRPr>
-              </a:pPr>
-            </a:p>
-          </c:txPr>
           <c:showLegendKey val="0"/>
           <c:showVal val="1"/>
           <c:showCatName val="0"/>
           <c:showSerName val="0"/>
           <c:showPercent val="0"/>
           <c:showBubbleSize val="0"/>
-          <c:showLeaderLines val="0"/>
         </c:dLbls>
         <c:gapWidth val="40"/>
-        <c:overlap val="0"/>
-        <c:axId val="2094734554"/>
-        <c:axId val="2094734552"/>
-        <c:axId val="2094734556"/>
+        <c:axId val="829028320"/>
+        <c:axId val="829016352"/>
       </c:barChart>
       <c:catAx>
-        <c:axId val="2094734554"/>
+        <c:axId val="829028320"/>
         <c:scaling>
           <c:orientation val="minMax"/>
         </c:scaling>
@@ -393,17 +403,18 @@
                 <a:latin typeface="Arial"/>
               </a:defRPr>
             </a:pPr>
-            <a:endParaRPr lang="en-US"/>
+            <a:endParaRPr lang="th-TH"/>
           </a:p>
         </c:txPr>
-        <c:crossAx val="2094734552"/>
+        <c:crossAx val="829016352"/>
         <c:crosses val="autoZero"/>
         <c:auto val="1"/>
         <c:lblAlgn val="ctr"/>
+        <c:lblOffset val="100"/>
         <c:noMultiLvlLbl val="1"/>
       </c:catAx>
       <c:valAx>
-        <c:axId val="2094734552"/>
+        <c:axId val="829016352"/>
         <c:scaling>
           <c:orientation val="minMax"/>
         </c:scaling>
@@ -445,10 +456,10 @@
                 <a:latin typeface="Arial"/>
               </a:defRPr>
             </a:pPr>
-            <a:endParaRPr lang="en-US"/>
+            <a:endParaRPr lang="th-TH"/>
           </a:p>
         </c:txPr>
-        <c:crossAx val="2094734554"/>
+        <c:crossAx val="829028320"/>
         <c:crosses val="autoZero"/>
         <c:crossBetween val="between"/>
       </c:valAx>
@@ -466,6 +477,7 @@
     </c:legend>
     <c:plotVisOnly val="1"/>
     <c:dispBlanksAs val="span"/>
+    <c:showDLblsOverMax val="1"/>
   </c:chart>
   <c:spPr>
     <a:noFill/>
@@ -483,7 +495,9 @@
 <file path=ppt/charts/chart2.xml><?xml version="1.0" encoding="utf-8"?>
 <c:chartSpace xmlns:c="http://schemas.openxmlformats.org/drawingml/2006/chart" xmlns:a="http://schemas.openxmlformats.org/drawingml/2006/main" xmlns:r="http://schemas.openxmlformats.org/officeDocument/2006/relationships">
   <c:date1904 val="0"/>
+  <c:lang val="th-TH"/>
   <c:roundedCorners val="1"/>
+  <c:style val="2"/>
   <c:chart>
     <c:title>
       <c:tx>
@@ -511,7 +525,6 @@
           </a:p>
         </c:rich>
       </c:tx>
-      <c:layout/>
       <c:overlay val="0"/>
     </c:title>
     <c:autoTitleDeleted val="0"/>
@@ -542,51 +555,25 @@
             <a:effectLst/>
           </c:spPr>
           <c:invertIfNegative val="0"/>
-          <c:dLbls>
-            <c:numFmt formatCode="#,##0" sourceLinked="0"/>
-            <c:txPr>
-              <a:bodyPr/>
-              <a:lstStyle/>
-              <a:p>
-                <a:pPr>
-                  <a:defRPr b="0" i="0" strike="noStrike" sz="1200" u="none">
-                    <a:solidFill>
-                      <a:srgbClr val="000000"/>
-                    </a:solidFill>
-                    <a:latin typeface="Arial"/>
-                  </a:defRPr>
-                </a:pPr>
-              </a:p>
-            </c:txPr>
-            <c:showLegendKey val="0"/>
-            <c:showVal val="0"/>
-            <c:showCatName val="0"/>
-            <c:showSerName val="0"/>
-            <c:showPercent val="0"/>
-            <c:showBubbleSize val="0"/>
-            <c:showLeaderLines val="0"/>
-          </c:dLbls>
           <c:cat>
-            <c:multiLvlStrRef>
+            <c:strRef>
               <c:f>Sheet1!$A$2:$A$5</c:f>
-              <c:multiLvlStrCache>
+              <c:strCache>
                 <c:ptCount val="4"/>
-                <c:lvl>
-                  <c:pt idx="0">
-                    <c:v>n=100</c:v>
-                  </c:pt>
-                  <c:pt idx="1">
-                    <c:v>n=1,000</c:v>
-                  </c:pt>
-                  <c:pt idx="2">
-                    <c:v>n=10,000</c:v>
-                  </c:pt>
-                  <c:pt idx="3">
-                    <c:v>n=50,000</c:v>
-                  </c:pt>
-                </c:lvl>
-              </c:multiLvlStrCache>
-            </c:multiLvlStrRef>
+                <c:pt idx="0">
+                  <c:v>n=100</c:v>
+                </c:pt>
+                <c:pt idx="1">
+                  <c:v>n=1,000</c:v>
+                </c:pt>
+                <c:pt idx="2">
+                  <c:v>n=10,000</c:v>
+                </c:pt>
+                <c:pt idx="3">
+                  <c:v>n=50,000</c:v>
+                </c:pt>
+              </c:strCache>
+            </c:strRef>
           </c:cat>
           <c:val>
             <c:numRef>
@@ -595,16 +582,16 @@
                 <c:formatCode>General</c:formatCode>
                 <c:ptCount val="4"/>
                 <c:pt idx="0">
-                  <c:v>0.043</c:v>
+                  <c:v>4.2999999999999997E-2</c:v>
                 </c:pt>
                 <c:pt idx="1">
-                  <c:v>0.353</c:v>
+                  <c:v>0.35299999999999998</c:v>
                 </c:pt>
                 <c:pt idx="2">
                   <c:v>1.716</c:v>
                 </c:pt>
                 <c:pt idx="3">
-                  <c:v>8.771</c:v>
+                  <c:v>8.7710000000000008</c:v>
                 </c:pt>
               </c:numCache>
             </c:numRef>
@@ -631,51 +618,25 @@
             <a:effectLst/>
           </c:spPr>
           <c:invertIfNegative val="0"/>
-          <c:dLbls>
-            <c:numFmt formatCode="#,##0" sourceLinked="0"/>
-            <c:txPr>
-              <a:bodyPr/>
-              <a:lstStyle/>
-              <a:p>
-                <a:pPr>
-                  <a:defRPr b="0" i="0" strike="noStrike" sz="1200" u="none">
-                    <a:solidFill>
-                      <a:srgbClr val="000000"/>
-                    </a:solidFill>
-                    <a:latin typeface="Arial"/>
-                  </a:defRPr>
-                </a:pPr>
-              </a:p>
-            </c:txPr>
-            <c:showLegendKey val="0"/>
-            <c:showVal val="0"/>
-            <c:showCatName val="0"/>
-            <c:showSerName val="0"/>
-            <c:showPercent val="0"/>
-            <c:showBubbleSize val="0"/>
-            <c:showLeaderLines val="0"/>
-          </c:dLbls>
           <c:cat>
-            <c:multiLvlStrRef>
+            <c:strRef>
               <c:f>Sheet1!$A$2:$A$5</c:f>
-              <c:multiLvlStrCache>
+              <c:strCache>
                 <c:ptCount val="4"/>
-                <c:lvl>
-                  <c:pt idx="0">
-                    <c:v>n=100</c:v>
-                  </c:pt>
-                  <c:pt idx="1">
-                    <c:v>n=1,000</c:v>
-                  </c:pt>
-                  <c:pt idx="2">
-                    <c:v>n=10,000</c:v>
-                  </c:pt>
-                  <c:pt idx="3">
-                    <c:v>n=50,000</c:v>
-                  </c:pt>
-                </c:lvl>
-              </c:multiLvlStrCache>
-            </c:multiLvlStrRef>
+                <c:pt idx="0">
+                  <c:v>n=100</c:v>
+                </c:pt>
+                <c:pt idx="1">
+                  <c:v>n=1,000</c:v>
+                </c:pt>
+                <c:pt idx="2">
+                  <c:v>n=10,000</c:v>
+                </c:pt>
+                <c:pt idx="3">
+                  <c:v>n=50,000</c:v>
+                </c:pt>
+              </c:strCache>
+            </c:strRef>
           </c:cat>
           <c:val>
             <c:numRef>
@@ -684,13 +645,13 @@
                 <c:formatCode>General</c:formatCode>
                 <c:ptCount val="4"/>
                 <c:pt idx="0">
-                  <c:v>0.421</c:v>
+                  <c:v>0.42099999999999999</c:v>
                 </c:pt>
                 <c:pt idx="1">
                   <c:v>4.077</c:v>
                 </c:pt>
                 <c:pt idx="2">
-                  <c:v>20.242</c:v>
+                  <c:v>20.242000000000001</c:v>
                 </c:pt>
                 <c:pt idx="3">
                   <c:v>106.825</c:v>
@@ -700,37 +661,19 @@
           </c:val>
         </c:ser>
         <c:dLbls>
-          <c:numFmt formatCode="#,##0" sourceLinked="0"/>
-          <c:txPr>
-            <a:bodyPr/>
-            <a:lstStyle/>
-            <a:p>
-              <a:pPr>
-                <a:defRPr b="0" i="0" strike="noStrike" sz="1200" u="none">
-                  <a:solidFill>
-                    <a:srgbClr val="000000"/>
-                  </a:solidFill>
-                  <a:latin typeface="Arial"/>
-                </a:defRPr>
-              </a:pPr>
-            </a:p>
-          </c:txPr>
           <c:showLegendKey val="0"/>
           <c:showVal val="0"/>
           <c:showCatName val="0"/>
           <c:showSerName val="0"/>
           <c:showPercent val="0"/>
           <c:showBubbleSize val="0"/>
-          <c:showLeaderLines val="0"/>
         </c:dLbls>
         <c:gapWidth val="30"/>
-        <c:overlap val="0"/>
-        <c:axId val="2094734554"/>
-        <c:axId val="2094734552"/>
-        <c:axId val="2094734556"/>
+        <c:axId val="829028864"/>
+        <c:axId val="829029408"/>
       </c:barChart>
       <c:catAx>
-        <c:axId val="2094734554"/>
+        <c:axId val="829028864"/>
         <c:scaling>
           <c:orientation val="minMax"/>
         </c:scaling>
@@ -761,17 +704,18 @@
                 <a:latin typeface="Arial"/>
               </a:defRPr>
             </a:pPr>
-            <a:endParaRPr lang="en-US"/>
+            <a:endParaRPr lang="th-TH"/>
           </a:p>
         </c:txPr>
-        <c:crossAx val="2094734552"/>
+        <c:crossAx val="829029408"/>
         <c:crosses val="autoZero"/>
         <c:auto val="1"/>
         <c:lblAlgn val="ctr"/>
+        <c:lblOffset val="100"/>
         <c:noMultiLvlLbl val="1"/>
       </c:catAx>
       <c:valAx>
-        <c:axId val="2094734552"/>
+        <c:axId val="829029408"/>
         <c:scaling>
           <c:logBase val="10"/>
           <c:orientation val="minMax"/>
@@ -815,10 +759,10 @@
                 <a:latin typeface="Arial"/>
               </a:defRPr>
             </a:pPr>
-            <a:endParaRPr lang="en-US"/>
+            <a:endParaRPr lang="th-TH"/>
           </a:p>
         </c:txPr>
-        <c:crossAx val="2094734554"/>
+        <c:crossAx val="829028864"/>
         <c:crosses val="autoZero"/>
         <c:crossBetween val="between"/>
       </c:valAx>
@@ -836,6 +780,7 @@
     </c:legend>
     <c:plotVisOnly val="1"/>
     <c:dispBlanksAs val="span"/>
+    <c:showDLblsOverMax val="1"/>
   </c:chart>
   <c:spPr>
     <a:noFill/>
@@ -872,241 +817,17 @@
           <a:chExt cx="0" cy="0"/>
         </a:xfrm>
       </p:grpSpPr>
-      <p:sp>
-        <p:nvSpPr>
-          <p:cNvPr id="2" name="Header Placeholder 1"/>
-          <p:cNvSpPr>
-            <a:spLocks noGrp="1"/>
-          </p:cNvSpPr>
-          <p:nvPr>
-            <p:ph type="hdr" sz="quarter"/>
-          </p:nvPr>
-        </p:nvSpPr>
-        <p:spPr>
-          <a:xfrm>
-            <a:off x="0" y="0"/>
-            <a:ext cx="2971800" cy="458788"/>
-          </a:xfrm>
-          <a:prstGeom prst="rect">
-            <a:avLst/>
-          </a:prstGeom>
-        </p:spPr>
-        <p:txBody>
-          <a:bodyPr vert="horz" lIns="91440" tIns="45720" rIns="91440" bIns="45720" rtlCol="0"/>
-          <a:lstStyle>
-            <a:lvl1pPr algn="l">
-              <a:defRPr sz="1200"/>
-            </a:lvl1pPr>
-          </a:lstStyle>
-          <a:p>
-            <a:endParaRPr lang="en-US"/>
-          </a:p>
-        </p:txBody>
-      </p:sp>
-      <p:sp>
-        <p:nvSpPr>
-          <p:cNvPr id="3" name="Date Placeholder 2"/>
-          <p:cNvSpPr>
-            <a:spLocks noGrp="1"/>
-          </p:cNvSpPr>
-          <p:nvPr>
-            <p:ph type="dt" idx="1"/>
-          </p:nvPr>
-        </p:nvSpPr>
-        <p:spPr>
-          <a:xfrm>
-            <a:off x="3884613" y="0"/>
-            <a:ext cx="2971800" cy="458788"/>
-          </a:xfrm>
-          <a:prstGeom prst="rect">
-            <a:avLst/>
-          </a:prstGeom>
-        </p:spPr>
-        <p:txBody>
-          <a:bodyPr vert="horz" lIns="91440" tIns="45720" rIns="91440" bIns="45720" rtlCol="0"/>
-          <a:lstStyle>
-            <a:lvl1pPr algn="r">
-              <a:defRPr sz="1200"/>
-            </a:lvl1pPr>
-          </a:lstStyle>
-          <a:p>
-            <a:fld id="{5282F153-3F37-0F45-9E97-73ACFA13230C}" type="datetimeFigureOut">
-              <a:rPr lang="en-US"/>
-              <a:t>7/23/19</a:t>
-            </a:fld>
-            <a:endParaRPr lang="en-US"/>
-          </a:p>
-        </p:txBody>
-      </p:sp>
-      <p:sp>
-        <p:nvSpPr>
-          <p:cNvPr id="4" name="Slide Image Placeholder 3"/>
-          <p:cNvSpPr>
-            <a:spLocks noGrp="1" noRot="1" noChangeAspect="1"/>
-          </p:cNvSpPr>
-          <p:nvPr>
-            <p:ph type="sldImg" idx="2"/>
-          </p:nvPr>
-        </p:nvSpPr>
-        <p:spPr>
-          <a:xfrm>
-            <a:off x="685800" y="1143000"/>
-            <a:ext cx="5486400" cy="3086100"/>
-          </a:xfrm>
-          <a:prstGeom prst="rect">
-            <a:avLst/>
-          </a:prstGeom>
-          <a:noFill/>
-          <a:ln w="12700">
-            <a:solidFill>
-              <a:prstClr val="black"/>
-            </a:solidFill>
-          </a:ln>
-        </p:spPr>
-        <p:txBody>
-          <a:bodyPr vert="horz" lIns="91440" tIns="45720" rIns="91440" bIns="45720" rtlCol="0" anchor="ctr"/>
-          <a:lstStyle/>
-          <a:p>
-            <a:endParaRPr lang="en-US"/>
-          </a:p>
-        </p:txBody>
-      </p:sp>
-      <p:sp>
-        <p:nvSpPr>
-          <p:cNvPr id="5" name="Notes Placeholder 4"/>
-          <p:cNvSpPr>
-            <a:spLocks noGrp="1"/>
-          </p:cNvSpPr>
-          <p:nvPr>
-            <p:ph type="body" sz="quarter" idx="3"/>
-          </p:nvPr>
-        </p:nvSpPr>
-        <p:spPr>
-          <a:xfrm>
-            <a:off x="685800" y="4400550"/>
-            <a:ext cx="5486400" cy="3600450"/>
-          </a:xfrm>
-          <a:prstGeom prst="rect">
-            <a:avLst/>
-          </a:prstGeom>
-        </p:spPr>
-        <p:txBody>
-          <a:bodyPr vert="horz" lIns="91440" tIns="45720" rIns="91440" bIns="45720" rtlCol="0"/>
-          <a:lstStyle/>
-          <a:p>
-            <a:pPr lvl="0"/>
-            <a:r>
-              <a:rPr lang="en-US"/>
-              <a:t>Click to edit Master text styles</a:t>
-            </a:r>
-          </a:p>
-          <a:p>
-            <a:pPr lvl="1"/>
-            <a:r>
-              <a:rPr lang="en-US"/>
-              <a:t>Second level</a:t>
-            </a:r>
-          </a:p>
-          <a:p>
-            <a:pPr lvl="2"/>
-            <a:r>
-              <a:rPr lang="en-US"/>
-              <a:t>Third level</a:t>
-            </a:r>
-          </a:p>
-          <a:p>
-            <a:pPr lvl="3"/>
-            <a:r>
-              <a:rPr lang="en-US"/>
-              <a:t>Fourth level</a:t>
-            </a:r>
-          </a:p>
-          <a:p>
-            <a:pPr lvl="4"/>
-            <a:r>
-              <a:rPr lang="en-US"/>
-              <a:t>Fifth level</a:t>
-            </a:r>
-          </a:p>
-        </p:txBody>
-      </p:sp>
-      <p:sp>
-        <p:nvSpPr>
-          <p:cNvPr id="6" name="Footer Placeholder 5"/>
-          <p:cNvSpPr>
-            <a:spLocks noGrp="1"/>
-          </p:cNvSpPr>
-          <p:nvPr>
-            <p:ph type="ftr" sz="quarter" idx="4"/>
-          </p:nvPr>
-        </p:nvSpPr>
-        <p:spPr>
-          <a:xfrm>
-            <a:off x="0" y="8685213"/>
-            <a:ext cx="2971800" cy="458787"/>
-          </a:xfrm>
-          <a:prstGeom prst="rect">
-            <a:avLst/>
-          </a:prstGeom>
-        </p:spPr>
-        <p:txBody>
-          <a:bodyPr vert="horz" lIns="91440" tIns="45720" rIns="91440" bIns="45720" rtlCol="0" anchor="b"/>
-          <a:lstStyle>
-            <a:lvl1pPr algn="l">
-              <a:defRPr sz="1200"/>
-            </a:lvl1pPr>
-          </a:lstStyle>
-          <a:p>
-            <a:endParaRPr lang="en-US"/>
-          </a:p>
-        </p:txBody>
-      </p:sp>
-      <p:sp>
-        <p:nvSpPr>
-          <p:cNvPr id="7" name="Slide Number Placeholder 6"/>
-          <p:cNvSpPr>
-            <a:spLocks noGrp="1"/>
-          </p:cNvSpPr>
-          <p:nvPr>
-            <p:ph type="sldNum" sz="quarter" idx="5"/>
-          </p:nvPr>
-        </p:nvSpPr>
-        <p:spPr>
-          <a:xfrm>
-            <a:off x="3884613" y="8685213"/>
-            <a:ext cx="2971800" cy="458787"/>
-          </a:xfrm>
-          <a:prstGeom prst="rect">
-            <a:avLst/>
-          </a:prstGeom>
-        </p:spPr>
-        <p:txBody>
-          <a:bodyPr vert="horz" lIns="91440" tIns="45720" rIns="91440" bIns="45720" rtlCol="0" anchor="b"/>
-          <a:lstStyle>
-            <a:lvl1pPr algn="r">
-              <a:defRPr sz="1200"/>
-            </a:lvl1pPr>
-          </a:lstStyle>
-          <a:p>
-            <a:fld id="{CE5E9CC1-C706-0F49-92D6-E571CC5EEA8F}" type="slidenum">
-              <a:rPr lang="en-US"/>
-              <a:t>‹#›</a:t>
-            </a:fld>
-            <a:endParaRPr lang="en-US"/>
-          </a:p>
-        </p:txBody>
-      </p:sp>
     </p:spTree>
     <p:extLst>
       <p:ext uri="{BB962C8B-B14F-4D97-AF65-F5344CB8AC3E}">
-        <p14:creationId xmlns:p14="http://schemas.microsoft.com/office/powerpoint/2010/main" val="1024086991"/>
+        <p14:creationId xmlns:p14="http://schemas.microsoft.com/office/powerpoint/2010/main" val="2406205543"/>
       </p:ext>
     </p:extLst>
   </p:cSld>
   <p:clrMap bg1="lt1" tx1="dk1" bg2="lt2" tx2="dk2" accent1="accent1" accent2="accent2" accent3="accent3" accent4="accent4" accent5="accent5" accent6="accent6" hlink="hlink" folHlink="folHlink"/>
   <p:notesStyle>
     <a:lvl1pPr marL="0" algn="l" defTabSz="914400" rtl="0" eaLnBrk="1" latinLnBrk="0" hangingPunct="1">
-      <a:defRPr sz="1200" kern="1200">
+      <a:defRPr sz="1800" kern="1200">
         <a:solidFill>
           <a:schemeClr val="tx1"/>
         </a:solidFill>
@@ -1116,7 +837,7 @@
       </a:defRPr>
     </a:lvl1pPr>
     <a:lvl2pPr marL="457200" algn="l" defTabSz="914400" rtl="0" eaLnBrk="1" latinLnBrk="0" hangingPunct="1">
-      <a:defRPr sz="1200" kern="1200">
+      <a:defRPr sz="1800" kern="1200">
         <a:solidFill>
           <a:schemeClr val="tx1"/>
         </a:solidFill>
@@ -1126,7 +847,7 @@
       </a:defRPr>
     </a:lvl2pPr>
     <a:lvl3pPr marL="914400" algn="l" defTabSz="914400" rtl="0" eaLnBrk="1" latinLnBrk="0" hangingPunct="1">
-      <a:defRPr sz="1200" kern="1200">
+      <a:defRPr sz="1800" kern="1200">
         <a:solidFill>
           <a:schemeClr val="tx1"/>
         </a:solidFill>
@@ -1136,7 +857,7 @@
       </a:defRPr>
     </a:lvl3pPr>
     <a:lvl4pPr marL="1371600" algn="l" defTabSz="914400" rtl="0" eaLnBrk="1" latinLnBrk="0" hangingPunct="1">
-      <a:defRPr sz="1200" kern="1200">
+      <a:defRPr sz="1800" kern="1200">
         <a:solidFill>
           <a:schemeClr val="tx1"/>
         </a:solidFill>
@@ -1146,7 +867,7 @@
       </a:defRPr>
     </a:lvl4pPr>
     <a:lvl5pPr marL="1828800" algn="l" defTabSz="914400" rtl="0" eaLnBrk="1" latinLnBrk="0" hangingPunct="1">
-      <a:defRPr sz="1200" kern="1200">
+      <a:defRPr sz="1800" kern="1200">
         <a:solidFill>
           <a:schemeClr val="tx1"/>
         </a:solidFill>
@@ -1156,7 +877,7 @@
       </a:defRPr>
     </a:lvl5pPr>
     <a:lvl6pPr marL="2286000" algn="l" defTabSz="914400" rtl="0" eaLnBrk="1" latinLnBrk="0" hangingPunct="1">
-      <a:defRPr sz="1200" kern="1200">
+      <a:defRPr sz="1800" kern="1200">
         <a:solidFill>
           <a:schemeClr val="tx1"/>
         </a:solidFill>
@@ -1166,7 +887,7 @@
       </a:defRPr>
     </a:lvl6pPr>
     <a:lvl7pPr marL="2743200" algn="l" defTabSz="914400" rtl="0" eaLnBrk="1" latinLnBrk="0" hangingPunct="1">
-      <a:defRPr sz="1200" kern="1200">
+      <a:defRPr sz="1800" kern="1200">
         <a:solidFill>
           <a:schemeClr val="tx1"/>
         </a:solidFill>
@@ -1176,7 +897,7 @@
       </a:defRPr>
     </a:lvl7pPr>
     <a:lvl8pPr marL="3200400" algn="l" defTabSz="914400" rtl="0" eaLnBrk="1" latinLnBrk="0" hangingPunct="1">
-      <a:defRPr sz="1200" kern="1200">
+      <a:defRPr sz="1800" kern="1200">
         <a:solidFill>
           <a:schemeClr val="tx1"/>
         </a:solidFill>
@@ -1186,7 +907,7 @@
       </a:defRPr>
     </a:lvl8pPr>
     <a:lvl9pPr marL="3657600" algn="l" defTabSz="914400" rtl="0" eaLnBrk="1" latinLnBrk="0" hangingPunct="1">
-      <a:defRPr sz="1200" kern="1200">
+      <a:defRPr sz="1800" kern="1200">
         <a:solidFill>
           <a:schemeClr val="tx1"/>
         </a:solidFill>
@@ -1243,10 +964,6 @@
           <a:bodyPr/>
           <a:lstStyle/>
           <a:p>
-            <a:r>
-              <a:rPr lang="en-US" dirty="0"/>
-              <a:t/>
-            </a:r>
             <a:endParaRPr lang="en-US" dirty="0"/>
           </a:p>
         </p:txBody>
@@ -1331,10 +1048,6 @@
           <a:bodyPr/>
           <a:lstStyle/>
           <a:p>
-            <a:r>
-              <a:rPr lang="en-US" dirty="0"/>
-              <a:t/>
-            </a:r>
             <a:endParaRPr lang="en-US" dirty="0"/>
           </a:p>
         </p:txBody>
@@ -1419,10 +1132,6 @@
           <a:bodyPr/>
           <a:lstStyle/>
           <a:p>
-            <a:r>
-              <a:rPr lang="en-US" dirty="0"/>
-              <a:t/>
-            </a:r>
             <a:endParaRPr lang="en-US" dirty="0"/>
           </a:p>
         </p:txBody>
@@ -1507,10 +1216,6 @@
           <a:bodyPr/>
           <a:lstStyle/>
           <a:p>
-            <a:r>
-              <a:rPr lang="en-US" dirty="0"/>
-              <a:t/>
-            </a:r>
             <a:endParaRPr lang="en-US" dirty="0"/>
           </a:p>
         </p:txBody>
@@ -1595,10 +1300,6 @@
           <a:bodyPr/>
           <a:lstStyle/>
           <a:p>
-            <a:r>
-              <a:rPr lang="en-US" dirty="0"/>
-              <a:t/>
-            </a:r>
             <a:endParaRPr lang="en-US" dirty="0"/>
           </a:p>
         </p:txBody>
@@ -1683,10 +1384,6 @@
           <a:bodyPr/>
           <a:lstStyle/>
           <a:p>
-            <a:r>
-              <a:rPr lang="en-US" dirty="0"/>
-              <a:t/>
-            </a:r>
             <a:endParaRPr lang="en-US" dirty="0"/>
           </a:p>
         </p:txBody>
@@ -1771,10 +1468,6 @@
           <a:bodyPr/>
           <a:lstStyle/>
           <a:p>
-            <a:r>
-              <a:rPr lang="en-US" dirty="0"/>
-              <a:t/>
-            </a:r>
             <a:endParaRPr lang="en-US" dirty="0"/>
           </a:p>
         </p:txBody>
@@ -1859,10 +1552,6 @@
           <a:bodyPr/>
           <a:lstStyle/>
           <a:p>
-            <a:r>
-              <a:rPr lang="en-US" dirty="0"/>
-              <a:t/>
-            </a:r>
             <a:endParaRPr lang="en-US" dirty="0"/>
           </a:p>
         </p:txBody>
@@ -1947,10 +1636,6 @@
           <a:bodyPr/>
           <a:lstStyle/>
           <a:p>
-            <a:r>
-              <a:rPr lang="en-US" dirty="0"/>
-              <a:t/>
-            </a:r>
             <a:endParaRPr lang="en-US" dirty="0"/>
           </a:p>
         </p:txBody>
@@ -2035,10 +1720,6 @@
           <a:bodyPr/>
           <a:lstStyle/>
           <a:p>
-            <a:r>
-              <a:rPr lang="en-US" dirty="0"/>
-              <a:t/>
-            </a:r>
             <a:endParaRPr lang="en-US" dirty="0"/>
           </a:p>
         </p:txBody>
@@ -2123,10 +1804,6 @@
           <a:bodyPr/>
           <a:lstStyle/>
           <a:p>
-            <a:r>
-              <a:rPr lang="en-US" dirty="0"/>
-              <a:t/>
-            </a:r>
             <a:endParaRPr lang="en-US" dirty="0"/>
           </a:p>
         </p:txBody>
@@ -2211,10 +1888,6 @@
           <a:bodyPr/>
           <a:lstStyle/>
           <a:p>
-            <a:r>
-              <a:rPr lang="en-US" dirty="0"/>
-              <a:t/>
-            </a:r>
             <a:endParaRPr lang="en-US" dirty="0"/>
           </a:p>
         </p:txBody>
@@ -2299,10 +1972,6 @@
           <a:bodyPr/>
           <a:lstStyle/>
           <a:p>
-            <a:r>
-              <a:rPr lang="en-US" dirty="0"/>
-              <a:t/>
-            </a:r>
             <a:endParaRPr lang="en-US" dirty="0"/>
           </a:p>
         </p:txBody>
@@ -2387,10 +2056,6 @@
           <a:bodyPr/>
           <a:lstStyle/>
           <a:p>
-            <a:r>
-              <a:rPr lang="en-US" dirty="0"/>
-              <a:t/>
-            </a:r>
             <a:endParaRPr lang="en-US" dirty="0"/>
           </a:p>
         </p:txBody>
@@ -2475,10 +2140,6 @@
           <a:bodyPr/>
           <a:lstStyle/>
           <a:p>
-            <a:r>
-              <a:rPr lang="en-US" dirty="0"/>
-              <a:t/>
-            </a:r>
             <a:endParaRPr lang="en-US" dirty="0"/>
           </a:p>
         </p:txBody>
@@ -2563,10 +2224,6 @@
           <a:bodyPr/>
           <a:lstStyle/>
           <a:p>
-            <a:r>
-              <a:rPr lang="en-US" dirty="0"/>
-              <a:t/>
-            </a:r>
             <a:endParaRPr lang="en-US" dirty="0"/>
           </a:p>
         </p:txBody>
@@ -2651,10 +2308,6 @@
           <a:bodyPr/>
           <a:lstStyle/>
           <a:p>
-            <a:r>
-              <a:rPr lang="en-US" dirty="0"/>
-              <a:t/>
-            </a:r>
             <a:endParaRPr lang="en-US" dirty="0"/>
           </a:p>
         </p:txBody>
@@ -2739,10 +2392,6 @@
           <a:bodyPr/>
           <a:lstStyle/>
           <a:p>
-            <a:r>
-              <a:rPr lang="en-US" dirty="0"/>
-              <a:t/>
-            </a:r>
             <a:endParaRPr lang="en-US" dirty="0"/>
           </a:p>
         </p:txBody>
@@ -2816,6 +2465,11 @@
 <file path=ppt/slideMasters/slideMaster1.xml><?xml version="1.0" encoding="utf-8"?>
 <p:sldMaster xmlns:a="http://schemas.openxmlformats.org/drawingml/2006/main" xmlns:r="http://schemas.openxmlformats.org/officeDocument/2006/relationships" xmlns:p="http://schemas.openxmlformats.org/presentationml/2006/main">
   <p:cSld>
+    <p:bg>
+      <p:bgRef idx="1001">
+        <a:schemeClr val="bg1"/>
+      </p:bgRef>
+    </p:bg>
     <p:spTree>
       <p:nvGrpSpPr>
         <p:cNvPr id="1" name=""/>
@@ -3098,6 +2752,7 @@
         <a:solidFill>
           <a:srgbClr val="0B2545"/>
         </a:solidFill>
+        <a:effectLst/>
       </p:bgPr>
     </p:bg>
     <p:spTree>
@@ -3262,7 +2917,7 @@
           <a:bodyPr wrap="square" lIns="0" tIns="0" rIns="0" bIns="0" rtlCol="0" anchor="ctr"/>
           <a:lstStyle/>
           <a:p>
-            <a:pPr algn="ctr" indent="0" marL="0">
+            <a:pPr marL="0" indent="0" algn="ctr">
               <a:buNone/>
             </a:pPr>
             <a:r>
@@ -3328,7 +2983,7 @@
           <a:bodyPr wrap="square" lIns="0" tIns="0" rIns="0" bIns="0" rtlCol="0" anchor="ctr"/>
           <a:lstStyle/>
           <a:p>
-            <a:pPr algn="ctr" indent="0" marL="0">
+            <a:pPr marL="0" indent="0" algn="ctr">
               <a:buNone/>
             </a:pPr>
             <a:r>
@@ -3394,7 +3049,7 @@
           <a:bodyPr wrap="square" lIns="0" tIns="0" rIns="0" bIns="0" rtlCol="0" anchor="ctr"/>
           <a:lstStyle/>
           <a:p>
-            <a:pPr algn="ctr" indent="0" marL="0">
+            <a:pPr marL="0" indent="0" algn="ctr">
               <a:buNone/>
             </a:pPr>
             <a:r>
@@ -3460,7 +3115,7 @@
           <a:bodyPr wrap="square" lIns="0" tIns="0" rIns="0" bIns="0" rtlCol="0" anchor="ctr"/>
           <a:lstStyle/>
           <a:p>
-            <a:pPr algn="ctr" indent="0" marL="0">
+            <a:pPr marL="0" indent="0" algn="ctr">
               <a:buNone/>
             </a:pPr>
             <a:r>
@@ -3543,7 +3198,7 @@
           <a:bodyPr wrap="square" lIns="0" tIns="0" rIns="0" bIns="0" rtlCol="0" anchor="ctr"/>
           <a:lstStyle/>
           <a:p>
-            <a:pPr algn="ctr" indent="0" marL="0">
+            <a:pPr marL="0" indent="0" algn="ctr">
               <a:buNone/>
             </a:pPr>
             <a:r>
@@ -3582,11 +3237,11 @@
           <a:bodyPr wrap="square" lIns="0" tIns="0" rIns="0" bIns="0" rtlCol="0" anchor="ctr"/>
           <a:lstStyle/>
           <a:p>
-            <a:pPr indent="0" marL="0">
-              <a:buNone/>
-            </a:pPr>
-            <a:r>
-              <a:rPr lang="en-US" sz="1400" b="1" spc="200" kern="0" dirty="0">
+            <a:pPr marL="0" indent="0">
+              <a:buNone/>
+            </a:pPr>
+            <a:r>
+              <a:rPr lang="en-US" sz="1400" b="1" kern="0" spc="200" dirty="0">
                 <a:solidFill>
                   <a:srgbClr val="00B4D8"/>
                 </a:solidFill>
@@ -3621,7 +3276,7 @@
           <a:bodyPr wrap="square" lIns="0" tIns="0" rIns="0" bIns="0" rtlCol="0" anchor="ctr"/>
           <a:lstStyle/>
           <a:p>
-            <a:pPr indent="0" marL="0">
+            <a:pPr marL="0" indent="0">
               <a:buNone/>
             </a:pPr>
             <a:r>
@@ -3660,7 +3315,7 @@
           <a:bodyPr wrap="square" lIns="0" tIns="0" rIns="0" bIns="0" rtlCol="0" anchor="ctr"/>
           <a:lstStyle/>
           <a:p>
-            <a:pPr indent="0" marL="0">
+            <a:pPr marL="0" indent="0">
               <a:buNone/>
             </a:pPr>
             <a:r>
@@ -3722,7 +3377,7 @@
           <a:bodyPr wrap="square" lIns="0" tIns="0" rIns="0" bIns="0" rtlCol="0" anchor="ctr"/>
           <a:lstStyle/>
           <a:p>
-            <a:pPr indent="0" marL="0">
+            <a:pPr marL="0" indent="0">
               <a:buNone/>
             </a:pPr>
             <a:r>
@@ -3740,6 +3395,588 @@
           </a:p>
         </p:txBody>
       </p:sp>
+      <p:graphicFrame>
+        <p:nvGraphicFramePr>
+          <p:cNvPr id="23" name="ตาราง 22"/>
+          <p:cNvGraphicFramePr>
+            <a:graphicFrameLocks noGrp="1"/>
+          </p:cNvGraphicFramePr>
+          <p:nvPr>
+            <p:extLst>
+              <p:ext uri="{D42A27DB-BD31-4B8C-83A1-F6EECF244321}">
+                <p14:modId xmlns:p14="http://schemas.microsoft.com/office/powerpoint/2010/main" val="2428555621"/>
+              </p:ext>
+            </p:extLst>
+          </p:nvPr>
+        </p:nvGraphicFramePr>
+        <p:xfrm>
+          <a:off x="640080" y="4299065"/>
+          <a:ext cx="2647003" cy="1706880"/>
+        </p:xfrm>
+        <a:graphic>
+          <a:graphicData uri="http://schemas.openxmlformats.org/drawingml/2006/table">
+            <a:tbl>
+              <a:tblPr firstRow="1" firstCol="1" bandRow="1">
+                <a:tableStyleId>{2D5ABB26-0587-4C30-8999-92F81FD0307C}</a:tableStyleId>
+              </a:tblPr>
+              <a:tblGrid>
+                <a:gridCol w="1610937"/>
+                <a:gridCol w="1036066"/>
+              </a:tblGrid>
+              <a:tr h="135773">
+                <a:tc>
+                  <a:txBody>
+                    <a:bodyPr/>
+                    <a:lstStyle/>
+                    <a:p>
+                      <a:pPr>
+                        <a:spcAft>
+                          <a:spcPts val="0"/>
+                        </a:spcAft>
+                      </a:pPr>
+                      <a:r>
+                        <a:rPr lang="th-TH" sz="1600" dirty="0">
+                          <a:solidFill>
+                            <a:schemeClr val="bg1"/>
+                          </a:solidFill>
+                          <a:effectLst/>
+                        </a:rPr>
+                        <a:t>1.นายเนติธร</a:t>
+                      </a:r>
+                      <a:r>
+                        <a:rPr lang="en-US" sz="1600" dirty="0">
+                          <a:solidFill>
+                            <a:schemeClr val="bg1"/>
+                          </a:solidFill>
+                          <a:effectLst/>
+                        </a:rPr>
+                        <a:t> </a:t>
+                      </a:r>
+                      <a:r>
+                        <a:rPr lang="th-TH" sz="1600" dirty="0">
+                          <a:solidFill>
+                            <a:schemeClr val="bg1"/>
+                          </a:solidFill>
+                          <a:effectLst/>
+                        </a:rPr>
+                        <a:t> </a:t>
+                      </a:r>
+                      <a:endParaRPr lang="en-US" sz="1000" dirty="0">
+                        <a:solidFill>
+                          <a:schemeClr val="bg1"/>
+                        </a:solidFill>
+                        <a:effectLst/>
+                        <a:latin typeface="Times New Roman" panose="02020603050405020304" pitchFamily="18" charset="0"/>
+                        <a:ea typeface="Times New Roman" panose="02020603050405020304" pitchFamily="18" charset="0"/>
+                      </a:endParaRPr>
+                    </a:p>
+                  </a:txBody>
+                  <a:tcPr marL="68580" marR="68580" marT="0" marB="0"/>
+                </a:tc>
+                <a:tc>
+                  <a:txBody>
+                    <a:bodyPr/>
+                    <a:lstStyle/>
+                    <a:p>
+                      <a:pPr>
+                        <a:spcBef>
+                          <a:spcPts val="400"/>
+                        </a:spcBef>
+                        <a:spcAft>
+                          <a:spcPts val="0"/>
+                        </a:spcAft>
+                      </a:pPr>
+                      <a:r>
+                        <a:rPr lang="th-TH" sz="1600" dirty="0">
+                          <a:solidFill>
+                            <a:schemeClr val="bg1"/>
+                          </a:solidFill>
+                          <a:effectLst/>
+                        </a:rPr>
+                        <a:t>กาฬภักดี</a:t>
+                      </a:r>
+                      <a:endParaRPr lang="en-US" sz="1000" dirty="0">
+                        <a:solidFill>
+                          <a:schemeClr val="bg1"/>
+                        </a:solidFill>
+                        <a:effectLst/>
+                        <a:latin typeface="Times New Roman" panose="02020603050405020304" pitchFamily="18" charset="0"/>
+                        <a:ea typeface="Times New Roman" panose="02020603050405020304" pitchFamily="18" charset="0"/>
+                      </a:endParaRPr>
+                    </a:p>
+                  </a:txBody>
+                  <a:tcPr marL="68580" marR="68580" marT="0" marB="0"/>
+                </a:tc>
+              </a:tr>
+              <a:tr h="0">
+                <a:tc>
+                  <a:txBody>
+                    <a:bodyPr/>
+                    <a:lstStyle/>
+                    <a:p>
+                      <a:pPr>
+                        <a:spcAft>
+                          <a:spcPts val="0"/>
+                        </a:spcAft>
+                      </a:pPr>
+                      <a:r>
+                        <a:rPr lang="th-TH" sz="1600" dirty="0">
+                          <a:solidFill>
+                            <a:schemeClr val="bg1"/>
+                          </a:solidFill>
+                          <a:effectLst/>
+                        </a:rPr>
+                        <a:t>2.นาย</a:t>
+                      </a:r>
+                      <a:r>
+                        <a:rPr lang="th-TH" sz="1600" dirty="0" err="1">
+                          <a:solidFill>
+                            <a:schemeClr val="bg1"/>
+                          </a:solidFill>
+                          <a:effectLst/>
+                        </a:rPr>
+                        <a:t>นิธิศ</a:t>
+                      </a:r>
+                      <a:r>
+                        <a:rPr lang="th-TH" sz="1600" dirty="0">
+                          <a:solidFill>
+                            <a:schemeClr val="bg1"/>
+                          </a:solidFill>
+                          <a:effectLst/>
+                        </a:rPr>
+                        <a:t> </a:t>
+                      </a:r>
+                      <a:endParaRPr lang="en-US" sz="1000" dirty="0">
+                        <a:solidFill>
+                          <a:schemeClr val="bg1"/>
+                        </a:solidFill>
+                        <a:effectLst/>
+                        <a:latin typeface="Times New Roman" panose="02020603050405020304" pitchFamily="18" charset="0"/>
+                        <a:ea typeface="Times New Roman" panose="02020603050405020304" pitchFamily="18" charset="0"/>
+                      </a:endParaRPr>
+                    </a:p>
+                  </a:txBody>
+                  <a:tcPr marL="68580" marR="68580" marT="0" marB="0"/>
+                </a:tc>
+                <a:tc>
+                  <a:txBody>
+                    <a:bodyPr/>
+                    <a:lstStyle/>
+                    <a:p>
+                      <a:pPr>
+                        <a:spcBef>
+                          <a:spcPts val="400"/>
+                        </a:spcBef>
+                        <a:spcAft>
+                          <a:spcPts val="0"/>
+                        </a:spcAft>
+                      </a:pPr>
+                      <a:r>
+                        <a:rPr lang="th-TH" sz="1600" dirty="0">
+                          <a:solidFill>
+                            <a:schemeClr val="bg1"/>
+                          </a:solidFill>
+                          <a:effectLst/>
+                        </a:rPr>
+                        <a:t>สุขอยู่</a:t>
+                      </a:r>
+                      <a:endParaRPr lang="en-US" sz="1000" dirty="0">
+                        <a:solidFill>
+                          <a:schemeClr val="bg1"/>
+                        </a:solidFill>
+                        <a:effectLst/>
+                        <a:latin typeface="Times New Roman" panose="02020603050405020304" pitchFamily="18" charset="0"/>
+                        <a:ea typeface="Times New Roman" panose="02020603050405020304" pitchFamily="18" charset="0"/>
+                      </a:endParaRPr>
+                    </a:p>
+                  </a:txBody>
+                  <a:tcPr marL="68580" marR="68580" marT="0" marB="0"/>
+                </a:tc>
+              </a:tr>
+              <a:tr h="0">
+                <a:tc>
+                  <a:txBody>
+                    <a:bodyPr/>
+                    <a:lstStyle/>
+                    <a:p>
+                      <a:pPr>
+                        <a:spcAft>
+                          <a:spcPts val="0"/>
+                        </a:spcAft>
+                      </a:pPr>
+                      <a:r>
+                        <a:rPr lang="th-TH" sz="1600" dirty="0">
+                          <a:solidFill>
+                            <a:schemeClr val="bg1"/>
+                          </a:solidFill>
+                          <a:effectLst/>
+                        </a:rPr>
+                        <a:t>3.นาย</a:t>
+                      </a:r>
+                      <a:r>
+                        <a:rPr lang="th-TH" sz="1600" dirty="0" err="1">
+                          <a:solidFill>
+                            <a:schemeClr val="bg1"/>
+                          </a:solidFill>
+                          <a:effectLst/>
+                        </a:rPr>
+                        <a:t>พีรพัฒน์</a:t>
+                      </a:r>
+                      <a:r>
+                        <a:rPr lang="en-US" sz="1600" dirty="0">
+                          <a:solidFill>
+                            <a:schemeClr val="bg1"/>
+                          </a:solidFill>
+                          <a:effectLst/>
+                        </a:rPr>
+                        <a:t> </a:t>
+                      </a:r>
+                      <a:endParaRPr lang="en-US" sz="1000" dirty="0">
+                        <a:solidFill>
+                          <a:schemeClr val="bg1"/>
+                        </a:solidFill>
+                        <a:effectLst/>
+                        <a:latin typeface="Times New Roman" panose="02020603050405020304" pitchFamily="18" charset="0"/>
+                        <a:ea typeface="Times New Roman" panose="02020603050405020304" pitchFamily="18" charset="0"/>
+                      </a:endParaRPr>
+                    </a:p>
+                  </a:txBody>
+                  <a:tcPr marL="68580" marR="68580" marT="0" marB="0"/>
+                </a:tc>
+                <a:tc>
+                  <a:txBody>
+                    <a:bodyPr/>
+                    <a:lstStyle/>
+                    <a:p>
+                      <a:pPr>
+                        <a:spcBef>
+                          <a:spcPts val="400"/>
+                        </a:spcBef>
+                        <a:spcAft>
+                          <a:spcPts val="0"/>
+                        </a:spcAft>
+                      </a:pPr>
+                      <a:r>
+                        <a:rPr lang="th-TH" sz="1600" dirty="0">
+                          <a:solidFill>
+                            <a:schemeClr val="bg1"/>
+                          </a:solidFill>
+                          <a:effectLst/>
+                        </a:rPr>
+                        <a:t>ใคร่ในธรรม</a:t>
+                      </a:r>
+                      <a:endParaRPr lang="en-US" sz="1000" dirty="0">
+                        <a:solidFill>
+                          <a:schemeClr val="bg1"/>
+                        </a:solidFill>
+                        <a:effectLst/>
+                        <a:latin typeface="Times New Roman" panose="02020603050405020304" pitchFamily="18" charset="0"/>
+                        <a:ea typeface="Times New Roman" panose="02020603050405020304" pitchFamily="18" charset="0"/>
+                      </a:endParaRPr>
+                    </a:p>
+                  </a:txBody>
+                  <a:tcPr marL="68580" marR="68580" marT="0" marB="0"/>
+                </a:tc>
+              </a:tr>
+              <a:tr h="0">
+                <a:tc>
+                  <a:txBody>
+                    <a:bodyPr/>
+                    <a:lstStyle/>
+                    <a:p>
+                      <a:pPr>
+                        <a:spcAft>
+                          <a:spcPts val="0"/>
+                        </a:spcAft>
+                      </a:pPr>
+                      <a:r>
+                        <a:rPr lang="th-TH" sz="1600">
+                          <a:solidFill>
+                            <a:schemeClr val="bg1"/>
+                          </a:solidFill>
+                          <a:effectLst/>
+                        </a:rPr>
+                        <a:t>4.นางสาวทิพวรรณ </a:t>
+                      </a:r>
+                      <a:endParaRPr lang="en-US" sz="1000">
+                        <a:solidFill>
+                          <a:schemeClr val="bg1"/>
+                        </a:solidFill>
+                        <a:effectLst/>
+                        <a:latin typeface="Times New Roman" panose="02020603050405020304" pitchFamily="18" charset="0"/>
+                        <a:ea typeface="Times New Roman" panose="02020603050405020304" pitchFamily="18" charset="0"/>
+                      </a:endParaRPr>
+                    </a:p>
+                  </a:txBody>
+                  <a:tcPr marL="68580" marR="68580" marT="0" marB="0"/>
+                </a:tc>
+                <a:tc>
+                  <a:txBody>
+                    <a:bodyPr/>
+                    <a:lstStyle/>
+                    <a:p>
+                      <a:pPr>
+                        <a:spcBef>
+                          <a:spcPts val="400"/>
+                        </a:spcBef>
+                        <a:spcAft>
+                          <a:spcPts val="0"/>
+                        </a:spcAft>
+                      </a:pPr>
+                      <a:r>
+                        <a:rPr lang="th-TH" sz="1600" dirty="0">
+                          <a:solidFill>
+                            <a:schemeClr val="bg1"/>
+                          </a:solidFill>
+                          <a:effectLst/>
+                        </a:rPr>
+                        <a:t>พิมพ์มาตร</a:t>
+                      </a:r>
+                      <a:endParaRPr lang="en-US" sz="1000" dirty="0">
+                        <a:solidFill>
+                          <a:schemeClr val="bg1"/>
+                        </a:solidFill>
+                        <a:effectLst/>
+                        <a:latin typeface="Times New Roman" panose="02020603050405020304" pitchFamily="18" charset="0"/>
+                        <a:ea typeface="Times New Roman" panose="02020603050405020304" pitchFamily="18" charset="0"/>
+                      </a:endParaRPr>
+                    </a:p>
+                  </a:txBody>
+                  <a:tcPr marL="68580" marR="68580" marT="0" marB="0"/>
+                </a:tc>
+              </a:tr>
+              <a:tr h="0">
+                <a:tc>
+                  <a:txBody>
+                    <a:bodyPr/>
+                    <a:lstStyle/>
+                    <a:p>
+                      <a:pPr>
+                        <a:spcAft>
+                          <a:spcPts val="0"/>
+                        </a:spcAft>
+                      </a:pPr>
+                      <a:r>
+                        <a:rPr lang="th-TH" sz="1600">
+                          <a:solidFill>
+                            <a:schemeClr val="bg1"/>
+                          </a:solidFill>
+                          <a:effectLst/>
+                        </a:rPr>
+                        <a:t>5.นายภูรินท์ </a:t>
+                      </a:r>
+                      <a:endParaRPr lang="en-US" sz="1000">
+                        <a:solidFill>
+                          <a:schemeClr val="bg1"/>
+                        </a:solidFill>
+                        <a:effectLst/>
+                        <a:latin typeface="Times New Roman" panose="02020603050405020304" pitchFamily="18" charset="0"/>
+                        <a:ea typeface="Times New Roman" panose="02020603050405020304" pitchFamily="18" charset="0"/>
+                      </a:endParaRPr>
+                    </a:p>
+                  </a:txBody>
+                  <a:tcPr marL="68580" marR="68580" marT="0" marB="0"/>
+                </a:tc>
+                <a:tc>
+                  <a:txBody>
+                    <a:bodyPr/>
+                    <a:lstStyle/>
+                    <a:p>
+                      <a:pPr>
+                        <a:spcBef>
+                          <a:spcPts val="400"/>
+                        </a:spcBef>
+                        <a:spcAft>
+                          <a:spcPts val="0"/>
+                        </a:spcAft>
+                      </a:pPr>
+                      <a:r>
+                        <a:rPr lang="th-TH" sz="1600" dirty="0" err="1">
+                          <a:solidFill>
+                            <a:schemeClr val="bg1"/>
+                          </a:solidFill>
+                          <a:effectLst/>
+                        </a:rPr>
+                        <a:t>ภาชวงษ์</a:t>
+                      </a:r>
+                      <a:endParaRPr lang="en-US" sz="1000" dirty="0">
+                        <a:solidFill>
+                          <a:schemeClr val="bg1"/>
+                        </a:solidFill>
+                        <a:effectLst/>
+                        <a:latin typeface="Times New Roman" panose="02020603050405020304" pitchFamily="18" charset="0"/>
+                        <a:ea typeface="Times New Roman" panose="02020603050405020304" pitchFamily="18" charset="0"/>
+                      </a:endParaRPr>
+                    </a:p>
+                  </a:txBody>
+                  <a:tcPr marL="68580" marR="68580" marT="0" marB="0"/>
+                </a:tc>
+              </a:tr>
+              <a:tr h="0">
+                <a:tc>
+                  <a:txBody>
+                    <a:bodyPr/>
+                    <a:lstStyle/>
+                    <a:p>
+                      <a:pPr>
+                        <a:spcAft>
+                          <a:spcPts val="0"/>
+                        </a:spcAft>
+                      </a:pPr>
+                      <a:r>
+                        <a:rPr lang="en-US" sz="1600">
+                          <a:solidFill>
+                            <a:schemeClr val="bg1"/>
+                          </a:solidFill>
+                          <a:effectLst/>
+                        </a:rPr>
+                        <a:t>6.</a:t>
+                      </a:r>
+                      <a:r>
+                        <a:rPr lang="th-TH" sz="1600">
+                          <a:solidFill>
+                            <a:schemeClr val="bg1"/>
+                          </a:solidFill>
+                          <a:effectLst/>
+                        </a:rPr>
+                        <a:t>นายภูมิภัทร</a:t>
+                      </a:r>
+                      <a:r>
+                        <a:rPr lang="en-US" sz="1600">
+                          <a:solidFill>
+                            <a:schemeClr val="bg1"/>
+                          </a:solidFill>
+                          <a:effectLst/>
+                        </a:rPr>
+                        <a:t> </a:t>
+                      </a:r>
+                      <a:r>
+                        <a:rPr lang="th-TH" sz="1600">
+                          <a:solidFill>
+                            <a:schemeClr val="bg1"/>
+                          </a:solidFill>
+                          <a:effectLst/>
+                        </a:rPr>
+                        <a:t> </a:t>
+                      </a:r>
+                      <a:endParaRPr lang="en-US" sz="1000">
+                        <a:solidFill>
+                          <a:schemeClr val="bg1"/>
+                        </a:solidFill>
+                        <a:effectLst/>
+                        <a:latin typeface="Times New Roman" panose="02020603050405020304" pitchFamily="18" charset="0"/>
+                        <a:ea typeface="Times New Roman" panose="02020603050405020304" pitchFamily="18" charset="0"/>
+                      </a:endParaRPr>
+                    </a:p>
+                  </a:txBody>
+                  <a:tcPr marL="68580" marR="68580" marT="0" marB="0"/>
+                </a:tc>
+                <a:tc>
+                  <a:txBody>
+                    <a:bodyPr/>
+                    <a:lstStyle/>
+                    <a:p>
+                      <a:pPr>
+                        <a:spcBef>
+                          <a:spcPts val="400"/>
+                        </a:spcBef>
+                        <a:spcAft>
+                          <a:spcPts val="0"/>
+                        </a:spcAft>
+                      </a:pPr>
+                      <a:r>
+                        <a:rPr lang="th-TH" sz="1600" dirty="0">
+                          <a:solidFill>
+                            <a:schemeClr val="bg1"/>
+                          </a:solidFill>
+                          <a:effectLst/>
+                        </a:rPr>
+                        <a:t>ศรีสุวรรณ</a:t>
+                      </a:r>
+                      <a:endParaRPr lang="en-US" sz="1000" dirty="0">
+                        <a:solidFill>
+                          <a:schemeClr val="bg1"/>
+                        </a:solidFill>
+                        <a:effectLst/>
+                        <a:latin typeface="Times New Roman" panose="02020603050405020304" pitchFamily="18" charset="0"/>
+                        <a:ea typeface="Times New Roman" panose="02020603050405020304" pitchFamily="18" charset="0"/>
+                      </a:endParaRPr>
+                    </a:p>
+                  </a:txBody>
+                  <a:tcPr marL="68580" marR="68580" marT="0" marB="0"/>
+                </a:tc>
+              </a:tr>
+              <a:tr h="0">
+                <a:tc>
+                  <a:txBody>
+                    <a:bodyPr/>
+                    <a:lstStyle/>
+                    <a:p>
+                      <a:pPr>
+                        <a:spcAft>
+                          <a:spcPts val="0"/>
+                        </a:spcAft>
+                      </a:pPr>
+                      <a:r>
+                        <a:rPr lang="th-TH" sz="1600" dirty="0">
+                          <a:solidFill>
+                            <a:schemeClr val="bg1"/>
+                          </a:solidFill>
+                          <a:effectLst/>
+                        </a:rPr>
+                        <a:t>7.นางสาวกัญญาดา </a:t>
+                      </a:r>
+                      <a:endParaRPr lang="en-US" sz="1000" dirty="0">
+                        <a:solidFill>
+                          <a:schemeClr val="bg1"/>
+                        </a:solidFill>
+                        <a:effectLst/>
+                        <a:latin typeface="Times New Roman" panose="02020603050405020304" pitchFamily="18" charset="0"/>
+                        <a:ea typeface="Times New Roman" panose="02020603050405020304" pitchFamily="18" charset="0"/>
+                      </a:endParaRPr>
+                    </a:p>
+                  </a:txBody>
+                  <a:tcPr marL="68580" marR="68580" marT="0" marB="0"/>
+                </a:tc>
+                <a:tc>
+                  <a:txBody>
+                    <a:bodyPr/>
+                    <a:lstStyle/>
+                    <a:p>
+                      <a:pPr>
+                        <a:spcBef>
+                          <a:spcPts val="400"/>
+                        </a:spcBef>
+                        <a:spcAft>
+                          <a:spcPts val="0"/>
+                        </a:spcAft>
+                      </a:pPr>
+                      <a:r>
+                        <a:rPr lang="th-TH" sz="1600" dirty="0">
+                          <a:solidFill>
+                            <a:schemeClr val="bg1"/>
+                          </a:solidFill>
+                          <a:effectLst/>
+                        </a:rPr>
+                        <a:t>ใจบาน</a:t>
+                      </a:r>
+                      <a:endParaRPr lang="en-US" sz="1000" dirty="0">
+                        <a:solidFill>
+                          <a:schemeClr val="bg1"/>
+                        </a:solidFill>
+                        <a:effectLst/>
+                        <a:latin typeface="Times New Roman" panose="02020603050405020304" pitchFamily="18" charset="0"/>
+                        <a:ea typeface="Times New Roman" panose="02020603050405020304" pitchFamily="18" charset="0"/>
+                      </a:endParaRPr>
+                    </a:p>
+                  </a:txBody>
+                  <a:tcPr marL="68580" marR="68580" marT="0" marB="0"/>
+                </a:tc>
+              </a:tr>
+            </a:tbl>
+          </a:graphicData>
+        </a:graphic>
+      </p:graphicFrame>
     </p:spTree>
   </p:cSld>
   <p:clrMapOvr>
@@ -3756,6 +3993,7 @@
         <a:solidFill>
           <a:srgbClr val="F7F9FC"/>
         </a:solidFill>
+        <a:effectLst/>
       </p:bgPr>
     </p:bg>
     <p:spTree>
@@ -3793,11 +4031,11 @@
           <a:bodyPr wrap="square" lIns="0" tIns="0" rIns="0" bIns="0" rtlCol="0" anchor="ctr"/>
           <a:lstStyle/>
           <a:p>
-            <a:pPr algn="l" indent="0" marL="0">
-              <a:buNone/>
-            </a:pPr>
-            <a:r>
-              <a:rPr lang="en-US" sz="1300" b="1" spc="200" kern="0" dirty="0">
+            <a:pPr marL="0" indent="0" algn="l">
+              <a:buNone/>
+            </a:pPr>
+            <a:r>
+              <a:rPr lang="en-US" sz="1300" b="1" kern="0" spc="200" dirty="0">
                 <a:solidFill>
                   <a:srgbClr val="0088A3"/>
                 </a:solidFill>
@@ -3832,7 +4070,7 @@
           <a:bodyPr wrap="square" lIns="0" tIns="0" rIns="0" bIns="0" rtlCol="0" anchor="ctr"/>
           <a:lstStyle/>
           <a:p>
-            <a:pPr algn="l" indent="0" marL="0">
+            <a:pPr marL="0" indent="0" algn="l">
               <a:buNone/>
             </a:pPr>
             <a:r>
@@ -3871,7 +4109,7 @@
           <a:bodyPr wrap="square" lIns="0" tIns="0" rIns="0" bIns="0" rtlCol="0" anchor="ctr"/>
           <a:lstStyle/>
           <a:p>
-            <a:pPr indent="0" marL="0">
+            <a:pPr marL="0" indent="0">
               <a:buNone/>
             </a:pPr>
             <a:r>
@@ -3935,7 +4173,7 @@
           <a:bodyPr wrap="square" lIns="0" tIns="0" rIns="0" bIns="0" rtlCol="0" anchor="ctr"/>
           <a:lstStyle/>
           <a:p>
-            <a:pPr algn="ctr" indent="0" marL="0">
+            <a:pPr marL="0" indent="0" algn="ctr">
               <a:buNone/>
             </a:pPr>
             <a:r>
@@ -3999,7 +4237,7 @@
           <a:bodyPr wrap="square" lIns="0" tIns="0" rIns="0" bIns="0" rtlCol="0" anchor="ctr"/>
           <a:lstStyle/>
           <a:p>
-            <a:pPr algn="ctr" indent="0" marL="0">
+            <a:pPr marL="0" indent="0" algn="ctr">
               <a:buNone/>
             </a:pPr>
             <a:r>
@@ -4063,7 +4301,7 @@
           <a:bodyPr wrap="square" lIns="0" tIns="0" rIns="0" bIns="0" rtlCol="0" anchor="ctr"/>
           <a:lstStyle/>
           <a:p>
-            <a:pPr algn="ctr" indent="0" marL="0">
+            <a:pPr marL="0" indent="0" algn="ctr">
               <a:buNone/>
             </a:pPr>
             <a:r>
@@ -4127,7 +4365,7 @@
           <a:bodyPr wrap="square" lIns="0" tIns="0" rIns="0" bIns="0" rtlCol="0" anchor="ctr"/>
           <a:lstStyle/>
           <a:p>
-            <a:pPr algn="ctr" indent="0" marL="0">
+            <a:pPr marL="0" indent="0" algn="ctr">
               <a:buNone/>
             </a:pPr>
             <a:r>
@@ -4191,7 +4429,7 @@
           <a:bodyPr wrap="square" lIns="0" tIns="0" rIns="0" bIns="0" rtlCol="0" anchor="ctr"/>
           <a:lstStyle/>
           <a:p>
-            <a:pPr algn="ctr" indent="0" marL="0">
+            <a:pPr marL="0" indent="0" algn="ctr">
               <a:buNone/>
             </a:pPr>
             <a:r>
@@ -4255,7 +4493,7 @@
           <a:bodyPr wrap="square" lIns="0" tIns="0" rIns="0" bIns="0" rtlCol="0" anchor="ctr"/>
           <a:lstStyle/>
           <a:p>
-            <a:pPr algn="ctr" indent="0" marL="0">
+            <a:pPr marL="0" indent="0" algn="ctr">
               <a:buNone/>
             </a:pPr>
             <a:r>
@@ -4319,7 +4557,7 @@
           <a:bodyPr wrap="square" lIns="0" tIns="0" rIns="0" bIns="0" rtlCol="0" anchor="ctr"/>
           <a:lstStyle/>
           <a:p>
-            <a:pPr algn="ctr" indent="0" marL="0">
+            <a:pPr marL="0" indent="0" algn="ctr">
               <a:buNone/>
             </a:pPr>
             <a:r>
@@ -4383,7 +4621,7 @@
           <a:bodyPr wrap="square" lIns="0" tIns="0" rIns="0" bIns="0" rtlCol="0" anchor="ctr"/>
           <a:lstStyle/>
           <a:p>
-            <a:pPr algn="ctr" indent="0" marL="0">
+            <a:pPr marL="0" indent="0" algn="ctr">
               <a:buNone/>
             </a:pPr>
             <a:r>
@@ -4447,7 +4685,7 @@
           <a:bodyPr wrap="square" lIns="0" tIns="0" rIns="0" bIns="0" rtlCol="0" anchor="ctr"/>
           <a:lstStyle/>
           <a:p>
-            <a:pPr algn="ctr" indent="0" marL="0">
+            <a:pPr marL="0" indent="0" algn="ctr">
               <a:buNone/>
             </a:pPr>
             <a:r>
@@ -4511,7 +4749,7 @@
           <a:bodyPr wrap="square" lIns="0" tIns="0" rIns="0" bIns="0" rtlCol="0" anchor="ctr"/>
           <a:lstStyle/>
           <a:p>
-            <a:pPr algn="ctr" indent="0" marL="0">
+            <a:pPr marL="0" indent="0" algn="ctr">
               <a:buNone/>
             </a:pPr>
             <a:r>
@@ -4550,7 +4788,7 @@
           <a:bodyPr wrap="square" lIns="0" tIns="0" rIns="0" bIns="0" rtlCol="0" anchor="ctr"/>
           <a:lstStyle/>
           <a:p>
-            <a:pPr algn="ctr" indent="0" marL="0">
+            <a:pPr marL="0" indent="0" algn="ctr">
               <a:buNone/>
             </a:pPr>
             <a:r>
@@ -4589,7 +4827,7 @@
           <a:bodyPr wrap="square" lIns="0" tIns="0" rIns="0" bIns="0" rtlCol="0" anchor="ctr"/>
           <a:lstStyle/>
           <a:p>
-            <a:pPr algn="ctr" indent="0" marL="0">
+            <a:pPr marL="0" indent="0" algn="ctr">
               <a:buNone/>
             </a:pPr>
             <a:r>
@@ -4628,7 +4866,7 @@
           <a:bodyPr wrap="square" lIns="0" tIns="0" rIns="0" bIns="0" rtlCol="0" anchor="ctr"/>
           <a:lstStyle/>
           <a:p>
-            <a:pPr algn="ctr" indent="0" marL="0">
+            <a:pPr marL="0" indent="0" algn="ctr">
               <a:buNone/>
             </a:pPr>
             <a:r>
@@ -4667,7 +4905,7 @@
           <a:bodyPr wrap="square" lIns="0" tIns="0" rIns="0" bIns="0" rtlCol="0" anchor="ctr"/>
           <a:lstStyle/>
           <a:p>
-            <a:pPr algn="ctr" indent="0" marL="0">
+            <a:pPr marL="0" indent="0" algn="ctr">
               <a:buNone/>
             </a:pPr>
             <a:r>
@@ -4706,7 +4944,7 @@
           <a:bodyPr wrap="square" lIns="0" tIns="0" rIns="0" bIns="0" rtlCol="0" anchor="ctr"/>
           <a:lstStyle/>
           <a:p>
-            <a:pPr algn="ctr" indent="0" marL="0">
+            <a:pPr marL="0" indent="0" algn="ctr">
               <a:buNone/>
             </a:pPr>
             <a:r>
@@ -4745,7 +4983,7 @@
           <a:bodyPr wrap="square" lIns="0" tIns="0" rIns="0" bIns="0" rtlCol="0" anchor="ctr"/>
           <a:lstStyle/>
           <a:p>
-            <a:pPr algn="ctr" indent="0" marL="0">
+            <a:pPr marL="0" indent="0" algn="ctr">
               <a:buNone/>
             </a:pPr>
             <a:r>
@@ -4784,7 +5022,7 @@
           <a:bodyPr wrap="square" lIns="0" tIns="0" rIns="0" bIns="0" rtlCol="0" anchor="ctr"/>
           <a:lstStyle/>
           <a:p>
-            <a:pPr algn="ctr" indent="0" marL="0">
+            <a:pPr marL="0" indent="0" algn="ctr">
               <a:buNone/>
             </a:pPr>
             <a:r>
@@ -4823,7 +5061,7 @@
           <a:bodyPr wrap="square" lIns="0" tIns="0" rIns="0" bIns="0" rtlCol="0" anchor="ctr"/>
           <a:lstStyle/>
           <a:p>
-            <a:pPr algn="ctr" indent="0" marL="0">
+            <a:pPr marL="0" indent="0" algn="ctr">
               <a:buNone/>
             </a:pPr>
             <a:r>
@@ -4862,7 +5100,7 @@
           <a:bodyPr wrap="square" lIns="0" tIns="0" rIns="0" bIns="0" rtlCol="0" anchor="ctr"/>
           <a:lstStyle/>
           <a:p>
-            <a:pPr algn="ctr" indent="0" marL="0">
+            <a:pPr marL="0" indent="0" algn="ctr">
               <a:buNone/>
             </a:pPr>
             <a:r>
@@ -4901,7 +5139,7 @@
           <a:bodyPr wrap="square" lIns="0" tIns="0" rIns="0" bIns="0" rtlCol="0" anchor="ctr"/>
           <a:lstStyle/>
           <a:p>
-            <a:pPr algn="ctr" indent="0" marL="0">
+            <a:pPr marL="0" indent="0" algn="ctr">
               <a:buNone/>
             </a:pPr>
             <a:r>
@@ -4940,7 +5178,7 @@
           <a:bodyPr wrap="square" lIns="0" tIns="0" rIns="0" bIns="0" rtlCol="0" anchor="ctr"/>
           <a:lstStyle/>
           <a:p>
-            <a:pPr algn="ctr" indent="0" marL="0">
+            <a:pPr marL="0" indent="0" algn="ctr">
               <a:buNone/>
             </a:pPr>
             <a:r>
@@ -5001,7 +5239,7 @@
           <a:bodyPr wrap="square" lIns="0" tIns="0" rIns="0" bIns="0" rtlCol="0" anchor="ctr"/>
           <a:lstStyle/>
           <a:p>
-            <a:pPr indent="0" marL="0">
+            <a:pPr marL="0" indent="0">
               <a:buNone/>
             </a:pPr>
             <a:r>
@@ -5062,7 +5300,7 @@
           <a:bodyPr wrap="square" lIns="0" tIns="0" rIns="0" bIns="0" rtlCol="0" anchor="ctr"/>
           <a:lstStyle/>
           <a:p>
-            <a:pPr indent="0" marL="0">
+            <a:pPr marL="0" indent="0">
               <a:buNone/>
             </a:pPr>
             <a:r>
@@ -5123,7 +5361,7 @@
           <a:bodyPr wrap="square" lIns="0" tIns="0" rIns="0" bIns="0" rtlCol="0" anchor="ctr"/>
           <a:lstStyle/>
           <a:p>
-            <a:pPr indent="0" marL="0">
+            <a:pPr marL="0" indent="0">
               <a:buNone/>
             </a:pPr>
             <a:r>
@@ -5184,7 +5422,7 @@
           <a:bodyPr wrap="square" lIns="0" tIns="0" rIns="0" bIns="0" rtlCol="0" anchor="ctr"/>
           <a:lstStyle/>
           <a:p>
-            <a:pPr indent="0" marL="0">
+            <a:pPr marL="0" indent="0">
               <a:buNone/>
             </a:pPr>
             <a:r>
@@ -5223,7 +5461,7 @@
           <a:bodyPr wrap="square" lIns="0" tIns="0" rIns="0" bIns="0" rtlCol="0" anchor="ctr"/>
           <a:lstStyle/>
           <a:p>
-            <a:pPr indent="0" marL="0">
+            <a:pPr marL="0" indent="0">
               <a:buNone/>
             </a:pPr>
             <a:r>
@@ -5267,7 +5505,7 @@
             <a:prstDash val="solid"/>
           </a:ln>
           <a:effectLst>
-            <a:outerShdw sx="100000" sy="100000" kx="0" ky="0" algn="bl" rotWithShape="0" blurRad="101600" dist="25400" dir="5400000">
+            <a:outerShdw blurRad="101600" dist="25400" dir="5400000" algn="bl" rotWithShape="0">
               <a:srgbClr val="9AA9BA">
                 <a:alpha val="18000"/>
               </a:srgbClr>
@@ -5296,7 +5534,7 @@
           <a:bodyPr wrap="square" lIns="0" tIns="0" rIns="0" bIns="0" rtlCol="0" anchor="ctr"/>
           <a:lstStyle/>
           <a:p>
-            <a:pPr indent="0" marL="0">
+            <a:pPr marL="0" indent="0">
               <a:buNone/>
             </a:pPr>
             <a:r>
@@ -5335,7 +5573,7 @@
           <a:bodyPr wrap="square" lIns="0" tIns="0" rIns="0" bIns="0" rtlCol="0" anchor="ctr"/>
           <a:lstStyle/>
           <a:p>
-            <a:pPr indent="0" marL="0">
+            <a:pPr marL="0" indent="0">
               <a:lnSpc>
                 <a:spcPct val="130000"/>
               </a:lnSpc>
@@ -5382,7 +5620,7 @@
             <a:prstDash val="solid"/>
           </a:ln>
           <a:effectLst>
-            <a:outerShdw sx="100000" sy="100000" kx="0" ky="0" algn="bl" rotWithShape="0" blurRad="101600" dist="25400" dir="5400000">
+            <a:outerShdw blurRad="101600" dist="25400" dir="5400000" algn="bl" rotWithShape="0">
               <a:srgbClr val="9AA9BA">
                 <a:alpha val="18000"/>
               </a:srgbClr>
@@ -5411,7 +5649,7 @@
           <a:bodyPr wrap="square" lIns="0" tIns="0" rIns="0" bIns="0" rtlCol="0" anchor="ctr"/>
           <a:lstStyle/>
           <a:p>
-            <a:pPr indent="0" marL="0">
+            <a:pPr marL="0" indent="0">
               <a:buNone/>
             </a:pPr>
             <a:r>
@@ -5431,7 +5669,7 @@
       </p:sp>
       <p:graphicFrame>
         <p:nvGraphicFramePr>
-          <p:cNvPr id="11" name="Table 0"/>
+          <p:cNvPr id="50" name="Table 0"/>
           <p:cNvGraphicFramePr>
             <a:graphicFrameLocks noGrp="1"/>
           </p:cNvGraphicFramePr>
@@ -5463,7 +5701,7 @@
                     <a:bodyPr/>
                     <a:lstStyle/>
                     <a:p>
-                      <a:pPr algn="ctr" indent="0" marL="0">
+                      <a:pPr marL="0" indent="0" algn="ctr">
                         <a:buNone/>
                       </a:pPr>
                       <a:r>
@@ -5477,7 +5715,7 @@
                       <a:endParaRPr lang="en-US" sz="1100" dirty="0"/>
                     </a:p>
                   </a:txBody>
-                  <a:tcPr marL="91440" marR="91440" marT="45720" marB="45720" anchor="ctr">
+                  <a:tcPr anchor="ctr">
                     <a:lnL w="9525" cap="flat" cmpd="sng" algn="ctr">
                       <a:solidFill>
                         <a:srgbClr val="DDE6EF"/>
@@ -5524,7 +5762,7 @@
                     <a:bodyPr/>
                     <a:lstStyle/>
                     <a:p>
-                      <a:pPr algn="ctr" indent="0" marL="0">
+                      <a:pPr marL="0" indent="0" algn="ctr">
                         <a:buNone/>
                       </a:pPr>
                       <a:r>
@@ -5538,7 +5776,7 @@
                       <a:endParaRPr lang="en-US" sz="1100" dirty="0"/>
                     </a:p>
                   </a:txBody>
-                  <a:tcPr marL="91440" marR="91440" marT="45720" marB="45720" anchor="ctr">
+                  <a:tcPr anchor="ctr">
                     <a:lnL w="9525" cap="flat" cmpd="sng" algn="ctr">
                       <a:solidFill>
                         <a:srgbClr val="DDE6EF"/>
@@ -5585,7 +5823,7 @@
                     <a:bodyPr/>
                     <a:lstStyle/>
                     <a:p>
-                      <a:pPr algn="ctr" indent="0" marL="0">
+                      <a:pPr marL="0" indent="0" algn="ctr">
                         <a:buNone/>
                       </a:pPr>
                       <a:r>
@@ -5599,7 +5837,7 @@
                       <a:endParaRPr lang="en-US" sz="1100" dirty="0"/>
                     </a:p>
                   </a:txBody>
-                  <a:tcPr marL="91440" marR="91440" marT="45720" marB="45720" anchor="ctr">
+                  <a:tcPr anchor="ctr">
                     <a:lnL w="9525" cap="flat" cmpd="sng" algn="ctr">
                       <a:solidFill>
                         <a:srgbClr val="DDE6EF"/>
@@ -5646,7 +5884,7 @@
                     <a:bodyPr/>
                     <a:lstStyle/>
                     <a:p>
-                      <a:pPr algn="ctr" indent="0" marL="0">
+                      <a:pPr marL="0" indent="0" algn="ctr">
                         <a:buNone/>
                       </a:pPr>
                       <a:r>
@@ -5660,7 +5898,7 @@
                       <a:endParaRPr lang="en-US" sz="1100" dirty="0"/>
                     </a:p>
                   </a:txBody>
-                  <a:tcPr marL="91440" marR="91440" marT="45720" marB="45720" anchor="ctr">
+                  <a:tcPr anchor="ctr">
                     <a:lnL w="9525" cap="flat" cmpd="sng" algn="ctr">
                       <a:solidFill>
                         <a:srgbClr val="DDE6EF"/>
@@ -5709,7 +5947,7 @@
                     <a:bodyPr/>
                     <a:lstStyle/>
                     <a:p>
-                      <a:pPr algn="ctr" indent="0" marL="0">
+                      <a:pPr marL="0" indent="0" algn="ctr">
                         <a:buNone/>
                       </a:pPr>
                       <a:r>
@@ -5723,7 +5961,7 @@
                       <a:endParaRPr lang="en-US" sz="1100" dirty="0"/>
                     </a:p>
                   </a:txBody>
-                  <a:tcPr marL="91440" marR="91440" marT="45720" marB="45720" anchor="ctr">
+                  <a:tcPr anchor="ctr">
                     <a:lnL w="9525" cap="flat" cmpd="sng" algn="ctr">
                       <a:solidFill>
                         <a:srgbClr val="DDE6EF"/>
@@ -5770,7 +6008,7 @@
                     <a:bodyPr/>
                     <a:lstStyle/>
                     <a:p>
-                      <a:pPr algn="ctr" indent="0" marL="0">
+                      <a:pPr marL="0" indent="0" algn="ctr">
                         <a:buNone/>
                       </a:pPr>
                       <a:r>
@@ -5784,7 +6022,7 @@
                       <a:endParaRPr lang="en-US" sz="1100" dirty="0"/>
                     </a:p>
                   </a:txBody>
-                  <a:tcPr marL="91440" marR="91440" marT="45720" marB="45720" anchor="ctr">
+                  <a:tcPr anchor="ctr">
                     <a:lnL w="9525" cap="flat" cmpd="sng" algn="ctr">
                       <a:solidFill>
                         <a:srgbClr val="DDE6EF"/>
@@ -5831,7 +6069,7 @@
                     <a:bodyPr/>
                     <a:lstStyle/>
                     <a:p>
-                      <a:pPr algn="ctr" indent="0" marL="0">
+                      <a:pPr marL="0" indent="0" algn="ctr">
                         <a:buNone/>
                       </a:pPr>
                       <a:r>
@@ -5845,7 +6083,7 @@
                       <a:endParaRPr lang="en-US" sz="1100" dirty="0"/>
                     </a:p>
                   </a:txBody>
-                  <a:tcPr marL="91440" marR="91440" marT="45720" marB="45720" anchor="ctr">
+                  <a:tcPr anchor="ctr">
                     <a:lnL w="9525" cap="flat" cmpd="sng" algn="ctr">
                       <a:solidFill>
                         <a:srgbClr val="DDE6EF"/>
@@ -5892,7 +6130,7 @@
                     <a:bodyPr/>
                     <a:lstStyle/>
                     <a:p>
-                      <a:pPr algn="ctr" indent="0" marL="0">
+                      <a:pPr marL="0" indent="0" algn="ctr">
                         <a:buNone/>
                       </a:pPr>
                       <a:r>
@@ -5906,7 +6144,7 @@
                       <a:endParaRPr lang="en-US" sz="1100" dirty="0"/>
                     </a:p>
                   </a:txBody>
-                  <a:tcPr marL="91440" marR="91440" marT="45720" marB="45720" anchor="ctr">
+                  <a:tcPr anchor="ctr">
                     <a:lnL w="9525" cap="flat" cmpd="sng" algn="ctr">
                       <a:solidFill>
                         <a:srgbClr val="DDE6EF"/>
@@ -5955,7 +6193,7 @@
                     <a:bodyPr/>
                     <a:lstStyle/>
                     <a:p>
-                      <a:pPr algn="ctr" indent="0" marL="0">
+                      <a:pPr marL="0" indent="0" algn="ctr">
                         <a:buNone/>
                       </a:pPr>
                       <a:r>
@@ -5969,7 +6207,7 @@
                       <a:endParaRPr lang="en-US" sz="1100" dirty="0"/>
                     </a:p>
                   </a:txBody>
-                  <a:tcPr marL="91440" marR="91440" marT="45720" marB="45720" anchor="ctr">
+                  <a:tcPr anchor="ctr">
                     <a:lnL w="9525" cap="flat" cmpd="sng" algn="ctr">
                       <a:solidFill>
                         <a:srgbClr val="DDE6EF"/>
@@ -6016,7 +6254,7 @@
                     <a:bodyPr/>
                     <a:lstStyle/>
                     <a:p>
-                      <a:pPr algn="ctr" indent="0" marL="0">
+                      <a:pPr marL="0" indent="0" algn="ctr">
                         <a:buNone/>
                       </a:pPr>
                       <a:r>
@@ -6030,7 +6268,7 @@
                       <a:endParaRPr lang="en-US" sz="1100" dirty="0"/>
                     </a:p>
                   </a:txBody>
-                  <a:tcPr marL="91440" marR="91440" marT="45720" marB="45720" anchor="ctr">
+                  <a:tcPr anchor="ctr">
                     <a:lnL w="9525" cap="flat" cmpd="sng" algn="ctr">
                       <a:solidFill>
                         <a:srgbClr val="DDE6EF"/>
@@ -6077,7 +6315,7 @@
                     <a:bodyPr/>
                     <a:lstStyle/>
                     <a:p>
-                      <a:pPr algn="ctr" indent="0" marL="0">
+                      <a:pPr marL="0" indent="0" algn="ctr">
                         <a:buNone/>
                       </a:pPr>
                       <a:r>
@@ -6091,7 +6329,7 @@
                       <a:endParaRPr lang="en-US" sz="1100" dirty="0"/>
                     </a:p>
                   </a:txBody>
-                  <a:tcPr marL="91440" marR="91440" marT="45720" marB="45720" anchor="ctr">
+                  <a:tcPr anchor="ctr">
                     <a:lnL w="9525" cap="flat" cmpd="sng" algn="ctr">
                       <a:solidFill>
                         <a:srgbClr val="DDE6EF"/>
@@ -6138,7 +6376,7 @@
                     <a:bodyPr/>
                     <a:lstStyle/>
                     <a:p>
-                      <a:pPr algn="ctr" indent="0" marL="0">
+                      <a:pPr marL="0" indent="0" algn="ctr">
                         <a:buNone/>
                       </a:pPr>
                       <a:r>
@@ -6152,7 +6390,7 @@
                       <a:endParaRPr lang="en-US" sz="1100" dirty="0"/>
                     </a:p>
                   </a:txBody>
-                  <a:tcPr marL="91440" marR="91440" marT="45720" marB="45720" anchor="ctr">
+                  <a:tcPr anchor="ctr">
                     <a:lnL w="9525" cap="flat" cmpd="sng" algn="ctr">
                       <a:solidFill>
                         <a:srgbClr val="DDE6EF"/>
@@ -6201,7 +6439,7 @@
                     <a:bodyPr/>
                     <a:lstStyle/>
                     <a:p>
-                      <a:pPr algn="ctr" indent="0" marL="0">
+                      <a:pPr marL="0" indent="0" algn="ctr">
                         <a:buNone/>
                       </a:pPr>
                       <a:r>
@@ -6215,7 +6453,7 @@
                       <a:endParaRPr lang="en-US" sz="1100" dirty="0"/>
                     </a:p>
                   </a:txBody>
-                  <a:tcPr marL="91440" marR="91440" marT="45720" marB="45720" anchor="ctr">
+                  <a:tcPr anchor="ctr">
                     <a:lnL w="9525" cap="flat" cmpd="sng" algn="ctr">
                       <a:solidFill>
                         <a:srgbClr val="DDE6EF"/>
@@ -6262,7 +6500,7 @@
                     <a:bodyPr/>
                     <a:lstStyle/>
                     <a:p>
-                      <a:pPr algn="ctr" indent="0" marL="0">
+                      <a:pPr marL="0" indent="0" algn="ctr">
                         <a:buNone/>
                       </a:pPr>
                       <a:r>
@@ -6276,7 +6514,7 @@
                       <a:endParaRPr lang="en-US" sz="1100" dirty="0"/>
                     </a:p>
                   </a:txBody>
-                  <a:tcPr marL="91440" marR="91440" marT="45720" marB="45720" anchor="ctr">
+                  <a:tcPr anchor="ctr">
                     <a:lnL w="9525" cap="flat" cmpd="sng" algn="ctr">
                       <a:solidFill>
                         <a:srgbClr val="DDE6EF"/>
@@ -6323,7 +6561,7 @@
                     <a:bodyPr/>
                     <a:lstStyle/>
                     <a:p>
-                      <a:pPr algn="ctr" indent="0" marL="0">
+                      <a:pPr marL="0" indent="0" algn="ctr">
                         <a:buNone/>
                       </a:pPr>
                       <a:r>
@@ -6337,7 +6575,7 @@
                       <a:endParaRPr lang="en-US" sz="1100" dirty="0"/>
                     </a:p>
                   </a:txBody>
-                  <a:tcPr marL="91440" marR="91440" marT="45720" marB="45720" anchor="ctr">
+                  <a:tcPr anchor="ctr">
                     <a:lnL w="9525" cap="flat" cmpd="sng" algn="ctr">
                       <a:solidFill>
                         <a:srgbClr val="DDE6EF"/>
@@ -6384,7 +6622,7 @@
                     <a:bodyPr/>
                     <a:lstStyle/>
                     <a:p>
-                      <a:pPr algn="ctr" indent="0" marL="0">
+                      <a:pPr marL="0" indent="0" algn="ctr">
                         <a:buNone/>
                       </a:pPr>
                       <a:r>
@@ -6398,7 +6636,7 @@
                       <a:endParaRPr lang="en-US" sz="1100" dirty="0"/>
                     </a:p>
                   </a:txBody>
-                  <a:tcPr marL="91440" marR="91440" marT="45720" marB="45720" anchor="ctr">
+                  <a:tcPr anchor="ctr">
                     <a:lnL w="9525" cap="flat" cmpd="sng" algn="ctr">
                       <a:solidFill>
                         <a:srgbClr val="DDE6EF"/>
@@ -6447,7 +6685,7 @@
                     <a:bodyPr/>
                     <a:lstStyle/>
                     <a:p>
-                      <a:pPr algn="ctr" indent="0" marL="0">
+                      <a:pPr marL="0" indent="0" algn="ctr">
                         <a:buNone/>
                       </a:pPr>
                       <a:r>
@@ -6461,7 +6699,7 @@
                       <a:endParaRPr lang="en-US" sz="1100" dirty="0"/>
                     </a:p>
                   </a:txBody>
-                  <a:tcPr marL="91440" marR="91440" marT="45720" marB="45720" anchor="ctr">
+                  <a:tcPr anchor="ctr">
                     <a:lnL w="9525" cap="flat" cmpd="sng" algn="ctr">
                       <a:solidFill>
                         <a:srgbClr val="DDE6EF"/>
@@ -6508,7 +6746,7 @@
                     <a:bodyPr/>
                     <a:lstStyle/>
                     <a:p>
-                      <a:pPr algn="ctr" indent="0" marL="0">
+                      <a:pPr marL="0" indent="0" algn="ctr">
                         <a:buNone/>
                       </a:pPr>
                       <a:r>
@@ -6522,7 +6760,7 @@
                       <a:endParaRPr lang="en-US" sz="1100" dirty="0"/>
                     </a:p>
                   </a:txBody>
-                  <a:tcPr marL="91440" marR="91440" marT="45720" marB="45720" anchor="ctr">
+                  <a:tcPr anchor="ctr">
                     <a:lnL w="9525" cap="flat" cmpd="sng" algn="ctr">
                       <a:solidFill>
                         <a:srgbClr val="DDE6EF"/>
@@ -6569,7 +6807,7 @@
                     <a:bodyPr/>
                     <a:lstStyle/>
                     <a:p>
-                      <a:pPr algn="ctr" indent="0" marL="0">
+                      <a:pPr marL="0" indent="0" algn="ctr">
                         <a:buNone/>
                       </a:pPr>
                       <a:r>
@@ -6583,7 +6821,7 @@
                       <a:endParaRPr lang="en-US" sz="1100" dirty="0"/>
                     </a:p>
                   </a:txBody>
-                  <a:tcPr marL="91440" marR="91440" marT="45720" marB="45720" anchor="ctr">
+                  <a:tcPr anchor="ctr">
                     <a:lnL w="9525" cap="flat" cmpd="sng" algn="ctr">
                       <a:solidFill>
                         <a:srgbClr val="DDE6EF"/>
@@ -6630,7 +6868,7 @@
                     <a:bodyPr/>
                     <a:lstStyle/>
                     <a:p>
-                      <a:pPr algn="ctr" indent="0" marL="0">
+                      <a:pPr marL="0" indent="0" algn="ctr">
                         <a:buNone/>
                       </a:pPr>
                       <a:r>
@@ -6644,7 +6882,7 @@
                       <a:endParaRPr lang="en-US" sz="1100" dirty="0"/>
                     </a:p>
                   </a:txBody>
-                  <a:tcPr marL="91440" marR="91440" marT="45720" marB="45720" anchor="ctr">
+                  <a:tcPr anchor="ctr">
                     <a:lnL w="9525" cap="flat" cmpd="sng" algn="ctr">
                       <a:solidFill>
                         <a:srgbClr val="DDE6EF"/>
@@ -6712,7 +6950,7 @@
           <a:bodyPr wrap="square" lIns="0" tIns="0" rIns="0" bIns="0" rtlCol="0" anchor="ctr"/>
           <a:lstStyle/>
           <a:p>
-            <a:pPr algn="r" indent="0" marL="0">
+            <a:pPr marL="0" indent="0" algn="r">
               <a:buNone/>
             </a:pPr>
             <a:r>
@@ -6751,7 +6989,7 @@
           <a:bodyPr wrap="square" lIns="0" tIns="0" rIns="0" bIns="0" rtlCol="0" anchor="ctr"/>
           <a:lstStyle/>
           <a:p>
-            <a:pPr indent="0" marL="0">
+            <a:pPr marL="0" indent="0">
               <a:buNone/>
             </a:pPr>
             <a:r>
@@ -6785,6 +7023,7 @@
         <a:solidFill>
           <a:srgbClr val="F7F9FC"/>
         </a:solidFill>
+        <a:effectLst/>
       </p:bgPr>
     </p:bg>
     <p:spTree>
@@ -6822,11 +7061,11 @@
           <a:bodyPr wrap="square" lIns="0" tIns="0" rIns="0" bIns="0" rtlCol="0" anchor="ctr"/>
           <a:lstStyle/>
           <a:p>
-            <a:pPr algn="l" indent="0" marL="0">
-              <a:buNone/>
-            </a:pPr>
-            <a:r>
-              <a:rPr lang="en-US" sz="1300" b="1" spc="200" kern="0" dirty="0">
+            <a:pPr marL="0" indent="0" algn="l">
+              <a:buNone/>
+            </a:pPr>
+            <a:r>
+              <a:rPr lang="en-US" sz="1300" b="1" kern="0" spc="200" dirty="0">
                 <a:solidFill>
                   <a:srgbClr val="0088A3"/>
                 </a:solidFill>
@@ -6861,7 +7100,7 @@
           <a:bodyPr wrap="square" lIns="0" tIns="0" rIns="0" bIns="0" rtlCol="0" anchor="ctr"/>
           <a:lstStyle/>
           <a:p>
-            <a:pPr algn="l" indent="0" marL="0">
+            <a:pPr marL="0" indent="0" algn="l">
               <a:buNone/>
             </a:pPr>
             <a:r>
@@ -6881,7 +7120,7 @@
       </p:sp>
       <p:graphicFrame>
         <p:nvGraphicFramePr>
-          <p:cNvPr id="4" name="Chart 0" descr=""/>
+          <p:cNvPr id="4" name="Chart 0"/>
           <p:cNvGraphicFramePr/>
           <p:nvPr/>
         </p:nvGraphicFramePr>
@@ -6889,9 +7128,9 @@
           <a:off x="548640" y="1691640"/>
           <a:ext cx="6675120" cy="4297680"/>
         </p:xfrm>
-        <a:graphic xmlns:a="http://schemas.openxmlformats.org/drawingml/2006/main">
+        <a:graphic>
           <a:graphicData uri="http://schemas.openxmlformats.org/drawingml/2006/chart">
-            <c:chart xmlns:c="http://schemas.openxmlformats.org/drawingml/2006/chart" r:id="rId1"/>
+            <c:chart xmlns:c="http://schemas.openxmlformats.org/drawingml/2006/chart" xmlns:r="http://schemas.openxmlformats.org/officeDocument/2006/relationships" r:id="rId3"/>
           </a:graphicData>
         </a:graphic>
       </p:graphicFrame>
@@ -6921,7 +7160,7 @@
             <a:prstDash val="solid"/>
           </a:ln>
           <a:effectLst>
-            <a:outerShdw sx="100000" sy="100000" kx="0" ky="0" algn="bl" rotWithShape="0" blurRad="101600" dist="25400" dir="5400000">
+            <a:outerShdw blurRad="101600" dist="25400" dir="5400000" algn="bl" rotWithShape="0">
               <a:srgbClr val="9AA9BA">
                 <a:alpha val="18000"/>
               </a:srgbClr>
@@ -6950,7 +7189,7 @@
           <a:bodyPr wrap="square" lIns="0" tIns="0" rIns="0" bIns="0" rtlCol="0" anchor="ctr"/>
           <a:lstStyle/>
           <a:p>
-            <a:pPr indent="0" marL="0">
+            <a:pPr marL="0" indent="0">
               <a:buNone/>
             </a:pPr>
             <a:r>
@@ -6989,7 +7228,7 @@
           <a:bodyPr wrap="square" lIns="0" tIns="0" rIns="0" bIns="0" rtlCol="0" anchor="ctr"/>
           <a:lstStyle/>
           <a:p>
-            <a:pPr indent="0" marL="0">
+            <a:pPr marL="0" indent="0">
               <a:lnSpc>
                 <a:spcPct val="130000"/>
               </a:lnSpc>
@@ -7036,7 +7275,7 @@
             <a:prstDash val="solid"/>
           </a:ln>
           <a:effectLst>
-            <a:outerShdw sx="100000" sy="100000" kx="0" ky="0" algn="bl" rotWithShape="0" blurRad="101600" dist="25400" dir="5400000">
+            <a:outerShdw blurRad="101600" dist="25400" dir="5400000" algn="bl" rotWithShape="0">
               <a:srgbClr val="9AA9BA">
                 <a:alpha val="18000"/>
               </a:srgbClr>
@@ -7065,7 +7304,7 @@
           <a:bodyPr wrap="square" lIns="0" tIns="0" rIns="0" bIns="0" rtlCol="0" anchor="ctr"/>
           <a:lstStyle/>
           <a:p>
-            <a:pPr indent="0" marL="0">
+            <a:pPr marL="0" indent="0">
               <a:buNone/>
             </a:pPr>
             <a:r>
@@ -7104,7 +7343,7 @@
           <a:bodyPr wrap="square" lIns="0" tIns="0" rIns="0" bIns="0" rtlCol="0" anchor="ctr"/>
           <a:lstStyle/>
           <a:p>
-            <a:pPr indent="0" marL="0">
+            <a:pPr marL="0" indent="0">
               <a:lnSpc>
                 <a:spcPct val="130000"/>
               </a:lnSpc>
@@ -7146,7 +7385,7 @@
           <a:bodyPr wrap="square" lIns="0" tIns="0" rIns="0" bIns="0" rtlCol="0" anchor="ctr"/>
           <a:lstStyle/>
           <a:p>
-            <a:pPr algn="r" indent="0" marL="0">
+            <a:pPr marL="0" indent="0" algn="r">
               <a:buNone/>
             </a:pPr>
             <a:r>
@@ -7185,7 +7424,7 @@
           <a:bodyPr wrap="square" lIns="0" tIns="0" rIns="0" bIns="0" rtlCol="0" anchor="ctr"/>
           <a:lstStyle/>
           <a:p>
-            <a:pPr indent="0" marL="0">
+            <a:pPr marL="0" indent="0">
               <a:buNone/>
             </a:pPr>
             <a:r>
@@ -7219,6 +7458,7 @@
         <a:solidFill>
           <a:srgbClr val="F7F9FC"/>
         </a:solidFill>
+        <a:effectLst/>
       </p:bgPr>
     </p:bg>
     <p:spTree>
@@ -7256,11 +7496,11 @@
           <a:bodyPr wrap="square" lIns="0" tIns="0" rIns="0" bIns="0" rtlCol="0" anchor="ctr"/>
           <a:lstStyle/>
           <a:p>
-            <a:pPr algn="l" indent="0" marL="0">
-              <a:buNone/>
-            </a:pPr>
-            <a:r>
-              <a:rPr lang="en-US" sz="1300" b="1" spc="200" kern="0" dirty="0">
+            <a:pPr marL="0" indent="0" algn="l">
+              <a:buNone/>
+            </a:pPr>
+            <a:r>
+              <a:rPr lang="en-US" sz="1300" b="1" kern="0" spc="200" dirty="0">
                 <a:solidFill>
                   <a:srgbClr val="0088A3"/>
                 </a:solidFill>
@@ -7295,7 +7535,7 @@
           <a:bodyPr wrap="square" lIns="0" tIns="0" rIns="0" bIns="0" rtlCol="0" anchor="ctr"/>
           <a:lstStyle/>
           <a:p>
-            <a:pPr algn="l" indent="0" marL="0">
+            <a:pPr marL="0" indent="0" algn="l">
               <a:buNone/>
             </a:pPr>
             <a:r>
@@ -7339,7 +7579,7 @@
             <a:prstDash val="solid"/>
           </a:ln>
           <a:effectLst>
-            <a:outerShdw sx="100000" sy="100000" kx="0" ky="0" algn="bl" rotWithShape="0" blurRad="101600" dist="25400" dir="5400000">
+            <a:outerShdw blurRad="101600" dist="25400" dir="5400000" algn="bl" rotWithShape="0">
               <a:srgbClr val="9AA9BA">
                 <a:alpha val="18000"/>
               </a:srgbClr>
@@ -7408,7 +7648,7 @@
           <a:bodyPr wrap="square" lIns="0" tIns="0" rIns="0" bIns="0" rtlCol="0" anchor="ctr"/>
           <a:lstStyle/>
           <a:p>
-            <a:pPr algn="ctr" indent="0" marL="0">
+            <a:pPr marL="0" indent="0" algn="ctr">
               <a:buNone/>
             </a:pPr>
             <a:r>
@@ -7447,7 +7687,7 @@
           <a:bodyPr wrap="square" lIns="0" tIns="0" rIns="0" bIns="0" rtlCol="0" anchor="ctr"/>
           <a:lstStyle/>
           <a:p>
-            <a:pPr indent="0" marL="0">
+            <a:pPr marL="0" indent="0">
               <a:buNone/>
             </a:pPr>
             <a:r>
@@ -7486,7 +7726,7 @@
           <a:bodyPr wrap="square" lIns="0" tIns="0" rIns="0" bIns="0" rtlCol="0" anchor="ctr"/>
           <a:lstStyle/>
           <a:p>
-            <a:pPr indent="0" marL="0">
+            <a:pPr marL="0" indent="0">
               <a:lnSpc>
                 <a:spcPct val="135000"/>
               </a:lnSpc>
@@ -7533,7 +7773,7 @@
             <a:prstDash val="solid"/>
           </a:ln>
           <a:effectLst>
-            <a:outerShdw sx="100000" sy="100000" kx="0" ky="0" algn="bl" rotWithShape="0" blurRad="101600" dist="25400" dir="5400000">
+            <a:outerShdw blurRad="101600" dist="25400" dir="5400000" algn="bl" rotWithShape="0">
               <a:srgbClr val="9AA9BA">
                 <a:alpha val="18000"/>
               </a:srgbClr>
@@ -7602,7 +7842,7 @@
           <a:bodyPr wrap="square" lIns="0" tIns="0" rIns="0" bIns="0" rtlCol="0" anchor="ctr"/>
           <a:lstStyle/>
           <a:p>
-            <a:pPr algn="ctr" indent="0" marL="0">
+            <a:pPr marL="0" indent="0" algn="ctr">
               <a:buNone/>
             </a:pPr>
             <a:r>
@@ -7641,7 +7881,7 @@
           <a:bodyPr wrap="square" lIns="0" tIns="0" rIns="0" bIns="0" rtlCol="0" anchor="ctr"/>
           <a:lstStyle/>
           <a:p>
-            <a:pPr indent="0" marL="0">
+            <a:pPr marL="0" indent="0">
               <a:buNone/>
             </a:pPr>
             <a:r>
@@ -7680,7 +7920,7 @@
           <a:bodyPr wrap="square" lIns="0" tIns="0" rIns="0" bIns="0" rtlCol="0" anchor="ctr"/>
           <a:lstStyle/>
           <a:p>
-            <a:pPr indent="0" marL="0">
+            <a:pPr marL="0" indent="0">
               <a:lnSpc>
                 <a:spcPct val="135000"/>
               </a:lnSpc>
@@ -7722,7 +7962,7 @@
           <a:bodyPr wrap="square" lIns="0" tIns="0" rIns="0" bIns="0" rtlCol="0" anchor="ctr"/>
           <a:lstStyle/>
           <a:p>
-            <a:pPr algn="r" indent="0" marL="0">
+            <a:pPr marL="0" indent="0" algn="r">
               <a:buNone/>
             </a:pPr>
             <a:r>
@@ -7761,7 +8001,7 @@
           <a:bodyPr wrap="square" lIns="0" tIns="0" rIns="0" bIns="0" rtlCol="0" anchor="ctr"/>
           <a:lstStyle/>
           <a:p>
-            <a:pPr indent="0" marL="0">
+            <a:pPr marL="0" indent="0">
               <a:buNone/>
             </a:pPr>
             <a:r>
@@ -7795,6 +8035,7 @@
         <a:solidFill>
           <a:srgbClr val="F7F9FC"/>
         </a:solidFill>
+        <a:effectLst/>
       </p:bgPr>
     </p:bg>
     <p:spTree>
@@ -7832,11 +8073,11 @@
           <a:bodyPr wrap="square" lIns="0" tIns="0" rIns="0" bIns="0" rtlCol="0" anchor="ctr"/>
           <a:lstStyle/>
           <a:p>
-            <a:pPr algn="l" indent="0" marL="0">
-              <a:buNone/>
-            </a:pPr>
-            <a:r>
-              <a:rPr lang="en-US" sz="1300" b="1" spc="200" kern="0" dirty="0">
+            <a:pPr marL="0" indent="0" algn="l">
+              <a:buNone/>
+            </a:pPr>
+            <a:r>
+              <a:rPr lang="en-US" sz="1300" b="1" kern="0" spc="200" dirty="0">
                 <a:solidFill>
                   <a:srgbClr val="0088A3"/>
                 </a:solidFill>
@@ -7871,7 +8112,7 @@
           <a:bodyPr wrap="square" lIns="0" tIns="0" rIns="0" bIns="0" rtlCol="0" anchor="ctr"/>
           <a:lstStyle/>
           <a:p>
-            <a:pPr algn="l" indent="0" marL="0">
+            <a:pPr marL="0" indent="0" algn="l">
               <a:buNone/>
             </a:pPr>
             <a:r>
@@ -7910,7 +8151,7 @@
           <a:bodyPr wrap="square" lIns="0" tIns="0" rIns="0" bIns="0" rtlCol="0" anchor="ctr"/>
           <a:lstStyle/>
           <a:p>
-            <a:pPr indent="0" marL="0">
+            <a:pPr marL="0" indent="0">
               <a:buNone/>
             </a:pPr>
             <a:r>
@@ -7961,7 +8202,7 @@
                     <a:bodyPr/>
                     <a:lstStyle/>
                     <a:p>
-                      <a:pPr algn="l" indent="0" marL="0">
+                      <a:pPr marL="0" indent="0" algn="l">
                         <a:buNone/>
                       </a:pPr>
                       <a:r>
@@ -7975,7 +8216,7 @@
                       <a:endParaRPr lang="en-US" sz="1150" dirty="0"/>
                     </a:p>
                   </a:txBody>
-                  <a:tcPr marL="91440" marR="91440" marT="45720" marB="45720" anchor="ctr">
+                  <a:tcPr anchor="ctr">
                     <a:lnL w="9525" cap="flat" cmpd="sng" algn="ctr">
                       <a:solidFill>
                         <a:srgbClr val="DDE6EF"/>
@@ -8022,7 +8263,7 @@
                     <a:bodyPr/>
                     <a:lstStyle/>
                     <a:p>
-                      <a:pPr algn="ctr" indent="0" marL="0">
+                      <a:pPr marL="0" indent="0" algn="ctr">
                         <a:buNone/>
                       </a:pPr>
                       <a:r>
@@ -8036,7 +8277,7 @@
                       <a:endParaRPr lang="en-US" sz="1150" dirty="0"/>
                     </a:p>
                   </a:txBody>
-                  <a:tcPr marL="91440" marR="91440" marT="45720" marB="45720" anchor="ctr">
+                  <a:tcPr anchor="ctr">
                     <a:lnL w="9525" cap="flat" cmpd="sng" algn="ctr">
                       <a:solidFill>
                         <a:srgbClr val="DDE6EF"/>
@@ -8083,7 +8324,7 @@
                     <a:bodyPr/>
                     <a:lstStyle/>
                     <a:p>
-                      <a:pPr algn="ctr" indent="0" marL="0">
+                      <a:pPr marL="0" indent="0" algn="ctr">
                         <a:buNone/>
                       </a:pPr>
                       <a:r>
@@ -8097,7 +8338,7 @@
                       <a:endParaRPr lang="en-US" sz="1150" dirty="0"/>
                     </a:p>
                   </a:txBody>
-                  <a:tcPr marL="91440" marR="91440" marT="45720" marB="45720" anchor="ctr">
+                  <a:tcPr anchor="ctr">
                     <a:lnL w="9525" cap="flat" cmpd="sng" algn="ctr">
                       <a:solidFill>
                         <a:srgbClr val="DDE6EF"/>
@@ -8146,7 +8387,7 @@
                     <a:bodyPr/>
                     <a:lstStyle/>
                     <a:p>
-                      <a:pPr algn="l" indent="0" marL="0">
+                      <a:pPr marL="0" indent="0" algn="l">
                         <a:buNone/>
                       </a:pPr>
                       <a:r>
@@ -8160,7 +8401,7 @@
                       <a:endParaRPr lang="en-US" sz="1150" dirty="0"/>
                     </a:p>
                   </a:txBody>
-                  <a:tcPr marL="91440" marR="91440" marT="45720" marB="45720" anchor="ctr">
+                  <a:tcPr anchor="ctr">
                     <a:lnL w="9525" cap="flat" cmpd="sng" algn="ctr">
                       <a:solidFill>
                         <a:srgbClr val="DDE6EF"/>
@@ -8207,7 +8448,7 @@
                     <a:bodyPr/>
                     <a:lstStyle/>
                     <a:p>
-                      <a:pPr algn="ctr" indent="0" marL="0">
+                      <a:pPr marL="0" indent="0" algn="ctr">
                         <a:buNone/>
                       </a:pPr>
                       <a:r>
@@ -8221,7 +8462,7 @@
                       <a:endParaRPr lang="en-US" sz="1150" dirty="0"/>
                     </a:p>
                   </a:txBody>
-                  <a:tcPr marL="91440" marR="91440" marT="45720" marB="45720" anchor="ctr">
+                  <a:tcPr anchor="ctr">
                     <a:lnL w="9525" cap="flat" cmpd="sng" algn="ctr">
                       <a:solidFill>
                         <a:srgbClr val="DDE6EF"/>
@@ -8268,7 +8509,7 @@
                     <a:bodyPr/>
                     <a:lstStyle/>
                     <a:p>
-                      <a:pPr algn="ctr" indent="0" marL="0">
+                      <a:pPr marL="0" indent="0" algn="ctr">
                         <a:buNone/>
                       </a:pPr>
                       <a:r>
@@ -8282,7 +8523,7 @@
                       <a:endParaRPr lang="en-US" sz="1150" dirty="0"/>
                     </a:p>
                   </a:txBody>
-                  <a:tcPr marL="91440" marR="91440" marT="45720" marB="45720" anchor="ctr">
+                  <a:tcPr anchor="ctr">
                     <a:lnL w="9525" cap="flat" cmpd="sng" algn="ctr">
                       <a:solidFill>
                         <a:srgbClr val="DDE6EF"/>
@@ -8331,7 +8572,7 @@
                     <a:bodyPr/>
                     <a:lstStyle/>
                     <a:p>
-                      <a:pPr algn="l" indent="0" marL="0">
+                      <a:pPr marL="0" indent="0" algn="l">
                         <a:buNone/>
                       </a:pPr>
                       <a:r>
@@ -8345,7 +8586,7 @@
                       <a:endParaRPr lang="en-US" sz="1150" dirty="0"/>
                     </a:p>
                   </a:txBody>
-                  <a:tcPr marL="91440" marR="91440" marT="45720" marB="45720" anchor="ctr">
+                  <a:tcPr anchor="ctr">
                     <a:lnL w="9525" cap="flat" cmpd="sng" algn="ctr">
                       <a:solidFill>
                         <a:srgbClr val="DDE6EF"/>
@@ -8392,7 +8633,7 @@
                     <a:bodyPr/>
                     <a:lstStyle/>
                     <a:p>
-                      <a:pPr algn="ctr" indent="0" marL="0">
+                      <a:pPr marL="0" indent="0" algn="ctr">
                         <a:buNone/>
                       </a:pPr>
                       <a:r>
@@ -8406,7 +8647,7 @@
                       <a:endParaRPr lang="en-US" sz="1150" dirty="0"/>
                     </a:p>
                   </a:txBody>
-                  <a:tcPr marL="91440" marR="91440" marT="45720" marB="45720" anchor="ctr">
+                  <a:tcPr anchor="ctr">
                     <a:lnL w="9525" cap="flat" cmpd="sng" algn="ctr">
                       <a:solidFill>
                         <a:srgbClr val="DDE6EF"/>
@@ -8453,7 +8694,7 @@
                     <a:bodyPr/>
                     <a:lstStyle/>
                     <a:p>
-                      <a:pPr algn="ctr" indent="0" marL="0">
+                      <a:pPr marL="0" indent="0" algn="ctr">
                         <a:buNone/>
                       </a:pPr>
                       <a:r>
@@ -8467,7 +8708,7 @@
                       <a:endParaRPr lang="en-US" sz="1150" dirty="0"/>
                     </a:p>
                   </a:txBody>
-                  <a:tcPr marL="91440" marR="91440" marT="45720" marB="45720" anchor="ctr">
+                  <a:tcPr anchor="ctr">
                     <a:lnL w="9525" cap="flat" cmpd="sng" algn="ctr">
                       <a:solidFill>
                         <a:srgbClr val="DDE6EF"/>
@@ -8516,7 +8757,7 @@
                     <a:bodyPr/>
                     <a:lstStyle/>
                     <a:p>
-                      <a:pPr algn="l" indent="0" marL="0">
+                      <a:pPr marL="0" indent="0" algn="l">
                         <a:buNone/>
                       </a:pPr>
                       <a:r>
@@ -8530,7 +8771,7 @@
                       <a:endParaRPr lang="en-US" sz="1150" dirty="0"/>
                     </a:p>
                   </a:txBody>
-                  <a:tcPr marL="91440" marR="91440" marT="45720" marB="45720" anchor="ctr">
+                  <a:tcPr anchor="ctr">
                     <a:lnL w="9525" cap="flat" cmpd="sng" algn="ctr">
                       <a:solidFill>
                         <a:srgbClr val="DDE6EF"/>
@@ -8577,7 +8818,7 @@
                     <a:bodyPr/>
                     <a:lstStyle/>
                     <a:p>
-                      <a:pPr algn="ctr" indent="0" marL="0">
+                      <a:pPr marL="0" indent="0" algn="ctr">
                         <a:buNone/>
                       </a:pPr>
                       <a:r>
@@ -8591,7 +8832,7 @@
                       <a:endParaRPr lang="en-US" sz="1150" dirty="0"/>
                     </a:p>
                   </a:txBody>
-                  <a:tcPr marL="91440" marR="91440" marT="45720" marB="45720" anchor="ctr">
+                  <a:tcPr anchor="ctr">
                     <a:lnL w="9525" cap="flat" cmpd="sng" algn="ctr">
                       <a:solidFill>
                         <a:srgbClr val="DDE6EF"/>
@@ -8638,7 +8879,7 @@
                     <a:bodyPr/>
                     <a:lstStyle/>
                     <a:p>
-                      <a:pPr algn="ctr" indent="0" marL="0">
+                      <a:pPr marL="0" indent="0" algn="ctr">
                         <a:buNone/>
                       </a:pPr>
                       <a:r>
@@ -8652,7 +8893,7 @@
                       <a:endParaRPr lang="en-US" sz="1150" dirty="0"/>
                     </a:p>
                   </a:txBody>
-                  <a:tcPr marL="91440" marR="91440" marT="45720" marB="45720" anchor="ctr">
+                  <a:tcPr anchor="ctr">
                     <a:lnL w="9525" cap="flat" cmpd="sng" algn="ctr">
                       <a:solidFill>
                         <a:srgbClr val="DDE6EF"/>
@@ -8701,7 +8942,7 @@
                     <a:bodyPr/>
                     <a:lstStyle/>
                     <a:p>
-                      <a:pPr algn="l" indent="0" marL="0">
+                      <a:pPr marL="0" indent="0" algn="l">
                         <a:buNone/>
                       </a:pPr>
                       <a:r>
@@ -8715,7 +8956,7 @@
                       <a:endParaRPr lang="en-US" sz="1150" dirty="0"/>
                     </a:p>
                   </a:txBody>
-                  <a:tcPr marL="91440" marR="91440" marT="45720" marB="45720" anchor="ctr">
+                  <a:tcPr anchor="ctr">
                     <a:lnL w="9525" cap="flat" cmpd="sng" algn="ctr">
                       <a:solidFill>
                         <a:srgbClr val="DDE6EF"/>
@@ -8762,7 +9003,7 @@
                     <a:bodyPr/>
                     <a:lstStyle/>
                     <a:p>
-                      <a:pPr algn="ctr" indent="0" marL="0">
+                      <a:pPr marL="0" indent="0" algn="ctr">
                         <a:buNone/>
                       </a:pPr>
                       <a:r>
@@ -8776,7 +9017,7 @@
                       <a:endParaRPr lang="en-US" sz="1150" dirty="0"/>
                     </a:p>
                   </a:txBody>
-                  <a:tcPr marL="91440" marR="91440" marT="45720" marB="45720" anchor="ctr">
+                  <a:tcPr anchor="ctr">
                     <a:lnL w="9525" cap="flat" cmpd="sng" algn="ctr">
                       <a:solidFill>
                         <a:srgbClr val="DDE6EF"/>
@@ -8823,7 +9064,7 @@
                     <a:bodyPr/>
                     <a:lstStyle/>
                     <a:p>
-                      <a:pPr algn="ctr" indent="0" marL="0">
+                      <a:pPr marL="0" indent="0" algn="ctr">
                         <a:buNone/>
                       </a:pPr>
                       <a:r>
@@ -8837,7 +9078,7 @@
                       <a:endParaRPr lang="en-US" sz="1150" dirty="0"/>
                     </a:p>
                   </a:txBody>
-                  <a:tcPr marL="91440" marR="91440" marT="45720" marB="45720" anchor="ctr">
+                  <a:tcPr anchor="ctr">
                     <a:lnL w="9525" cap="flat" cmpd="sng" algn="ctr">
                       <a:solidFill>
                         <a:srgbClr val="DDE6EF"/>
@@ -8886,7 +9127,7 @@
                     <a:bodyPr/>
                     <a:lstStyle/>
                     <a:p>
-                      <a:pPr algn="l" indent="0" marL="0">
+                      <a:pPr marL="0" indent="0" algn="l">
                         <a:buNone/>
                       </a:pPr>
                       <a:r>
@@ -8900,7 +9141,7 @@
                       <a:endParaRPr lang="en-US" sz="1150" dirty="0"/>
                     </a:p>
                   </a:txBody>
-                  <a:tcPr marL="91440" marR="91440" marT="45720" marB="45720" anchor="ctr">
+                  <a:tcPr anchor="ctr">
                     <a:lnL w="9525" cap="flat" cmpd="sng" algn="ctr">
                       <a:solidFill>
                         <a:srgbClr val="DDE6EF"/>
@@ -8947,7 +9188,7 @@
                     <a:bodyPr/>
                     <a:lstStyle/>
                     <a:p>
-                      <a:pPr algn="ctr" indent="0" marL="0">
+                      <a:pPr marL="0" indent="0" algn="ctr">
                         <a:buNone/>
                       </a:pPr>
                       <a:r>
@@ -8961,7 +9202,7 @@
                       <a:endParaRPr lang="en-US" sz="1150" dirty="0"/>
                     </a:p>
                   </a:txBody>
-                  <a:tcPr marL="91440" marR="91440" marT="45720" marB="45720" anchor="ctr">
+                  <a:tcPr anchor="ctr">
                     <a:lnL w="9525" cap="flat" cmpd="sng" algn="ctr">
                       <a:solidFill>
                         <a:srgbClr val="DDE6EF"/>
@@ -9008,7 +9249,7 @@
                     <a:bodyPr/>
                     <a:lstStyle/>
                     <a:p>
-                      <a:pPr algn="ctr" indent="0" marL="0">
+                      <a:pPr marL="0" indent="0" algn="ctr">
                         <a:buNone/>
                       </a:pPr>
                       <a:r>
@@ -9022,7 +9263,7 @@
                       <a:endParaRPr lang="en-US" sz="1150" dirty="0"/>
                     </a:p>
                   </a:txBody>
-                  <a:tcPr marL="91440" marR="91440" marT="45720" marB="45720" anchor="ctr">
+                  <a:tcPr anchor="ctr">
                     <a:lnL w="9525" cap="flat" cmpd="sng" algn="ctr">
                       <a:solidFill>
                         <a:srgbClr val="DDE6EF"/>
@@ -9090,7 +9331,7 @@
           <a:bodyPr wrap="square" lIns="0" tIns="0" rIns="0" bIns="0" rtlCol="0" anchor="ctr"/>
           <a:lstStyle/>
           <a:p>
-            <a:pPr indent="0" marL="0">
+            <a:pPr marL="0" indent="0">
               <a:buNone/>
             </a:pPr>
             <a:r>
@@ -9129,7 +9370,7 @@
           <a:bodyPr wrap="square" lIns="0" tIns="0" rIns="0" bIns="0" rtlCol="0" anchor="ctr"/>
           <a:lstStyle/>
           <a:p>
-            <a:pPr indent="0" marL="0">
+            <a:pPr marL="0" indent="0">
               <a:lnSpc>
                 <a:spcPct val="135000"/>
               </a:lnSpc>
@@ -9146,58 +9387,46 @@
               </a:rPr>
               <a:t>FCFS: </a:t>
             </a:r>
-            <a:pPr indent="0" marL="0">
+            <a:r>
+              <a:rPr lang="en-US" sz="1200" dirty="0">
+                <a:solidFill>
+                  <a:srgbClr val="1B263B"/>
+                </a:solidFill>
+                <a:latin typeface="Calibri" pitchFamily="34" charset="0"/>
+                <a:ea typeface="Calibri" pitchFamily="34" charset="-122"/>
+                <a:cs typeface="Calibri" pitchFamily="34" charset="-120"/>
+              </a:rPr>
+              <a:t>เก็บ Process แต่ละตัวครั้งเดียวใน Queue ⇒ O(n)</a:t>
+            </a:r>
+            <a:endParaRPr lang="en-US" sz="1200" dirty="0"/>
+          </a:p>
+          <a:p>
+            <a:pPr marL="0" indent="0">
               <a:lnSpc>
                 <a:spcPct val="135000"/>
               </a:lnSpc>
               <a:buNone/>
             </a:pPr>
             <a:r>
-              <a:rPr lang="en-US" sz="1200" dirty="0">
-                <a:solidFill>
-                  <a:srgbClr val="1B263B"/>
+              <a:rPr lang="en-US" sz="1200" b="1" dirty="0">
+                <a:solidFill>
+                  <a:srgbClr val="0088A3"/>
                 </a:solidFill>
                 <a:latin typeface="Calibri" pitchFamily="34" charset="0"/>
                 <a:ea typeface="Calibri" pitchFamily="34" charset="-122"/>
                 <a:cs typeface="Calibri" pitchFamily="34" charset="-120"/>
               </a:rPr>
-              <a:t>เก็บ Process แต่ละตัวครั้งเดียวใน Queue ⇒ O(n)</a:t>
-            </a:r>
-            <a:endParaRPr lang="en-US" sz="1200" dirty="0"/>
-          </a:p>
-          <a:p>
-            <a:pPr indent="0" marL="0">
-              <a:lnSpc>
-                <a:spcPct val="135000"/>
-              </a:lnSpc>
-              <a:buNone/>
-            </a:pPr>
-            <a:r>
-              <a:rPr lang="en-US" sz="1200" b="1" dirty="0">
-                <a:solidFill>
-                  <a:srgbClr val="0088A3"/>
+              <a:t>Round Robin: </a:t>
+            </a:r>
+            <a:r>
+              <a:rPr lang="en-US" sz="1200" dirty="0">
+                <a:solidFill>
+                  <a:srgbClr val="1B263B"/>
                 </a:solidFill>
                 <a:latin typeface="Calibri" pitchFamily="34" charset="0"/>
                 <a:ea typeface="Calibri" pitchFamily="34" charset="-122"/>
                 <a:cs typeface="Calibri" pitchFamily="34" charset="-120"/>
               </a:rPr>
-              <a:t>Round Robin: </a:t>
-            </a:r>
-            <a:pPr indent="0" marL="0">
-              <a:lnSpc>
-                <a:spcPct val="135000"/>
-              </a:lnSpc>
-              <a:buNone/>
-            </a:pPr>
-            <a:r>
-              <a:rPr lang="en-US" sz="1200" dirty="0">
-                <a:solidFill>
-                  <a:srgbClr val="1B263B"/>
-                </a:solidFill>
-                <a:latin typeface="Calibri" pitchFamily="34" charset="0"/>
-                <a:ea typeface="Calibri" pitchFamily="34" charset="-122"/>
-                <a:cs typeface="Calibri" pitchFamily="34" charset="-120"/>
-              </a:rPr>
               <a:t>ณ เวลาใดเวลาหนึ่งมี 1 Object ต่อ Process (ใช้ reference เดิม) ⇒ ยังคงเป็น O(n)</a:t>
             </a:r>
             <a:endParaRPr lang="en-US" sz="1200" dirty="0"/>
@@ -9225,7 +9454,7 @@
           <a:bodyPr wrap="square" lIns="0" tIns="0" rIns="0" bIns="0" rtlCol="0" anchor="ctr"/>
           <a:lstStyle/>
           <a:p>
-            <a:pPr indent="0" marL="0">
+            <a:pPr marL="0" indent="0">
               <a:buNone/>
             </a:pPr>
             <a:r>
@@ -9269,7 +9498,7 @@
             <a:prstDash val="solid"/>
           </a:ln>
           <a:effectLst>
-            <a:outerShdw sx="100000" sy="100000" kx="0" ky="0" algn="bl" rotWithShape="0" blurRad="101600" dist="25400" dir="5400000">
+            <a:outerShdw blurRad="101600" dist="25400" dir="5400000" algn="bl" rotWithShape="0">
               <a:srgbClr val="9AA9BA">
                 <a:alpha val="18000"/>
               </a:srgbClr>
@@ -9298,7 +9527,7 @@
           <a:bodyPr wrap="square" lIns="0" tIns="0" rIns="0" bIns="0" rtlCol="0" anchor="ctr"/>
           <a:lstStyle/>
           <a:p>
-            <a:pPr indent="0" marL="0">
+            <a:pPr marL="0" indent="0">
               <a:buNone/>
             </a:pPr>
             <a:r>
@@ -9337,7 +9566,7 @@
           <a:bodyPr wrap="square" lIns="0" tIns="0" rIns="0" bIns="0" rtlCol="0" anchor="ctr"/>
           <a:lstStyle/>
           <a:p>
-            <a:pPr indent="0" marL="0">
+            <a:pPr marL="0" indent="0">
               <a:buNone/>
             </a:pPr>
             <a:r>
@@ -9376,7 +9605,7 @@
           <a:bodyPr wrap="square" lIns="0" tIns="0" rIns="0" bIns="0" rtlCol="0" anchor="ctr"/>
           <a:lstStyle/>
           <a:p>
-            <a:pPr indent="0" marL="0">
+            <a:pPr marL="0" indent="0">
               <a:lnSpc>
                 <a:spcPct val="125000"/>
               </a:lnSpc>
@@ -9423,7 +9652,7 @@
             <a:prstDash val="solid"/>
           </a:ln>
           <a:effectLst>
-            <a:outerShdw sx="100000" sy="100000" kx="0" ky="0" algn="bl" rotWithShape="0" blurRad="101600" dist="25400" dir="5400000">
+            <a:outerShdw blurRad="101600" dist="25400" dir="5400000" algn="bl" rotWithShape="0">
               <a:srgbClr val="9AA9BA">
                 <a:alpha val="18000"/>
               </a:srgbClr>
@@ -9433,7 +9662,7 @@
       </p:sp>
       <p:sp>
         <p:nvSpPr>
-          <p:cNvPr id="14" name="Text 11"/>
+          <p:cNvPr id="5" name="Text 11"/>
           <p:cNvSpPr/>
           <p:nvPr/>
         </p:nvSpPr>
@@ -9452,7 +9681,7 @@
           <a:bodyPr wrap="square" lIns="0" tIns="0" rIns="0" bIns="0" rtlCol="0" anchor="ctr"/>
           <a:lstStyle/>
           <a:p>
-            <a:pPr indent="0" marL="0">
+            <a:pPr marL="0" indent="0">
               <a:buNone/>
             </a:pPr>
             <a:r>
@@ -9491,7 +9720,7 @@
           <a:bodyPr wrap="square" lIns="0" tIns="0" rIns="0" bIns="0" rtlCol="0" anchor="ctr"/>
           <a:lstStyle/>
           <a:p>
-            <a:pPr indent="0" marL="0">
+            <a:pPr marL="0" indent="0">
               <a:buNone/>
             </a:pPr>
             <a:r>
@@ -9530,7 +9759,7 @@
           <a:bodyPr wrap="square" lIns="0" tIns="0" rIns="0" bIns="0" rtlCol="0" anchor="ctr"/>
           <a:lstStyle/>
           <a:p>
-            <a:pPr indent="0" marL="0">
+            <a:pPr marL="0" indent="0">
               <a:lnSpc>
                 <a:spcPct val="125000"/>
               </a:lnSpc>
@@ -9572,7 +9801,7 @@
           <a:bodyPr wrap="square" lIns="0" tIns="0" rIns="0" bIns="0" rtlCol="0" anchor="ctr"/>
           <a:lstStyle/>
           <a:p>
-            <a:pPr algn="r" indent="0" marL="0">
+            <a:pPr marL="0" indent="0" algn="r">
               <a:buNone/>
             </a:pPr>
             <a:r>
@@ -9611,7 +9840,7 @@
           <a:bodyPr wrap="square" lIns="0" tIns="0" rIns="0" bIns="0" rtlCol="0" anchor="ctr"/>
           <a:lstStyle/>
           <a:p>
-            <a:pPr indent="0" marL="0">
+            <a:pPr marL="0" indent="0">
               <a:buNone/>
             </a:pPr>
             <a:r>
@@ -9645,6 +9874,7 @@
         <a:solidFill>
           <a:srgbClr val="F7F9FC"/>
         </a:solidFill>
+        <a:effectLst/>
       </p:bgPr>
     </p:bg>
     <p:spTree>
@@ -9682,11 +9912,11 @@
           <a:bodyPr wrap="square" lIns="0" tIns="0" rIns="0" bIns="0" rtlCol="0" anchor="ctr"/>
           <a:lstStyle/>
           <a:p>
-            <a:pPr algn="l" indent="0" marL="0">
-              <a:buNone/>
-            </a:pPr>
-            <a:r>
-              <a:rPr lang="en-US" sz="1300" b="1" spc="200" kern="0" dirty="0">
+            <a:pPr marL="0" indent="0" algn="l">
+              <a:buNone/>
+            </a:pPr>
+            <a:r>
+              <a:rPr lang="en-US" sz="1300" b="1" kern="0" spc="200" dirty="0">
                 <a:solidFill>
                   <a:srgbClr val="0088A3"/>
                 </a:solidFill>
@@ -9721,7 +9951,7 @@
           <a:bodyPr wrap="square" lIns="0" tIns="0" rIns="0" bIns="0" rtlCol="0" anchor="ctr"/>
           <a:lstStyle/>
           <a:p>
-            <a:pPr algn="l" indent="0" marL="0">
+            <a:pPr marL="0" indent="0" algn="l">
               <a:buNone/>
             </a:pPr>
             <a:r>
@@ -9765,7 +9995,7 @@
             <a:prstDash val="solid"/>
           </a:ln>
           <a:effectLst>
-            <a:outerShdw sx="100000" sy="100000" kx="0" ky="0" algn="bl" rotWithShape="0" blurRad="101600" dist="25400" dir="5400000">
+            <a:outerShdw blurRad="101600" dist="25400" dir="5400000" algn="bl" rotWithShape="0">
               <a:srgbClr val="9AA9BA">
                 <a:alpha val="18000"/>
               </a:srgbClr>
@@ -9814,7 +10044,7 @@
           <a:bodyPr wrap="square" lIns="0" tIns="0" rIns="0" bIns="0" rtlCol="0" anchor="ctr"/>
           <a:lstStyle/>
           <a:p>
-            <a:pPr algn="ctr" indent="0" marL="0">
+            <a:pPr marL="0" indent="0" algn="ctr">
               <a:buNone/>
             </a:pPr>
             <a:r>
@@ -9853,7 +10083,7 @@
           <a:bodyPr wrap="square" lIns="0" tIns="0" rIns="0" bIns="0" rtlCol="0" anchor="ctr"/>
           <a:lstStyle/>
           <a:p>
-            <a:pPr indent="0" marL="0">
+            <a:pPr marL="0" indent="0">
               <a:buNone/>
             </a:pPr>
             <a:r>
@@ -9892,7 +10122,7 @@
           <a:bodyPr wrap="square" lIns="0" tIns="0" rIns="0" bIns="0" rtlCol="0" anchor="ctr"/>
           <a:lstStyle/>
           <a:p>
-            <a:pPr indent="0" marL="0">
+            <a:pPr marL="0" indent="0">
               <a:lnSpc>
                 <a:spcPct val="115000"/>
               </a:lnSpc>
@@ -9939,7 +10169,7 @@
             <a:prstDash val="solid"/>
           </a:ln>
           <a:effectLst>
-            <a:outerShdw sx="100000" sy="100000" kx="0" ky="0" algn="bl" rotWithShape="0" blurRad="101600" dist="25400" dir="5400000">
+            <a:outerShdw blurRad="101600" dist="25400" dir="5400000" algn="bl" rotWithShape="0">
               <a:srgbClr val="9AA9BA">
                 <a:alpha val="18000"/>
               </a:srgbClr>
@@ -9988,7 +10218,7 @@
           <a:bodyPr wrap="square" lIns="0" tIns="0" rIns="0" bIns="0" rtlCol="0" anchor="ctr"/>
           <a:lstStyle/>
           <a:p>
-            <a:pPr algn="ctr" indent="0" marL="0">
+            <a:pPr marL="0" indent="0" algn="ctr">
               <a:buNone/>
             </a:pPr>
             <a:r>
@@ -10027,7 +10257,7 @@
           <a:bodyPr wrap="square" lIns="0" tIns="0" rIns="0" bIns="0" rtlCol="0" anchor="ctr"/>
           <a:lstStyle/>
           <a:p>
-            <a:pPr indent="0" marL="0">
+            <a:pPr marL="0" indent="0">
               <a:buNone/>
             </a:pPr>
             <a:r>
@@ -10066,7 +10296,7 @@
           <a:bodyPr wrap="square" lIns="0" tIns="0" rIns="0" bIns="0" rtlCol="0" anchor="ctr"/>
           <a:lstStyle/>
           <a:p>
-            <a:pPr indent="0" marL="0">
+            <a:pPr marL="0" indent="0">
               <a:lnSpc>
                 <a:spcPct val="115000"/>
               </a:lnSpc>
@@ -10113,7 +10343,7 @@
             <a:prstDash val="solid"/>
           </a:ln>
           <a:effectLst>
-            <a:outerShdw sx="100000" sy="100000" kx="0" ky="0" algn="bl" rotWithShape="0" blurRad="101600" dist="25400" dir="5400000">
+            <a:outerShdw blurRad="101600" dist="25400" dir="5400000" algn="bl" rotWithShape="0">
               <a:srgbClr val="9AA9BA">
                 <a:alpha val="18000"/>
               </a:srgbClr>
@@ -10162,7 +10392,7 @@
           <a:bodyPr wrap="square" lIns="0" tIns="0" rIns="0" bIns="0" rtlCol="0" anchor="ctr"/>
           <a:lstStyle/>
           <a:p>
-            <a:pPr algn="ctr" indent="0" marL="0">
+            <a:pPr marL="0" indent="0" algn="ctr">
               <a:buNone/>
             </a:pPr>
             <a:r>
@@ -10201,7 +10431,7 @@
           <a:bodyPr wrap="square" lIns="0" tIns="0" rIns="0" bIns="0" rtlCol="0" anchor="ctr"/>
           <a:lstStyle/>
           <a:p>
-            <a:pPr indent="0" marL="0">
+            <a:pPr marL="0" indent="0">
               <a:buNone/>
             </a:pPr>
             <a:r>
@@ -10240,7 +10470,7 @@
           <a:bodyPr wrap="square" lIns="0" tIns="0" rIns="0" bIns="0" rtlCol="0" anchor="ctr"/>
           <a:lstStyle/>
           <a:p>
-            <a:pPr indent="0" marL="0">
+            <a:pPr marL="0" indent="0">
               <a:lnSpc>
                 <a:spcPct val="115000"/>
               </a:lnSpc>
@@ -10287,7 +10517,7 @@
             <a:prstDash val="solid"/>
           </a:ln>
           <a:effectLst>
-            <a:outerShdw sx="100000" sy="100000" kx="0" ky="0" algn="bl" rotWithShape="0" blurRad="101600" dist="25400" dir="5400000">
+            <a:outerShdw blurRad="101600" dist="25400" dir="5400000" algn="bl" rotWithShape="0">
               <a:srgbClr val="9AA9BA">
                 <a:alpha val="18000"/>
               </a:srgbClr>
@@ -10316,7 +10546,7 @@
           <a:bodyPr wrap="square" lIns="0" tIns="0" rIns="0" bIns="0" rtlCol="0" anchor="ctr"/>
           <a:lstStyle/>
           <a:p>
-            <a:pPr indent="0" marL="0">
+            <a:pPr marL="0" indent="0">
               <a:buNone/>
             </a:pPr>
             <a:r>
@@ -10355,7 +10585,7 @@
           <a:bodyPr wrap="square" lIns="0" tIns="0" rIns="0" bIns="0" rtlCol="0" anchor="ctr"/>
           <a:lstStyle/>
           <a:p>
-            <a:pPr indent="0" marL="0">
+            <a:pPr marL="0" indent="0">
               <a:lnSpc>
                 <a:spcPct val="130000"/>
               </a:lnSpc>
@@ -10420,7 +10650,7 @@
           <a:bodyPr wrap="square" lIns="0" tIns="0" rIns="0" bIns="0" rtlCol="0" anchor="ctr"/>
           <a:lstStyle/>
           <a:p>
-            <a:pPr indent="0" marL="0">
+            <a:pPr marL="0" indent="0">
               <a:lnSpc>
                 <a:spcPct val="140000"/>
               </a:lnSpc>
@@ -10440,7 +10670,7 @@
             <a:endParaRPr lang="en-US" sz="1200" dirty="0"/>
           </a:p>
           <a:p>
-            <a:pPr indent="0" marL="0">
+            <a:pPr marL="0" indent="0">
               <a:lnSpc>
                 <a:spcPct val="140000"/>
               </a:lnSpc>
@@ -10460,7 +10690,7 @@
             <a:endParaRPr lang="en-US" sz="1200" dirty="0"/>
           </a:p>
           <a:p>
-            <a:pPr indent="0" marL="0">
+            <a:pPr marL="0" indent="0">
               <a:lnSpc>
                 <a:spcPct val="140000"/>
               </a:lnSpc>
@@ -10469,7 +10699,7 @@
             <a:endParaRPr lang="en-US" sz="1200" dirty="0"/>
           </a:p>
           <a:p>
-            <a:pPr indent="0" marL="0">
+            <a:pPr marL="0" indent="0">
               <a:lnSpc>
                 <a:spcPct val="140000"/>
               </a:lnSpc>
@@ -10489,7 +10719,7 @@
             <a:endParaRPr lang="en-US" sz="1200" dirty="0"/>
           </a:p>
           <a:p>
-            <a:pPr indent="0" marL="0">
+            <a:pPr marL="0" indent="0">
               <a:lnSpc>
                 <a:spcPct val="140000"/>
               </a:lnSpc>
@@ -10531,7 +10761,7 @@
           <a:bodyPr wrap="square" lIns="0" tIns="0" rIns="0" bIns="0" rtlCol="0" anchor="ctr"/>
           <a:lstStyle/>
           <a:p>
-            <a:pPr indent="0" marL="0">
+            <a:pPr marL="0" indent="0">
               <a:buNone/>
             </a:pPr>
             <a:r>
@@ -10570,7 +10800,7 @@
           <a:bodyPr wrap="square" lIns="0" tIns="0" rIns="0" bIns="0" rtlCol="0" anchor="ctr"/>
           <a:lstStyle/>
           <a:p>
-            <a:pPr algn="r" indent="0" marL="0">
+            <a:pPr marL="0" indent="0" algn="r">
               <a:buNone/>
             </a:pPr>
             <a:r>
@@ -10609,7 +10839,7 @@
           <a:bodyPr wrap="square" lIns="0" tIns="0" rIns="0" bIns="0" rtlCol="0" anchor="ctr"/>
           <a:lstStyle/>
           <a:p>
-            <a:pPr indent="0" marL="0">
+            <a:pPr marL="0" indent="0">
               <a:buNone/>
             </a:pPr>
             <a:r>
@@ -10643,6 +10873,7 @@
         <a:solidFill>
           <a:srgbClr val="F7F9FC"/>
         </a:solidFill>
+        <a:effectLst/>
       </p:bgPr>
     </p:bg>
     <p:spTree>
@@ -10680,11 +10911,11 @@
           <a:bodyPr wrap="square" lIns="0" tIns="0" rIns="0" bIns="0" rtlCol="0" anchor="ctr"/>
           <a:lstStyle/>
           <a:p>
-            <a:pPr algn="l" indent="0" marL="0">
-              <a:buNone/>
-            </a:pPr>
-            <a:r>
-              <a:rPr lang="en-US" sz="1300" b="1" spc="200" kern="0" dirty="0">
+            <a:pPr marL="0" indent="0" algn="l">
+              <a:buNone/>
+            </a:pPr>
+            <a:r>
+              <a:rPr lang="en-US" sz="1300" b="1" kern="0" spc="200" dirty="0">
                 <a:solidFill>
                   <a:srgbClr val="0088A3"/>
                 </a:solidFill>
@@ -10719,7 +10950,7 @@
           <a:bodyPr wrap="square" lIns="0" tIns="0" rIns="0" bIns="0" rtlCol="0" anchor="ctr"/>
           <a:lstStyle/>
           <a:p>
-            <a:pPr algn="l" indent="0" marL="0">
+            <a:pPr marL="0" indent="0" algn="l">
               <a:buNone/>
             </a:pPr>
             <a:r>
@@ -10763,7 +10994,7 @@
             <a:prstDash val="solid"/>
           </a:ln>
           <a:effectLst>
-            <a:outerShdw sx="100000" sy="100000" kx="0" ky="0" algn="bl" rotWithShape="0" blurRad="101600" dist="25400" dir="5400000">
+            <a:outerShdw blurRad="101600" dist="25400" dir="5400000" algn="bl" rotWithShape="0">
               <a:srgbClr val="9AA9BA">
                 <a:alpha val="18000"/>
               </a:srgbClr>
@@ -10812,7 +11043,7 @@
           <a:bodyPr wrap="square" lIns="0" tIns="0" rIns="0" bIns="0" rtlCol="0" anchor="ctr"/>
           <a:lstStyle/>
           <a:p>
-            <a:pPr algn="ctr" indent="0" marL="0">
+            <a:pPr marL="0" indent="0" algn="ctr">
               <a:buNone/>
             </a:pPr>
             <a:r>
@@ -10851,7 +11082,7 @@
           <a:bodyPr wrap="square" lIns="0" tIns="0" rIns="0" bIns="0" rtlCol="0" anchor="ctr"/>
           <a:lstStyle/>
           <a:p>
-            <a:pPr indent="0" marL="0">
+            <a:pPr marL="0" indent="0">
               <a:buNone/>
             </a:pPr>
             <a:r>
@@ -10890,7 +11121,7 @@
           <a:bodyPr wrap="square" lIns="0" tIns="0" rIns="0" bIns="0" rtlCol="0" anchor="ctr"/>
           <a:lstStyle/>
           <a:p>
-            <a:pPr indent="0" marL="0">
+            <a:pPr marL="0" indent="0">
               <a:lnSpc>
                 <a:spcPct val="125000"/>
               </a:lnSpc>
@@ -10937,7 +11168,7 @@
             <a:prstDash val="solid"/>
           </a:ln>
           <a:effectLst>
-            <a:outerShdw sx="100000" sy="100000" kx="0" ky="0" algn="bl" rotWithShape="0" blurRad="101600" dist="25400" dir="5400000">
+            <a:outerShdw blurRad="101600" dist="25400" dir="5400000" algn="bl" rotWithShape="0">
               <a:srgbClr val="9AA9BA">
                 <a:alpha val="18000"/>
               </a:srgbClr>
@@ -10986,7 +11217,7 @@
           <a:bodyPr wrap="square" lIns="0" tIns="0" rIns="0" bIns="0" rtlCol="0" anchor="ctr"/>
           <a:lstStyle/>
           <a:p>
-            <a:pPr algn="ctr" indent="0" marL="0">
+            <a:pPr marL="0" indent="0" algn="ctr">
               <a:buNone/>
             </a:pPr>
             <a:r>
@@ -11025,7 +11256,7 @@
           <a:bodyPr wrap="square" lIns="0" tIns="0" rIns="0" bIns="0" rtlCol="0" anchor="ctr"/>
           <a:lstStyle/>
           <a:p>
-            <a:pPr indent="0" marL="0">
+            <a:pPr marL="0" indent="0">
               <a:buNone/>
             </a:pPr>
             <a:r>
@@ -11064,7 +11295,7 @@
           <a:bodyPr wrap="square" lIns="0" tIns="0" rIns="0" bIns="0" rtlCol="0" anchor="ctr"/>
           <a:lstStyle/>
           <a:p>
-            <a:pPr indent="0" marL="0">
+            <a:pPr marL="0" indent="0">
               <a:lnSpc>
                 <a:spcPct val="125000"/>
               </a:lnSpc>
@@ -11111,7 +11342,7 @@
             <a:prstDash val="solid"/>
           </a:ln>
           <a:effectLst>
-            <a:outerShdw sx="100000" sy="100000" kx="0" ky="0" algn="bl" rotWithShape="0" blurRad="101600" dist="25400" dir="5400000">
+            <a:outerShdw blurRad="101600" dist="25400" dir="5400000" algn="bl" rotWithShape="0">
               <a:srgbClr val="9AA9BA">
                 <a:alpha val="18000"/>
               </a:srgbClr>
@@ -11160,7 +11391,7 @@
           <a:bodyPr wrap="square" lIns="0" tIns="0" rIns="0" bIns="0" rtlCol="0" anchor="ctr"/>
           <a:lstStyle/>
           <a:p>
-            <a:pPr algn="ctr" indent="0" marL="0">
+            <a:pPr marL="0" indent="0" algn="ctr">
               <a:buNone/>
             </a:pPr>
             <a:r>
@@ -11199,7 +11430,7 @@
           <a:bodyPr wrap="square" lIns="0" tIns="0" rIns="0" bIns="0" rtlCol="0" anchor="ctr"/>
           <a:lstStyle/>
           <a:p>
-            <a:pPr indent="0" marL="0">
+            <a:pPr marL="0" indent="0">
               <a:buNone/>
             </a:pPr>
             <a:r>
@@ -11238,7 +11469,7 @@
           <a:bodyPr wrap="square" lIns="0" tIns="0" rIns="0" bIns="0" rtlCol="0" anchor="ctr"/>
           <a:lstStyle/>
           <a:p>
-            <a:pPr indent="0" marL="0">
+            <a:pPr marL="0" indent="0">
               <a:lnSpc>
                 <a:spcPct val="125000"/>
               </a:lnSpc>
@@ -11285,7 +11516,7 @@
             <a:prstDash val="solid"/>
           </a:ln>
           <a:effectLst>
-            <a:outerShdw sx="100000" sy="100000" kx="0" ky="0" algn="bl" rotWithShape="0" blurRad="101600" dist="25400" dir="5400000">
+            <a:outerShdw blurRad="101600" dist="25400" dir="5400000" algn="bl" rotWithShape="0">
               <a:srgbClr val="9AA9BA">
                 <a:alpha val="18000"/>
               </a:srgbClr>
@@ -11334,7 +11565,7 @@
           <a:bodyPr wrap="square" lIns="0" tIns="0" rIns="0" bIns="0" rtlCol="0" anchor="ctr"/>
           <a:lstStyle/>
           <a:p>
-            <a:pPr algn="ctr" indent="0" marL="0">
+            <a:pPr marL="0" indent="0" algn="ctr">
               <a:buNone/>
             </a:pPr>
             <a:r>
@@ -11373,7 +11604,7 @@
           <a:bodyPr wrap="square" lIns="0" tIns="0" rIns="0" bIns="0" rtlCol="0" anchor="ctr"/>
           <a:lstStyle/>
           <a:p>
-            <a:pPr indent="0" marL="0">
+            <a:pPr marL="0" indent="0">
               <a:buNone/>
             </a:pPr>
             <a:r>
@@ -11412,7 +11643,7 @@
           <a:bodyPr wrap="square" lIns="0" tIns="0" rIns="0" bIns="0" rtlCol="0" anchor="ctr"/>
           <a:lstStyle/>
           <a:p>
-            <a:pPr indent="0" marL="0">
+            <a:pPr marL="0" indent="0">
               <a:lnSpc>
                 <a:spcPct val="125000"/>
               </a:lnSpc>
@@ -11459,7 +11690,7 @@
             <a:prstDash val="solid"/>
           </a:ln>
           <a:effectLst>
-            <a:outerShdw sx="100000" sy="100000" kx="0" ky="0" algn="bl" rotWithShape="0" blurRad="101600" dist="25400" dir="5400000">
+            <a:outerShdw blurRad="101600" dist="25400" dir="5400000" algn="bl" rotWithShape="0">
               <a:srgbClr val="9AA9BA">
                 <a:alpha val="18000"/>
               </a:srgbClr>
@@ -11508,7 +11739,7 @@
           <a:bodyPr wrap="square" lIns="0" tIns="0" rIns="0" bIns="0" rtlCol="0" anchor="ctr"/>
           <a:lstStyle/>
           <a:p>
-            <a:pPr algn="ctr" indent="0" marL="0">
+            <a:pPr marL="0" indent="0" algn="ctr">
               <a:buNone/>
             </a:pPr>
             <a:r>
@@ -11547,7 +11778,7 @@
           <a:bodyPr wrap="square" lIns="0" tIns="0" rIns="0" bIns="0" rtlCol="0" anchor="ctr"/>
           <a:lstStyle/>
           <a:p>
-            <a:pPr indent="0" marL="0">
+            <a:pPr marL="0" indent="0">
               <a:buNone/>
             </a:pPr>
             <a:r>
@@ -11586,7 +11817,7 @@
           <a:bodyPr wrap="square" lIns="0" tIns="0" rIns="0" bIns="0" rtlCol="0" anchor="ctr"/>
           <a:lstStyle/>
           <a:p>
-            <a:pPr indent="0" marL="0">
+            <a:pPr marL="0" indent="0">
               <a:lnSpc>
                 <a:spcPct val="125000"/>
               </a:lnSpc>
@@ -11633,7 +11864,7 @@
             <a:prstDash val="solid"/>
           </a:ln>
           <a:effectLst>
-            <a:outerShdw sx="100000" sy="100000" kx="0" ky="0" algn="bl" rotWithShape="0" blurRad="101600" dist="25400" dir="5400000">
+            <a:outerShdw blurRad="101600" dist="25400" dir="5400000" algn="bl" rotWithShape="0">
               <a:srgbClr val="9AA9BA">
                 <a:alpha val="18000"/>
               </a:srgbClr>
@@ -11682,7 +11913,7 @@
           <a:bodyPr wrap="square" lIns="0" tIns="0" rIns="0" bIns="0" rtlCol="0" anchor="ctr"/>
           <a:lstStyle/>
           <a:p>
-            <a:pPr algn="ctr" indent="0" marL="0">
+            <a:pPr marL="0" indent="0" algn="ctr">
               <a:buNone/>
             </a:pPr>
             <a:r>
@@ -11721,7 +11952,7 @@
           <a:bodyPr wrap="square" lIns="0" tIns="0" rIns="0" bIns="0" rtlCol="0" anchor="ctr"/>
           <a:lstStyle/>
           <a:p>
-            <a:pPr indent="0" marL="0">
+            <a:pPr marL="0" indent="0">
               <a:buNone/>
             </a:pPr>
             <a:r>
@@ -11760,7 +11991,7 @@
           <a:bodyPr wrap="square" lIns="0" tIns="0" rIns="0" bIns="0" rtlCol="0" anchor="ctr"/>
           <a:lstStyle/>
           <a:p>
-            <a:pPr indent="0" marL="0">
+            <a:pPr marL="0" indent="0">
               <a:lnSpc>
                 <a:spcPct val="125000"/>
               </a:lnSpc>
@@ -11802,7 +12033,7 @@
           <a:bodyPr wrap="square" lIns="0" tIns="0" rIns="0" bIns="0" rtlCol="0" anchor="ctr"/>
           <a:lstStyle/>
           <a:p>
-            <a:pPr algn="r" indent="0" marL="0">
+            <a:pPr marL="0" indent="0" algn="r">
               <a:buNone/>
             </a:pPr>
             <a:r>
@@ -11841,7 +12072,7 @@
           <a:bodyPr wrap="square" lIns="0" tIns="0" rIns="0" bIns="0" rtlCol="0" anchor="ctr"/>
           <a:lstStyle/>
           <a:p>
-            <a:pPr indent="0" marL="0">
+            <a:pPr marL="0" indent="0">
               <a:buNone/>
             </a:pPr>
             <a:r>
@@ -11875,6 +12106,7 @@
         <a:solidFill>
           <a:srgbClr val="F7F9FC"/>
         </a:solidFill>
+        <a:effectLst/>
       </p:bgPr>
     </p:bg>
     <p:spTree>
@@ -11912,11 +12144,11 @@
           <a:bodyPr wrap="square" lIns="0" tIns="0" rIns="0" bIns="0" rtlCol="0" anchor="ctr"/>
           <a:lstStyle/>
           <a:p>
-            <a:pPr algn="l" indent="0" marL="0">
-              <a:buNone/>
-            </a:pPr>
-            <a:r>
-              <a:rPr lang="en-US" sz="1300" b="1" spc="200" kern="0" dirty="0">
+            <a:pPr marL="0" indent="0" algn="l">
+              <a:buNone/>
+            </a:pPr>
+            <a:r>
+              <a:rPr lang="en-US" sz="1300" b="1" kern="0" spc="200" dirty="0">
                 <a:solidFill>
                   <a:srgbClr val="0088A3"/>
                 </a:solidFill>
@@ -11951,7 +12183,7 @@
           <a:bodyPr wrap="square" lIns="0" tIns="0" rIns="0" bIns="0" rtlCol="0" anchor="ctr"/>
           <a:lstStyle/>
           <a:p>
-            <a:pPr algn="l" indent="0" marL="0">
+            <a:pPr marL="0" indent="0" algn="l">
               <a:buNone/>
             </a:pPr>
             <a:r>
@@ -11990,7 +12222,7 @@
           <a:bodyPr wrap="square" lIns="0" tIns="0" rIns="0" bIns="0" rtlCol="0" anchor="ctr"/>
           <a:lstStyle/>
           <a:p>
-            <a:pPr indent="0" marL="0">
+            <a:pPr marL="0" indent="0">
               <a:buNone/>
             </a:pPr>
             <a:r>
@@ -12010,7 +12242,7 @@
       </p:sp>
       <p:graphicFrame>
         <p:nvGraphicFramePr>
-          <p:cNvPr id="5" name="Chart 0" descr=""/>
+          <p:cNvPr id="5" name="Chart 0"/>
           <p:cNvGraphicFramePr/>
           <p:nvPr/>
         </p:nvGraphicFramePr>
@@ -12018,9 +12250,9 @@
           <a:off x="548640" y="2011680"/>
           <a:ext cx="7040880" cy="3977640"/>
         </p:xfrm>
-        <a:graphic xmlns:a="http://schemas.openxmlformats.org/drawingml/2006/main">
+        <a:graphic>
           <a:graphicData uri="http://schemas.openxmlformats.org/drawingml/2006/chart">
-            <c:chart xmlns:c="http://schemas.openxmlformats.org/drawingml/2006/chart" r:id="rId1"/>
+            <c:chart xmlns:c="http://schemas.openxmlformats.org/drawingml/2006/chart" xmlns:r="http://schemas.openxmlformats.org/officeDocument/2006/relationships" r:id="rId3"/>
           </a:graphicData>
         </a:graphic>
       </p:graphicFrame>
@@ -12050,7 +12282,7 @@
             <a:prstDash val="solid"/>
           </a:ln>
           <a:effectLst>
-            <a:outerShdw sx="100000" sy="100000" kx="0" ky="0" algn="bl" rotWithShape="0" blurRad="101600" dist="25400" dir="5400000">
+            <a:outerShdw blurRad="101600" dist="25400" dir="5400000" algn="bl" rotWithShape="0">
               <a:srgbClr val="9AA9BA">
                 <a:alpha val="18000"/>
               </a:srgbClr>
@@ -12079,7 +12311,7 @@
           <a:bodyPr wrap="square" lIns="0" tIns="0" rIns="0" bIns="0" rtlCol="0" anchor="ctr"/>
           <a:lstStyle/>
           <a:p>
-            <a:pPr algn="ctr" indent="0" marL="0">
+            <a:pPr marL="0" indent="0" algn="ctr">
               <a:buNone/>
             </a:pPr>
             <a:r>
@@ -12118,7 +12350,7 @@
           <a:bodyPr wrap="square" lIns="0" tIns="0" rIns="0" bIns="0" rtlCol="0" anchor="ctr"/>
           <a:lstStyle/>
           <a:p>
-            <a:pPr algn="ctr" indent="0" marL="0">
+            <a:pPr marL="0" indent="0" algn="ctr">
               <a:lnSpc>
                 <a:spcPct val="125000"/>
               </a:lnSpc>
@@ -12165,7 +12397,7 @@
             <a:prstDash val="solid"/>
           </a:ln>
           <a:effectLst>
-            <a:outerShdw sx="100000" sy="100000" kx="0" ky="0" algn="bl" rotWithShape="0" blurRad="101600" dist="25400" dir="5400000">
+            <a:outerShdw blurRad="101600" dist="25400" dir="5400000" algn="bl" rotWithShape="0">
               <a:srgbClr val="9AA9BA">
                 <a:alpha val="18000"/>
               </a:srgbClr>
@@ -12194,7 +12426,7 @@
           <a:bodyPr wrap="square" lIns="0" tIns="0" rIns="0" bIns="0" rtlCol="0" anchor="ctr"/>
           <a:lstStyle/>
           <a:p>
-            <a:pPr indent="0" marL="0">
+            <a:pPr marL="0" indent="0">
               <a:buNone/>
             </a:pPr>
             <a:r>
@@ -12233,7 +12465,7 @@
           <a:bodyPr wrap="square" lIns="0" tIns="0" rIns="0" bIns="0" rtlCol="0" anchor="ctr"/>
           <a:lstStyle/>
           <a:p>
-            <a:pPr indent="0" marL="0">
+            <a:pPr marL="0" indent="0">
               <a:lnSpc>
                 <a:spcPct val="130000"/>
               </a:lnSpc>
@@ -12275,7 +12507,7 @@
           <a:bodyPr wrap="square" lIns="0" tIns="0" rIns="0" bIns="0" rtlCol="0" anchor="ctr"/>
           <a:lstStyle/>
           <a:p>
-            <a:pPr algn="r" indent="0" marL="0">
+            <a:pPr marL="0" indent="0" algn="r">
               <a:buNone/>
             </a:pPr>
             <a:r>
@@ -12314,7 +12546,7 @@
           <a:bodyPr wrap="square" lIns="0" tIns="0" rIns="0" bIns="0" rtlCol="0" anchor="ctr"/>
           <a:lstStyle/>
           <a:p>
-            <a:pPr indent="0" marL="0">
+            <a:pPr marL="0" indent="0">
               <a:buNone/>
             </a:pPr>
             <a:r>
@@ -12348,6 +12580,7 @@
         <a:solidFill>
           <a:srgbClr val="F7F9FC"/>
         </a:solidFill>
+        <a:effectLst/>
       </p:bgPr>
     </p:bg>
     <p:spTree>
@@ -12385,11 +12618,11 @@
           <a:bodyPr wrap="square" lIns="0" tIns="0" rIns="0" bIns="0" rtlCol="0" anchor="ctr"/>
           <a:lstStyle/>
           <a:p>
-            <a:pPr algn="l" indent="0" marL="0">
-              <a:buNone/>
-            </a:pPr>
-            <a:r>
-              <a:rPr lang="en-US" sz="1300" b="1" spc="200" kern="0" dirty="0">
+            <a:pPr marL="0" indent="0" algn="l">
+              <a:buNone/>
+            </a:pPr>
+            <a:r>
+              <a:rPr lang="en-US" sz="1300" b="1" kern="0" spc="200" dirty="0">
                 <a:solidFill>
                   <a:srgbClr val="0088A3"/>
                 </a:solidFill>
@@ -12424,7 +12657,7 @@
           <a:bodyPr wrap="square" lIns="0" tIns="0" rIns="0" bIns="0" rtlCol="0" anchor="ctr"/>
           <a:lstStyle/>
           <a:p>
-            <a:pPr algn="l" indent="0" marL="0">
+            <a:pPr marL="0" indent="0" algn="l">
               <a:buNone/>
             </a:pPr>
             <a:r>
@@ -12475,7 +12708,7 @@
                     <a:bodyPr/>
                     <a:lstStyle/>
                     <a:p>
-                      <a:pPr algn="l" indent="0" marL="0">
+                      <a:pPr marL="0" indent="0" algn="l">
                         <a:buNone/>
                       </a:pPr>
                       <a:r>
@@ -12489,7 +12722,7 @@
                       <a:endParaRPr lang="en-US" sz="1200" dirty="0"/>
                     </a:p>
                   </a:txBody>
-                  <a:tcPr marL="91440" marR="91440" marT="45720" marB="45720" anchor="ctr">
+                  <a:tcPr anchor="ctr">
                     <a:lnL w="9525" cap="flat" cmpd="sng" algn="ctr">
                       <a:solidFill>
                         <a:srgbClr val="DDE6EF"/>
@@ -12536,7 +12769,7 @@
                     <a:bodyPr/>
                     <a:lstStyle/>
                     <a:p>
-                      <a:pPr algn="l" indent="0" marL="0">
+                      <a:pPr marL="0" indent="0" algn="l">
                         <a:buNone/>
                       </a:pPr>
                       <a:r>
@@ -12550,7 +12783,7 @@
                       <a:endParaRPr lang="en-US" sz="1200" dirty="0"/>
                     </a:p>
                   </a:txBody>
-                  <a:tcPr marL="91440" marR="91440" marT="45720" marB="45720" anchor="ctr">
+                  <a:tcPr anchor="ctr">
                     <a:lnL w="9525" cap="flat" cmpd="sng" algn="ctr">
                       <a:solidFill>
                         <a:srgbClr val="DDE6EF"/>
@@ -12597,7 +12830,7 @@
                     <a:bodyPr/>
                     <a:lstStyle/>
                     <a:p>
-                      <a:pPr algn="l" indent="0" marL="0">
+                      <a:pPr marL="0" indent="0" algn="l">
                         <a:buNone/>
                       </a:pPr>
                       <a:r>
@@ -12611,7 +12844,7 @@
                       <a:endParaRPr lang="en-US" sz="1200" dirty="0"/>
                     </a:p>
                   </a:txBody>
-                  <a:tcPr marL="91440" marR="91440" marT="45720" marB="45720" anchor="ctr">
+                  <a:tcPr anchor="ctr">
                     <a:lnL w="9525" cap="flat" cmpd="sng" algn="ctr">
                       <a:solidFill>
                         <a:srgbClr val="DDE6EF"/>
@@ -12660,7 +12893,7 @@
                     <a:bodyPr/>
                     <a:lstStyle/>
                     <a:p>
-                      <a:pPr algn="l" indent="0" marL="0">
+                      <a:pPr marL="0" indent="0" algn="l">
                         <a:buNone/>
                       </a:pPr>
                       <a:r>
@@ -12674,7 +12907,7 @@
                       <a:endParaRPr lang="en-US" sz="1100" dirty="0"/>
                     </a:p>
                   </a:txBody>
-                  <a:tcPr marL="91440" marR="91440" marT="45720" marB="45720" anchor="ctr">
+                  <a:tcPr anchor="ctr">
                     <a:lnL w="9525" cap="flat" cmpd="sng" algn="ctr">
                       <a:solidFill>
                         <a:srgbClr val="DDE6EF"/>
@@ -12721,7 +12954,7 @@
                     <a:bodyPr/>
                     <a:lstStyle/>
                     <a:p>
-                      <a:pPr algn="l" indent="0" marL="0">
+                      <a:pPr marL="0" indent="0" algn="l">
                         <a:buNone/>
                       </a:pPr>
                       <a:r>
@@ -12735,7 +12968,7 @@
                       <a:endParaRPr lang="en-US" sz="1100" dirty="0"/>
                     </a:p>
                   </a:txBody>
-                  <a:tcPr marL="91440" marR="91440" marT="45720" marB="45720" anchor="ctr">
+                  <a:tcPr anchor="ctr">
                     <a:lnL w="9525" cap="flat" cmpd="sng" algn="ctr">
                       <a:solidFill>
                         <a:srgbClr val="DDE6EF"/>
@@ -12782,7 +13015,7 @@
                     <a:bodyPr/>
                     <a:lstStyle/>
                     <a:p>
-                      <a:pPr algn="l" indent="0" marL="0">
+                      <a:pPr marL="0" indent="0" algn="l">
                         <a:buNone/>
                       </a:pPr>
                       <a:r>
@@ -12796,7 +13029,7 @@
                       <a:endParaRPr lang="en-US" sz="1100" dirty="0"/>
                     </a:p>
                   </a:txBody>
-                  <a:tcPr marL="91440" marR="91440" marT="45720" marB="45720" anchor="ctr">
+                  <a:tcPr anchor="ctr">
                     <a:lnL w="9525" cap="flat" cmpd="sng" algn="ctr">
                       <a:solidFill>
                         <a:srgbClr val="DDE6EF"/>
@@ -12845,7 +13078,7 @@
                     <a:bodyPr/>
                     <a:lstStyle/>
                     <a:p>
-                      <a:pPr algn="l" indent="0" marL="0">
+                      <a:pPr marL="0" indent="0" algn="l">
                         <a:buNone/>
                       </a:pPr>
                       <a:r>
@@ -12859,7 +13092,7 @@
                       <a:endParaRPr lang="en-US" sz="1100" dirty="0"/>
                     </a:p>
                   </a:txBody>
-                  <a:tcPr marL="91440" marR="91440" marT="45720" marB="45720" anchor="ctr">
+                  <a:tcPr anchor="ctr">
                     <a:lnL w="9525" cap="flat" cmpd="sng" algn="ctr">
                       <a:solidFill>
                         <a:srgbClr val="DDE6EF"/>
@@ -12906,7 +13139,7 @@
                     <a:bodyPr/>
                     <a:lstStyle/>
                     <a:p>
-                      <a:pPr algn="l" indent="0" marL="0">
+                      <a:pPr marL="0" indent="0" algn="l">
                         <a:buNone/>
                       </a:pPr>
                       <a:r>
@@ -12920,7 +13153,7 @@
                       <a:endParaRPr lang="en-US" sz="1100" dirty="0"/>
                     </a:p>
                   </a:txBody>
-                  <a:tcPr marL="91440" marR="91440" marT="45720" marB="45720" anchor="ctr">
+                  <a:tcPr anchor="ctr">
                     <a:lnL w="9525" cap="flat" cmpd="sng" algn="ctr">
                       <a:solidFill>
                         <a:srgbClr val="DDE6EF"/>
@@ -12967,7 +13200,7 @@
                     <a:bodyPr/>
                     <a:lstStyle/>
                     <a:p>
-                      <a:pPr algn="l" indent="0" marL="0">
+                      <a:pPr marL="0" indent="0" algn="l">
                         <a:buNone/>
                       </a:pPr>
                       <a:r>
@@ -12981,7 +13214,7 @@
                       <a:endParaRPr lang="en-US" sz="1100" dirty="0"/>
                     </a:p>
                   </a:txBody>
-                  <a:tcPr marL="91440" marR="91440" marT="45720" marB="45720" anchor="ctr">
+                  <a:tcPr anchor="ctr">
                     <a:lnL w="9525" cap="flat" cmpd="sng" algn="ctr">
                       <a:solidFill>
                         <a:srgbClr val="DDE6EF"/>
@@ -13030,7 +13263,7 @@
                     <a:bodyPr/>
                     <a:lstStyle/>
                     <a:p>
-                      <a:pPr algn="l" indent="0" marL="0">
+                      <a:pPr marL="0" indent="0" algn="l">
                         <a:buNone/>
                       </a:pPr>
                       <a:r>
@@ -13044,7 +13277,7 @@
                       <a:endParaRPr lang="en-US" sz="1100" dirty="0"/>
                     </a:p>
                   </a:txBody>
-                  <a:tcPr marL="91440" marR="91440" marT="45720" marB="45720" anchor="ctr">
+                  <a:tcPr anchor="ctr">
                     <a:lnL w="9525" cap="flat" cmpd="sng" algn="ctr">
                       <a:solidFill>
                         <a:srgbClr val="DDE6EF"/>
@@ -13091,7 +13324,7 @@
                     <a:bodyPr/>
                     <a:lstStyle/>
                     <a:p>
-                      <a:pPr algn="l" indent="0" marL="0">
+                      <a:pPr marL="0" indent="0" algn="l">
                         <a:buNone/>
                       </a:pPr>
                       <a:r>
@@ -13105,7 +13338,7 @@
                       <a:endParaRPr lang="en-US" sz="1100" dirty="0"/>
                     </a:p>
                   </a:txBody>
-                  <a:tcPr marL="91440" marR="91440" marT="45720" marB="45720" anchor="ctr">
+                  <a:tcPr anchor="ctr">
                     <a:lnL w="9525" cap="flat" cmpd="sng" algn="ctr">
                       <a:solidFill>
                         <a:srgbClr val="DDE6EF"/>
@@ -13152,7 +13385,7 @@
                     <a:bodyPr/>
                     <a:lstStyle/>
                     <a:p>
-                      <a:pPr algn="l" indent="0" marL="0">
+                      <a:pPr marL="0" indent="0" algn="l">
                         <a:buNone/>
                       </a:pPr>
                       <a:r>
@@ -13166,7 +13399,7 @@
                       <a:endParaRPr lang="en-US" sz="1100" dirty="0"/>
                     </a:p>
                   </a:txBody>
-                  <a:tcPr marL="91440" marR="91440" marT="45720" marB="45720" anchor="ctr">
+                  <a:tcPr anchor="ctr">
                     <a:lnL w="9525" cap="flat" cmpd="sng" algn="ctr">
                       <a:solidFill>
                         <a:srgbClr val="DDE6EF"/>
@@ -13215,7 +13448,7 @@
                     <a:bodyPr/>
                     <a:lstStyle/>
                     <a:p>
-                      <a:pPr algn="l" indent="0" marL="0">
+                      <a:pPr marL="0" indent="0" algn="l">
                         <a:buNone/>
                       </a:pPr>
                       <a:r>
@@ -13229,7 +13462,7 @@
                       <a:endParaRPr lang="en-US" sz="1100" dirty="0"/>
                     </a:p>
                   </a:txBody>
-                  <a:tcPr marL="91440" marR="91440" marT="45720" marB="45720" anchor="ctr">
+                  <a:tcPr anchor="ctr">
                     <a:lnL w="9525" cap="flat" cmpd="sng" algn="ctr">
                       <a:solidFill>
                         <a:srgbClr val="DDE6EF"/>
@@ -13276,7 +13509,7 @@
                     <a:bodyPr/>
                     <a:lstStyle/>
                     <a:p>
-                      <a:pPr algn="l" indent="0" marL="0">
+                      <a:pPr marL="0" indent="0" algn="l">
                         <a:buNone/>
                       </a:pPr>
                       <a:r>
@@ -13290,7 +13523,7 @@
                       <a:endParaRPr lang="en-US" sz="1100" dirty="0"/>
                     </a:p>
                   </a:txBody>
-                  <a:tcPr marL="91440" marR="91440" marT="45720" marB="45720" anchor="ctr">
+                  <a:tcPr anchor="ctr">
                     <a:lnL w="9525" cap="flat" cmpd="sng" algn="ctr">
                       <a:solidFill>
                         <a:srgbClr val="DDE6EF"/>
@@ -13337,7 +13570,7 @@
                     <a:bodyPr/>
                     <a:lstStyle/>
                     <a:p>
-                      <a:pPr algn="l" indent="0" marL="0">
+                      <a:pPr marL="0" indent="0" algn="l">
                         <a:buNone/>
                       </a:pPr>
                       <a:r>
@@ -13351,7 +13584,7 @@
                       <a:endParaRPr lang="en-US" sz="1100" dirty="0"/>
                     </a:p>
                   </a:txBody>
-                  <a:tcPr marL="91440" marR="91440" marT="45720" marB="45720" anchor="ctr">
+                  <a:tcPr anchor="ctr">
                     <a:lnL w="9525" cap="flat" cmpd="sng" algn="ctr">
                       <a:solidFill>
                         <a:srgbClr val="DDE6EF"/>
@@ -13400,7 +13633,7 @@
                     <a:bodyPr/>
                     <a:lstStyle/>
                     <a:p>
-                      <a:pPr algn="l" indent="0" marL="0">
+                      <a:pPr marL="0" indent="0" algn="l">
                         <a:buNone/>
                       </a:pPr>
                       <a:r>
@@ -13414,7 +13647,7 @@
                       <a:endParaRPr lang="en-US" sz="1100" dirty="0"/>
                     </a:p>
                   </a:txBody>
-                  <a:tcPr marL="91440" marR="91440" marT="45720" marB="45720" anchor="ctr">
+                  <a:tcPr anchor="ctr">
                     <a:lnL w="9525" cap="flat" cmpd="sng" algn="ctr">
                       <a:solidFill>
                         <a:srgbClr val="DDE6EF"/>
@@ -13461,7 +13694,7 @@
                     <a:bodyPr/>
                     <a:lstStyle/>
                     <a:p>
-                      <a:pPr algn="l" indent="0" marL="0">
+                      <a:pPr marL="0" indent="0" algn="l">
                         <a:buNone/>
                       </a:pPr>
                       <a:r>
@@ -13475,7 +13708,7 @@
                       <a:endParaRPr lang="en-US" sz="1100" dirty="0"/>
                     </a:p>
                   </a:txBody>
-                  <a:tcPr marL="91440" marR="91440" marT="45720" marB="45720" anchor="ctr">
+                  <a:tcPr anchor="ctr">
                     <a:lnL w="9525" cap="flat" cmpd="sng" algn="ctr">
                       <a:solidFill>
                         <a:srgbClr val="DDE6EF"/>
@@ -13522,7 +13755,7 @@
                     <a:bodyPr/>
                     <a:lstStyle/>
                     <a:p>
-                      <a:pPr algn="l" indent="0" marL="0">
+                      <a:pPr marL="0" indent="0" algn="l">
                         <a:buNone/>
                       </a:pPr>
                       <a:r>
@@ -13536,7 +13769,7 @@
                       <a:endParaRPr lang="en-US" sz="1100" dirty="0"/>
                     </a:p>
                   </a:txBody>
-                  <a:tcPr marL="91440" marR="91440" marT="45720" marB="45720" anchor="ctr">
+                  <a:tcPr anchor="ctr">
                     <a:lnL w="9525" cap="flat" cmpd="sng" algn="ctr">
                       <a:solidFill>
                         <a:srgbClr val="DDE6EF"/>
@@ -13585,7 +13818,7 @@
                     <a:bodyPr/>
                     <a:lstStyle/>
                     <a:p>
-                      <a:pPr algn="l" indent="0" marL="0">
+                      <a:pPr marL="0" indent="0" algn="l">
                         <a:buNone/>
                       </a:pPr>
                       <a:r>
@@ -13599,7 +13832,7 @@
                       <a:endParaRPr lang="en-US" sz="1100" dirty="0"/>
                     </a:p>
                   </a:txBody>
-                  <a:tcPr marL="91440" marR="91440" marT="45720" marB="45720" anchor="ctr">
+                  <a:tcPr anchor="ctr">
                     <a:lnL w="9525" cap="flat" cmpd="sng" algn="ctr">
                       <a:solidFill>
                         <a:srgbClr val="DDE6EF"/>
@@ -13646,7 +13879,7 @@
                     <a:bodyPr/>
                     <a:lstStyle/>
                     <a:p>
-                      <a:pPr algn="l" indent="0" marL="0">
+                      <a:pPr marL="0" indent="0" algn="l">
                         <a:buNone/>
                       </a:pPr>
                       <a:r>
@@ -13660,7 +13893,7 @@
                       <a:endParaRPr lang="en-US" sz="1100" dirty="0"/>
                     </a:p>
                   </a:txBody>
-                  <a:tcPr marL="91440" marR="91440" marT="45720" marB="45720" anchor="ctr">
+                  <a:tcPr anchor="ctr">
                     <a:lnL w="9525" cap="flat" cmpd="sng" algn="ctr">
                       <a:solidFill>
                         <a:srgbClr val="DDE6EF"/>
@@ -13707,7 +13940,7 @@
                     <a:bodyPr/>
                     <a:lstStyle/>
                     <a:p>
-                      <a:pPr algn="l" indent="0" marL="0">
+                      <a:pPr marL="0" indent="0" algn="l">
                         <a:buNone/>
                       </a:pPr>
                       <a:r>
@@ -13721,7 +13954,7 @@
                       <a:endParaRPr lang="en-US" sz="1100" dirty="0"/>
                     </a:p>
                   </a:txBody>
-                  <a:tcPr marL="91440" marR="91440" marT="45720" marB="45720" anchor="ctr">
+                  <a:tcPr anchor="ctr">
                     <a:lnL w="9525" cap="flat" cmpd="sng" algn="ctr">
                       <a:solidFill>
                         <a:srgbClr val="DDE6EF"/>
@@ -13770,7 +14003,7 @@
                     <a:bodyPr/>
                     <a:lstStyle/>
                     <a:p>
-                      <a:pPr algn="l" indent="0" marL="0">
+                      <a:pPr marL="0" indent="0" algn="l">
                         <a:buNone/>
                       </a:pPr>
                       <a:r>
@@ -13784,7 +14017,7 @@
                       <a:endParaRPr lang="en-US" sz="1100" dirty="0"/>
                     </a:p>
                   </a:txBody>
-                  <a:tcPr marL="91440" marR="91440" marT="45720" marB="45720" anchor="ctr">
+                  <a:tcPr anchor="ctr">
                     <a:lnL w="9525" cap="flat" cmpd="sng" algn="ctr">
                       <a:solidFill>
                         <a:srgbClr val="DDE6EF"/>
@@ -13831,7 +14064,7 @@
                     <a:bodyPr/>
                     <a:lstStyle/>
                     <a:p>
-                      <a:pPr algn="l" indent="0" marL="0">
+                      <a:pPr marL="0" indent="0" algn="l">
                         <a:buNone/>
                       </a:pPr>
                       <a:r>
@@ -13845,7 +14078,7 @@
                       <a:endParaRPr lang="en-US" sz="1100" dirty="0"/>
                     </a:p>
                   </a:txBody>
-                  <a:tcPr marL="91440" marR="91440" marT="45720" marB="45720" anchor="ctr">
+                  <a:tcPr anchor="ctr">
                     <a:lnL w="9525" cap="flat" cmpd="sng" algn="ctr">
                       <a:solidFill>
                         <a:srgbClr val="DDE6EF"/>
@@ -13892,7 +14125,7 @@
                     <a:bodyPr/>
                     <a:lstStyle/>
                     <a:p>
-                      <a:pPr algn="l" indent="0" marL="0">
+                      <a:pPr marL="0" indent="0" algn="l">
                         <a:buNone/>
                       </a:pPr>
                       <a:r>
@@ -13906,7 +14139,7 @@
                       <a:endParaRPr lang="en-US" sz="1100" dirty="0"/>
                     </a:p>
                   </a:txBody>
-                  <a:tcPr marL="91440" marR="91440" marT="45720" marB="45720" anchor="ctr">
+                  <a:tcPr anchor="ctr">
                     <a:lnL w="9525" cap="flat" cmpd="sng" algn="ctr">
                       <a:solidFill>
                         <a:srgbClr val="DDE6EF"/>
@@ -13974,7 +14207,7 @@
           <a:bodyPr wrap="square" lIns="0" tIns="0" rIns="0" bIns="0" rtlCol="0" anchor="ctr"/>
           <a:lstStyle/>
           <a:p>
-            <a:pPr algn="r" indent="0" marL="0">
+            <a:pPr marL="0" indent="0" algn="r">
               <a:buNone/>
             </a:pPr>
             <a:r>
@@ -14013,7 +14246,7 @@
           <a:bodyPr wrap="square" lIns="0" tIns="0" rIns="0" bIns="0" rtlCol="0" anchor="ctr"/>
           <a:lstStyle/>
           <a:p>
-            <a:pPr indent="0" marL="0">
+            <a:pPr marL="0" indent="0">
               <a:buNone/>
             </a:pPr>
             <a:r>
@@ -14047,6 +14280,7 @@
         <a:solidFill>
           <a:srgbClr val="0B2545"/>
         </a:solidFill>
+        <a:effectLst/>
       </p:bgPr>
     </p:bg>
     <p:spTree>
@@ -14084,11 +14318,11 @@
           <a:bodyPr wrap="square" lIns="0" tIns="0" rIns="0" bIns="0" rtlCol="0" anchor="ctr"/>
           <a:lstStyle/>
           <a:p>
-            <a:pPr indent="0" marL="0">
-              <a:buNone/>
-            </a:pPr>
-            <a:r>
-              <a:rPr lang="en-US" sz="1300" b="1" spc="200" kern="0" dirty="0">
+            <a:pPr marL="0" indent="0">
+              <a:buNone/>
+            </a:pPr>
+            <a:r>
+              <a:rPr lang="en-US" sz="1300" b="1" kern="0" spc="200" dirty="0">
                 <a:solidFill>
                   <a:srgbClr val="00B4D8"/>
                 </a:solidFill>
@@ -14123,7 +14357,7 @@
           <a:bodyPr wrap="square" lIns="0" tIns="0" rIns="0" bIns="0" rtlCol="0" anchor="ctr"/>
           <a:lstStyle/>
           <a:p>
-            <a:pPr indent="0" marL="0">
+            <a:pPr marL="0" indent="0">
               <a:buNone/>
             </a:pPr>
             <a:r>
@@ -14167,7 +14401,7 @@
             <a:prstDash val="solid"/>
           </a:ln>
           <a:effectLst>
-            <a:outerShdw sx="100000" sy="100000" kx="0" ky="0" algn="bl" rotWithShape="0" blurRad="101600" dist="25400" dir="5400000">
+            <a:outerShdw blurRad="101600" dist="25400" dir="5400000" algn="bl" rotWithShape="0">
               <a:srgbClr val="9AA9BA">
                 <a:alpha val="18000"/>
               </a:srgbClr>
@@ -14216,7 +14450,7 @@
           <a:bodyPr wrap="square" lIns="0" tIns="0" rIns="0" bIns="0" rtlCol="0" anchor="ctr"/>
           <a:lstStyle/>
           <a:p>
-            <a:pPr algn="ctr" indent="0" marL="0">
+            <a:pPr marL="0" indent="0" algn="ctr">
               <a:buNone/>
             </a:pPr>
             <a:r>
@@ -14255,7 +14489,7 @@
           <a:bodyPr wrap="square" lIns="0" tIns="0" rIns="0" bIns="0" rtlCol="0" anchor="ctr"/>
           <a:lstStyle/>
           <a:p>
-            <a:pPr indent="0" marL="0">
+            <a:pPr marL="0" indent="0">
               <a:buNone/>
             </a:pPr>
             <a:r>
@@ -14294,7 +14528,7 @@
           <a:bodyPr wrap="square" lIns="0" tIns="0" rIns="0" bIns="0" rtlCol="0" anchor="ctr"/>
           <a:lstStyle/>
           <a:p>
-            <a:pPr indent="0" marL="0">
+            <a:pPr marL="0" indent="0">
               <a:lnSpc>
                 <a:spcPct val="135000"/>
               </a:lnSpc>
@@ -14341,7 +14575,7 @@
             <a:prstDash val="solid"/>
           </a:ln>
           <a:effectLst>
-            <a:outerShdw sx="100000" sy="100000" kx="0" ky="0" algn="bl" rotWithShape="0" blurRad="101600" dist="25400" dir="5400000">
+            <a:outerShdw blurRad="101600" dist="25400" dir="5400000" algn="bl" rotWithShape="0">
               <a:srgbClr val="9AA9BA">
                 <a:alpha val="18000"/>
               </a:srgbClr>
@@ -14370,7 +14604,7 @@
           <a:bodyPr wrap="square" lIns="0" tIns="0" rIns="0" bIns="0" rtlCol="0" anchor="ctr"/>
           <a:lstStyle/>
           <a:p>
-            <a:pPr indent="0" marL="0">
+            <a:pPr marL="0" indent="0">
               <a:buNone/>
             </a:pPr>
             <a:r>
@@ -14515,7 +14749,7 @@
           <a:bodyPr wrap="square" lIns="0" tIns="0" rIns="0" bIns="0" rtlCol="0" anchor="ctr"/>
           <a:lstStyle/>
           <a:p>
-            <a:pPr indent="0" marL="0">
+            <a:pPr marL="0" indent="0">
               <a:buNone/>
             </a:pPr>
             <a:r>
@@ -14549,6 +14783,7 @@
         <a:solidFill>
           <a:srgbClr val="F7F9FC"/>
         </a:solidFill>
+        <a:effectLst/>
       </p:bgPr>
     </p:bg>
     <p:spTree>
@@ -14586,11 +14821,11 @@
           <a:bodyPr wrap="square" lIns="0" tIns="0" rIns="0" bIns="0" rtlCol="0" anchor="ctr"/>
           <a:lstStyle/>
           <a:p>
-            <a:pPr algn="l" indent="0" marL="0">
-              <a:buNone/>
-            </a:pPr>
-            <a:r>
-              <a:rPr lang="en-US" sz="1300" b="1" spc="200" kern="0" dirty="0">
+            <a:pPr marL="0" indent="0" algn="l">
+              <a:buNone/>
+            </a:pPr>
+            <a:r>
+              <a:rPr lang="en-US" sz="1300" b="1" kern="0" spc="200" dirty="0">
                 <a:solidFill>
                   <a:srgbClr val="0088A3"/>
                 </a:solidFill>
@@ -14625,7 +14860,7 @@
           <a:bodyPr wrap="square" lIns="0" tIns="0" rIns="0" bIns="0" rtlCol="0" anchor="ctr"/>
           <a:lstStyle/>
           <a:p>
-            <a:pPr algn="l" indent="0" marL="0">
+            <a:pPr marL="0" indent="0" algn="l">
               <a:buNone/>
             </a:pPr>
             <a:r>
@@ -14669,7 +14904,7 @@
             <a:prstDash val="solid"/>
           </a:ln>
           <a:effectLst>
-            <a:outerShdw sx="100000" sy="100000" kx="0" ky="0" algn="bl" rotWithShape="0" blurRad="101600" dist="25400" dir="5400000">
+            <a:outerShdw blurRad="101600" dist="25400" dir="5400000" algn="bl" rotWithShape="0">
               <a:srgbClr val="9AA9BA">
                 <a:alpha val="18000"/>
               </a:srgbClr>
@@ -14718,7 +14953,7 @@
           <a:bodyPr wrap="square" lIns="0" tIns="0" rIns="0" bIns="0" rtlCol="0" anchor="ctr"/>
           <a:lstStyle/>
           <a:p>
-            <a:pPr algn="ctr" indent="0" marL="0">
+            <a:pPr marL="0" indent="0" algn="ctr">
               <a:buNone/>
             </a:pPr>
             <a:r>
@@ -14757,7 +14992,7 @@
           <a:bodyPr wrap="square" lIns="0" tIns="0" rIns="0" bIns="0" rtlCol="0" anchor="ctr"/>
           <a:lstStyle/>
           <a:p>
-            <a:pPr indent="0" marL="0">
+            <a:pPr marL="0" indent="0">
               <a:buNone/>
             </a:pPr>
             <a:r>
@@ -14796,7 +15031,7 @@
           <a:bodyPr wrap="square" lIns="0" tIns="0" rIns="0" bIns="0" rtlCol="0" anchor="ctr"/>
           <a:lstStyle/>
           <a:p>
-            <a:pPr indent="0" marL="0">
+            <a:pPr marL="0" indent="0">
               <a:buNone/>
             </a:pPr>
             <a:r>
@@ -14840,7 +15075,7 @@
             <a:prstDash val="solid"/>
           </a:ln>
           <a:effectLst>
-            <a:outerShdw sx="100000" sy="100000" kx="0" ky="0" algn="bl" rotWithShape="0" blurRad="101600" dist="25400" dir="5400000">
+            <a:outerShdw blurRad="101600" dist="25400" dir="5400000" algn="bl" rotWithShape="0">
               <a:srgbClr val="9AA9BA">
                 <a:alpha val="18000"/>
               </a:srgbClr>
@@ -14889,7 +15124,7 @@
           <a:bodyPr wrap="square" lIns="0" tIns="0" rIns="0" bIns="0" rtlCol="0" anchor="ctr"/>
           <a:lstStyle/>
           <a:p>
-            <a:pPr algn="ctr" indent="0" marL="0">
+            <a:pPr marL="0" indent="0" algn="ctr">
               <a:buNone/>
             </a:pPr>
             <a:r>
@@ -14928,7 +15163,7 @@
           <a:bodyPr wrap="square" lIns="0" tIns="0" rIns="0" bIns="0" rtlCol="0" anchor="ctr"/>
           <a:lstStyle/>
           <a:p>
-            <a:pPr indent="0" marL="0">
+            <a:pPr marL="0" indent="0">
               <a:buNone/>
             </a:pPr>
             <a:r>
@@ -14967,7 +15202,7 @@
           <a:bodyPr wrap="square" lIns="0" tIns="0" rIns="0" bIns="0" rtlCol="0" anchor="ctr"/>
           <a:lstStyle/>
           <a:p>
-            <a:pPr indent="0" marL="0">
+            <a:pPr marL="0" indent="0">
               <a:buNone/>
             </a:pPr>
             <a:r>
@@ -15011,7 +15246,7 @@
             <a:prstDash val="solid"/>
           </a:ln>
           <a:effectLst>
-            <a:outerShdw sx="100000" sy="100000" kx="0" ky="0" algn="bl" rotWithShape="0" blurRad="101600" dist="25400" dir="5400000">
+            <a:outerShdw blurRad="101600" dist="25400" dir="5400000" algn="bl" rotWithShape="0">
               <a:srgbClr val="9AA9BA">
                 <a:alpha val="18000"/>
               </a:srgbClr>
@@ -15060,7 +15295,7 @@
           <a:bodyPr wrap="square" lIns="0" tIns="0" rIns="0" bIns="0" rtlCol="0" anchor="ctr"/>
           <a:lstStyle/>
           <a:p>
-            <a:pPr algn="ctr" indent="0" marL="0">
+            <a:pPr marL="0" indent="0" algn="ctr">
               <a:buNone/>
             </a:pPr>
             <a:r>
@@ -15099,7 +15334,7 @@
           <a:bodyPr wrap="square" lIns="0" tIns="0" rIns="0" bIns="0" rtlCol="0" anchor="ctr"/>
           <a:lstStyle/>
           <a:p>
-            <a:pPr indent="0" marL="0">
+            <a:pPr marL="0" indent="0">
               <a:buNone/>
             </a:pPr>
             <a:r>
@@ -15138,7 +15373,7 @@
           <a:bodyPr wrap="square" lIns="0" tIns="0" rIns="0" bIns="0" rtlCol="0" anchor="ctr"/>
           <a:lstStyle/>
           <a:p>
-            <a:pPr indent="0" marL="0">
+            <a:pPr marL="0" indent="0">
               <a:buNone/>
             </a:pPr>
             <a:r>
@@ -15182,7 +15417,7 @@
             <a:prstDash val="solid"/>
           </a:ln>
           <a:effectLst>
-            <a:outerShdw sx="100000" sy="100000" kx="0" ky="0" algn="bl" rotWithShape="0" blurRad="101600" dist="25400" dir="5400000">
+            <a:outerShdw blurRad="101600" dist="25400" dir="5400000" algn="bl" rotWithShape="0">
               <a:srgbClr val="9AA9BA">
                 <a:alpha val="18000"/>
               </a:srgbClr>
@@ -15231,7 +15466,7 @@
           <a:bodyPr wrap="square" lIns="0" tIns="0" rIns="0" bIns="0" rtlCol="0" anchor="ctr"/>
           <a:lstStyle/>
           <a:p>
-            <a:pPr algn="ctr" indent="0" marL="0">
+            <a:pPr marL="0" indent="0" algn="ctr">
               <a:buNone/>
             </a:pPr>
             <a:r>
@@ -15270,7 +15505,7 @@
           <a:bodyPr wrap="square" lIns="0" tIns="0" rIns="0" bIns="0" rtlCol="0" anchor="ctr"/>
           <a:lstStyle/>
           <a:p>
-            <a:pPr indent="0" marL="0">
+            <a:pPr marL="0" indent="0">
               <a:buNone/>
             </a:pPr>
             <a:r>
@@ -15309,7 +15544,7 @@
           <a:bodyPr wrap="square" lIns="0" tIns="0" rIns="0" bIns="0" rtlCol="0" anchor="ctr"/>
           <a:lstStyle/>
           <a:p>
-            <a:pPr indent="0" marL="0">
+            <a:pPr marL="0" indent="0">
               <a:buNone/>
             </a:pPr>
             <a:r>
@@ -15353,7 +15588,7 @@
             <a:prstDash val="solid"/>
           </a:ln>
           <a:effectLst>
-            <a:outerShdw sx="100000" sy="100000" kx="0" ky="0" algn="bl" rotWithShape="0" blurRad="101600" dist="25400" dir="5400000">
+            <a:outerShdw blurRad="101600" dist="25400" dir="5400000" algn="bl" rotWithShape="0">
               <a:srgbClr val="9AA9BA">
                 <a:alpha val="18000"/>
               </a:srgbClr>
@@ -15402,7 +15637,7 @@
           <a:bodyPr wrap="square" lIns="0" tIns="0" rIns="0" bIns="0" rtlCol="0" anchor="ctr"/>
           <a:lstStyle/>
           <a:p>
-            <a:pPr algn="ctr" indent="0" marL="0">
+            <a:pPr marL="0" indent="0" algn="ctr">
               <a:buNone/>
             </a:pPr>
             <a:r>
@@ -15441,7 +15676,7 @@
           <a:bodyPr wrap="square" lIns="0" tIns="0" rIns="0" bIns="0" rtlCol="0" anchor="ctr"/>
           <a:lstStyle/>
           <a:p>
-            <a:pPr indent="0" marL="0">
+            <a:pPr marL="0" indent="0">
               <a:buNone/>
             </a:pPr>
             <a:r>
@@ -15480,7 +15715,7 @@
           <a:bodyPr wrap="square" lIns="0" tIns="0" rIns="0" bIns="0" rtlCol="0" anchor="ctr"/>
           <a:lstStyle/>
           <a:p>
-            <a:pPr indent="0" marL="0">
+            <a:pPr marL="0" indent="0">
               <a:buNone/>
             </a:pPr>
             <a:r>
@@ -15524,7 +15759,7 @@
             <a:prstDash val="solid"/>
           </a:ln>
           <a:effectLst>
-            <a:outerShdw sx="100000" sy="100000" kx="0" ky="0" algn="bl" rotWithShape="0" blurRad="101600" dist="25400" dir="5400000">
+            <a:outerShdw blurRad="101600" dist="25400" dir="5400000" algn="bl" rotWithShape="0">
               <a:srgbClr val="9AA9BA">
                 <a:alpha val="18000"/>
               </a:srgbClr>
@@ -15573,7 +15808,7 @@
           <a:bodyPr wrap="square" lIns="0" tIns="0" rIns="0" bIns="0" rtlCol="0" anchor="ctr"/>
           <a:lstStyle/>
           <a:p>
-            <a:pPr algn="ctr" indent="0" marL="0">
+            <a:pPr marL="0" indent="0" algn="ctr">
               <a:buNone/>
             </a:pPr>
             <a:r>
@@ -15612,7 +15847,7 @@
           <a:bodyPr wrap="square" lIns="0" tIns="0" rIns="0" bIns="0" rtlCol="0" anchor="ctr"/>
           <a:lstStyle/>
           <a:p>
-            <a:pPr indent="0" marL="0">
+            <a:pPr marL="0" indent="0">
               <a:buNone/>
             </a:pPr>
             <a:r>
@@ -15651,7 +15886,7 @@
           <a:bodyPr wrap="square" lIns="0" tIns="0" rIns="0" bIns="0" rtlCol="0" anchor="ctr"/>
           <a:lstStyle/>
           <a:p>
-            <a:pPr indent="0" marL="0">
+            <a:pPr marL="0" indent="0">
               <a:buNone/>
             </a:pPr>
             <a:r>
@@ -15695,7 +15930,7 @@
             <a:prstDash val="solid"/>
           </a:ln>
           <a:effectLst>
-            <a:outerShdw sx="100000" sy="100000" kx="0" ky="0" algn="bl" rotWithShape="0" blurRad="101600" dist="25400" dir="5400000">
+            <a:outerShdw blurRad="101600" dist="25400" dir="5400000" algn="bl" rotWithShape="0">
               <a:srgbClr val="9AA9BA">
                 <a:alpha val="18000"/>
               </a:srgbClr>
@@ -15744,7 +15979,7 @@
           <a:bodyPr wrap="square" lIns="0" tIns="0" rIns="0" bIns="0" rtlCol="0" anchor="ctr"/>
           <a:lstStyle/>
           <a:p>
-            <a:pPr algn="ctr" indent="0" marL="0">
+            <a:pPr marL="0" indent="0" algn="ctr">
               <a:buNone/>
             </a:pPr>
             <a:r>
@@ -15783,7 +16018,7 @@
           <a:bodyPr wrap="square" lIns="0" tIns="0" rIns="0" bIns="0" rtlCol="0" anchor="ctr"/>
           <a:lstStyle/>
           <a:p>
-            <a:pPr indent="0" marL="0">
+            <a:pPr marL="0" indent="0">
               <a:buNone/>
             </a:pPr>
             <a:r>
@@ -15822,7 +16057,7 @@
           <a:bodyPr wrap="square" lIns="0" tIns="0" rIns="0" bIns="0" rtlCol="0" anchor="ctr"/>
           <a:lstStyle/>
           <a:p>
-            <a:pPr indent="0" marL="0">
+            <a:pPr marL="0" indent="0">
               <a:buNone/>
             </a:pPr>
             <a:r>
@@ -15861,7 +16096,7 @@
           <a:bodyPr wrap="square" lIns="0" tIns="0" rIns="0" bIns="0" rtlCol="0" anchor="ctr"/>
           <a:lstStyle/>
           <a:p>
-            <a:pPr algn="r" indent="0" marL="0">
+            <a:pPr marL="0" indent="0" algn="r">
               <a:buNone/>
             </a:pPr>
             <a:r>
@@ -15900,7 +16135,7 @@
           <a:bodyPr wrap="square" lIns="0" tIns="0" rIns="0" bIns="0" rtlCol="0" anchor="ctr"/>
           <a:lstStyle/>
           <a:p>
-            <a:pPr indent="0" marL="0">
+            <a:pPr marL="0" indent="0">
               <a:buNone/>
             </a:pPr>
             <a:r>
@@ -15934,6 +16169,7 @@
         <a:solidFill>
           <a:srgbClr val="F7F9FC"/>
         </a:solidFill>
+        <a:effectLst/>
       </p:bgPr>
     </p:bg>
     <p:spTree>
@@ -15971,11 +16207,11 @@
           <a:bodyPr wrap="square" lIns="0" tIns="0" rIns="0" bIns="0" rtlCol="0" anchor="ctr"/>
           <a:lstStyle/>
           <a:p>
-            <a:pPr algn="l" indent="0" marL="0">
-              <a:buNone/>
-            </a:pPr>
-            <a:r>
-              <a:rPr lang="en-US" sz="1300" b="1" spc="200" kern="0" dirty="0">
+            <a:pPr marL="0" indent="0" algn="l">
+              <a:buNone/>
+            </a:pPr>
+            <a:r>
+              <a:rPr lang="en-US" sz="1300" b="1" kern="0" spc="200" dirty="0">
                 <a:solidFill>
                   <a:srgbClr val="0088A3"/>
                 </a:solidFill>
@@ -16010,7 +16246,7 @@
           <a:bodyPr wrap="square" lIns="0" tIns="0" rIns="0" bIns="0" rtlCol="0" anchor="ctr"/>
           <a:lstStyle/>
           <a:p>
-            <a:pPr algn="l" indent="0" marL="0">
+            <a:pPr marL="0" indent="0" algn="l">
               <a:buNone/>
             </a:pPr>
             <a:r>
@@ -16049,7 +16285,7 @@
           <a:bodyPr wrap="square" lIns="0" tIns="0" rIns="0" bIns="0" rtlCol="0" anchor="ctr"/>
           <a:lstStyle/>
           <a:p>
-            <a:pPr indent="0" marL="0">
+            <a:pPr marL="0" indent="0">
               <a:lnSpc>
                 <a:spcPct val="125000"/>
               </a:lnSpc>
@@ -16096,7 +16332,7 @@
             <a:prstDash val="solid"/>
           </a:ln>
           <a:effectLst>
-            <a:outerShdw sx="100000" sy="100000" kx="0" ky="0" algn="bl" rotWithShape="0" blurRad="101600" dist="25400" dir="5400000">
+            <a:outerShdw blurRad="101600" dist="25400" dir="5400000" algn="bl" rotWithShape="0">
               <a:srgbClr val="9AA9BA">
                 <a:alpha val="18000"/>
               </a:srgbClr>
@@ -16125,7 +16361,7 @@
           <a:bodyPr wrap="square" lIns="0" tIns="0" rIns="0" bIns="0" rtlCol="0" anchor="ctr"/>
           <a:lstStyle/>
           <a:p>
-            <a:pPr indent="0" marL="0">
+            <a:pPr marL="0" indent="0">
               <a:buNone/>
             </a:pPr>
             <a:r>
@@ -16249,7 +16485,7 @@
           <a:bodyPr wrap="square" lIns="0" tIns="0" rIns="0" bIns="0" rtlCol="0" anchor="ctr"/>
           <a:lstStyle/>
           <a:p>
-            <a:pPr indent="0" marL="0">
+            <a:pPr marL="0" indent="0">
               <a:buNone/>
             </a:pPr>
             <a:r>
@@ -16293,7 +16529,7 @@
             <a:prstDash val="solid"/>
           </a:ln>
           <a:effectLst>
-            <a:outerShdw sx="100000" sy="100000" kx="0" ky="0" algn="bl" rotWithShape="0" blurRad="101600" dist="25400" dir="5400000">
+            <a:outerShdw blurRad="101600" dist="25400" dir="5400000" algn="bl" rotWithShape="0">
               <a:srgbClr val="9AA9BA">
                 <a:alpha val="18000"/>
               </a:srgbClr>
@@ -16344,7 +16580,7 @@
           <a:bodyPr wrap="square" lIns="0" tIns="0" rIns="0" bIns="0" rtlCol="0" anchor="ctr"/>
           <a:lstStyle/>
           <a:p>
-            <a:pPr algn="ctr" indent="0" marL="0">
+            <a:pPr marL="0" indent="0" algn="ctr">
               <a:buNone/>
             </a:pPr>
             <a:r>
@@ -16383,7 +16619,7 @@
           <a:bodyPr wrap="square" lIns="0" tIns="0" rIns="0" bIns="0" rtlCol="0" anchor="ctr"/>
           <a:lstStyle/>
           <a:p>
-            <a:pPr algn="l" indent="0" marL="0">
+            <a:pPr marL="0" indent="0" algn="l">
               <a:buNone/>
             </a:pPr>
             <a:r>
@@ -16444,7 +16680,7 @@
           <a:bodyPr wrap="square" lIns="0" tIns="0" rIns="0" bIns="0" rtlCol="0" anchor="ctr"/>
           <a:lstStyle/>
           <a:p>
-            <a:pPr algn="ctr" indent="0" marL="0">
+            <a:pPr marL="0" indent="0" algn="ctr">
               <a:buNone/>
             </a:pPr>
             <a:r>
@@ -16483,7 +16719,7 @@
           <a:bodyPr wrap="square" lIns="0" tIns="0" rIns="0" bIns="0" rtlCol="0" anchor="ctr"/>
           <a:lstStyle/>
           <a:p>
-            <a:pPr algn="l" indent="0" marL="0">
+            <a:pPr marL="0" indent="0" algn="l">
               <a:buNone/>
             </a:pPr>
             <a:r>
@@ -16544,7 +16780,7 @@
           <a:bodyPr wrap="square" lIns="0" tIns="0" rIns="0" bIns="0" rtlCol="0" anchor="ctr"/>
           <a:lstStyle/>
           <a:p>
-            <a:pPr algn="ctr" indent="0" marL="0">
+            <a:pPr marL="0" indent="0" algn="ctr">
               <a:buNone/>
             </a:pPr>
             <a:r>
@@ -16583,7 +16819,7 @@
           <a:bodyPr wrap="square" lIns="0" tIns="0" rIns="0" bIns="0" rtlCol="0" anchor="ctr"/>
           <a:lstStyle/>
           <a:p>
-            <a:pPr algn="l" indent="0" marL="0">
+            <a:pPr marL="0" indent="0" algn="l">
               <a:buNone/>
             </a:pPr>
             <a:r>
@@ -16644,7 +16880,7 @@
           <a:bodyPr wrap="square" lIns="0" tIns="0" rIns="0" bIns="0" rtlCol="0" anchor="ctr"/>
           <a:lstStyle/>
           <a:p>
-            <a:pPr algn="ctr" indent="0" marL="0">
+            <a:pPr marL="0" indent="0" algn="ctr">
               <a:buNone/>
             </a:pPr>
             <a:r>
@@ -16683,7 +16919,7 @@
           <a:bodyPr wrap="square" lIns="0" tIns="0" rIns="0" bIns="0" rtlCol="0" anchor="ctr"/>
           <a:lstStyle/>
           <a:p>
-            <a:pPr algn="l" indent="0" marL="0">
+            <a:pPr marL="0" indent="0" algn="l">
               <a:buNone/>
             </a:pPr>
             <a:r>
@@ -16766,7 +17002,7 @@
           <a:bodyPr wrap="square" lIns="0" tIns="0" rIns="0" bIns="0" rtlCol="0" anchor="ctr"/>
           <a:lstStyle/>
           <a:p>
-            <a:pPr algn="ctr" indent="0" marL="0">
+            <a:pPr marL="0" indent="0" algn="ctr">
               <a:buNone/>
             </a:pPr>
             <a:r>
@@ -16805,7 +17041,7 @@
           <a:bodyPr wrap="square" lIns="0" tIns="0" rIns="0" bIns="0" rtlCol="0" anchor="ctr"/>
           <a:lstStyle/>
           <a:p>
-            <a:pPr indent="0" marL="0">
+            <a:pPr marL="0" indent="0">
               <a:buNone/>
             </a:pPr>
             <a:r>
@@ -16844,7 +17080,7 @@
           <a:bodyPr wrap="square" lIns="0" tIns="0" rIns="0" bIns="0" rtlCol="0" anchor="ctr"/>
           <a:lstStyle/>
           <a:p>
-            <a:pPr indent="0" marL="0">
+            <a:pPr marL="0" indent="0">
               <a:lnSpc>
                 <a:spcPct val="120000"/>
               </a:lnSpc>
@@ -16864,7 +17100,7 @@
             <a:endParaRPr lang="en-US" sz="1100" dirty="0"/>
           </a:p>
           <a:p>
-            <a:pPr indent="0" marL="0">
+            <a:pPr marL="0" indent="0">
               <a:lnSpc>
                 <a:spcPct val="120000"/>
               </a:lnSpc>
@@ -16906,7 +17142,7 @@
           <a:bodyPr wrap="square" lIns="0" tIns="0" rIns="0" bIns="0" rtlCol="0" anchor="ctr"/>
           <a:lstStyle/>
           <a:p>
-            <a:pPr algn="r" indent="0" marL="0">
+            <a:pPr marL="0" indent="0" algn="r">
               <a:buNone/>
             </a:pPr>
             <a:r>
@@ -16945,7 +17181,7 @@
           <a:bodyPr wrap="square" lIns="0" tIns="0" rIns="0" bIns="0" rtlCol="0" anchor="ctr"/>
           <a:lstStyle/>
           <a:p>
-            <a:pPr indent="0" marL="0">
+            <a:pPr marL="0" indent="0">
               <a:buNone/>
             </a:pPr>
             <a:r>
@@ -16979,6 +17215,7 @@
         <a:solidFill>
           <a:srgbClr val="F7F9FC"/>
         </a:solidFill>
+        <a:effectLst/>
       </p:bgPr>
     </p:bg>
     <p:spTree>
@@ -17016,11 +17253,11 @@
           <a:bodyPr wrap="square" lIns="0" tIns="0" rIns="0" bIns="0" rtlCol="0" anchor="ctr"/>
           <a:lstStyle/>
           <a:p>
-            <a:pPr algn="l" indent="0" marL="0">
-              <a:buNone/>
-            </a:pPr>
-            <a:r>
-              <a:rPr lang="en-US" sz="1300" b="1" spc="200" kern="0" dirty="0">
+            <a:pPr marL="0" indent="0" algn="l">
+              <a:buNone/>
+            </a:pPr>
+            <a:r>
+              <a:rPr lang="en-US" sz="1300" b="1" kern="0" spc="200" dirty="0">
                 <a:solidFill>
                   <a:srgbClr val="0088A3"/>
                 </a:solidFill>
@@ -17055,7 +17292,7 @@
           <a:bodyPr wrap="square" lIns="0" tIns="0" rIns="0" bIns="0" rtlCol="0" anchor="ctr"/>
           <a:lstStyle/>
           <a:p>
-            <a:pPr algn="l" indent="0" marL="0">
+            <a:pPr marL="0" indent="0" algn="l">
               <a:buNone/>
             </a:pPr>
             <a:r>
@@ -17099,7 +17336,7 @@
             <a:prstDash val="solid"/>
           </a:ln>
           <a:effectLst>
-            <a:outerShdw sx="100000" sy="100000" kx="0" ky="0" algn="bl" rotWithShape="0" blurRad="101600" dist="25400" dir="5400000">
+            <a:outerShdw blurRad="101600" dist="25400" dir="5400000" algn="bl" rotWithShape="0">
               <a:srgbClr val="9AA9BA">
                 <a:alpha val="18000"/>
               </a:srgbClr>
@@ -17168,7 +17405,7 @@
           <a:bodyPr wrap="square" lIns="0" tIns="0" rIns="0" bIns="0" rtlCol="0" anchor="ctr"/>
           <a:lstStyle/>
           <a:p>
-            <a:pPr algn="ctr" indent="0" marL="0">
+            <a:pPr marL="0" indent="0" algn="ctr">
               <a:buNone/>
             </a:pPr>
             <a:r>
@@ -17207,7 +17444,7 @@
           <a:bodyPr wrap="square" lIns="0" tIns="0" rIns="0" bIns="0" rtlCol="0" anchor="ctr"/>
           <a:lstStyle/>
           <a:p>
-            <a:pPr indent="0" marL="0">
+            <a:pPr marL="0" indent="0">
               <a:buNone/>
             </a:pPr>
             <a:r>
@@ -17315,7 +17552,7 @@
             <a:prstDash val="solid"/>
           </a:ln>
           <a:effectLst>
-            <a:outerShdw sx="100000" sy="100000" kx="0" ky="0" algn="bl" rotWithShape="0" blurRad="101600" dist="25400" dir="5400000">
+            <a:outerShdw blurRad="101600" dist="25400" dir="5400000" algn="bl" rotWithShape="0">
               <a:srgbClr val="9AA9BA">
                 <a:alpha val="18000"/>
               </a:srgbClr>
@@ -17384,7 +17621,7 @@
           <a:bodyPr wrap="square" lIns="0" tIns="0" rIns="0" bIns="0" rtlCol="0" anchor="ctr"/>
           <a:lstStyle/>
           <a:p>
-            <a:pPr algn="ctr" indent="0" marL="0">
+            <a:pPr marL="0" indent="0" algn="ctr">
               <a:buNone/>
             </a:pPr>
             <a:r>
@@ -17423,7 +17660,7 @@
           <a:bodyPr wrap="square" lIns="0" tIns="0" rIns="0" bIns="0" rtlCol="0" anchor="ctr"/>
           <a:lstStyle/>
           <a:p>
-            <a:pPr indent="0" marL="0">
+            <a:pPr marL="0" indent="0">
               <a:buNone/>
             </a:pPr>
             <a:r>
@@ -17573,7 +17810,7 @@
             <a:prstDash val="solid"/>
           </a:ln>
           <a:effectLst>
-            <a:outerShdw sx="100000" sy="100000" kx="0" ky="0" algn="bl" rotWithShape="0" blurRad="101600" dist="25400" dir="5400000">
+            <a:outerShdw blurRad="101600" dist="25400" dir="5400000" algn="bl" rotWithShape="0">
               <a:srgbClr val="9AA9BA">
                 <a:alpha val="18000"/>
               </a:srgbClr>
@@ -17642,7 +17879,7 @@
           <a:bodyPr wrap="square" lIns="0" tIns="0" rIns="0" bIns="0" rtlCol="0" anchor="ctr"/>
           <a:lstStyle/>
           <a:p>
-            <a:pPr algn="ctr" indent="0" marL="0">
+            <a:pPr marL="0" indent="0" algn="ctr">
               <a:buNone/>
             </a:pPr>
             <a:r>
@@ -17681,7 +17918,7 @@
           <a:bodyPr wrap="square" lIns="0" tIns="0" rIns="0" bIns="0" rtlCol="0" anchor="ctr"/>
           <a:lstStyle/>
           <a:p>
-            <a:pPr indent="0" marL="0">
+            <a:pPr marL="0" indent="0">
               <a:buNone/>
             </a:pPr>
             <a:r>
@@ -17826,7 +18063,7 @@
           <a:bodyPr wrap="square" lIns="0" tIns="0" rIns="0" bIns="0" rtlCol="0" anchor="ctr"/>
           <a:lstStyle/>
           <a:p>
-            <a:pPr algn="r" indent="0" marL="0">
+            <a:pPr marL="0" indent="0" algn="r">
               <a:buNone/>
             </a:pPr>
             <a:r>
@@ -17865,7 +18102,7 @@
           <a:bodyPr wrap="square" lIns="0" tIns="0" rIns="0" bIns="0" rtlCol="0" anchor="ctr"/>
           <a:lstStyle/>
           <a:p>
-            <a:pPr indent="0" marL="0">
+            <a:pPr marL="0" indent="0">
               <a:buNone/>
             </a:pPr>
             <a:r>
@@ -17899,6 +18136,7 @@
         <a:solidFill>
           <a:srgbClr val="F7F9FC"/>
         </a:solidFill>
+        <a:effectLst/>
       </p:bgPr>
     </p:bg>
     <p:spTree>
@@ -17936,11 +18174,11 @@
           <a:bodyPr wrap="square" lIns="0" tIns="0" rIns="0" bIns="0" rtlCol="0" anchor="ctr"/>
           <a:lstStyle/>
           <a:p>
-            <a:pPr algn="l" indent="0" marL="0">
-              <a:buNone/>
-            </a:pPr>
-            <a:r>
-              <a:rPr lang="en-US" sz="1300" b="1" spc="200" kern="0" dirty="0">
+            <a:pPr marL="0" indent="0" algn="l">
+              <a:buNone/>
+            </a:pPr>
+            <a:r>
+              <a:rPr lang="en-US" sz="1300" b="1" kern="0" spc="200" dirty="0">
                 <a:solidFill>
                   <a:srgbClr val="0088A3"/>
                 </a:solidFill>
@@ -17975,7 +18213,7 @@
           <a:bodyPr wrap="square" lIns="0" tIns="0" rIns="0" bIns="0" rtlCol="0" anchor="ctr"/>
           <a:lstStyle/>
           <a:p>
-            <a:pPr algn="l" indent="0" marL="0">
+            <a:pPr marL="0" indent="0" algn="l">
               <a:buNone/>
             </a:pPr>
             <a:r>
@@ -18019,7 +18257,7 @@
             <a:prstDash val="solid"/>
           </a:ln>
           <a:effectLst>
-            <a:outerShdw sx="100000" sy="100000" kx="0" ky="0" algn="bl" rotWithShape="0" blurRad="101600" dist="25400" dir="5400000">
+            <a:outerShdw blurRad="101600" dist="25400" dir="5400000" algn="bl" rotWithShape="0">
               <a:srgbClr val="9AA9BA">
                 <a:alpha val="18000"/>
               </a:srgbClr>
@@ -18048,7 +18286,7 @@
           <a:bodyPr wrap="square" lIns="0" tIns="0" rIns="0" bIns="0" rtlCol="0" anchor="ctr"/>
           <a:lstStyle/>
           <a:p>
-            <a:pPr indent="0" marL="0">
+            <a:pPr marL="0" indent="0">
               <a:buNone/>
             </a:pPr>
             <a:r>
@@ -18087,7 +18325,7 @@
           <a:bodyPr wrap="square" lIns="0" tIns="0" rIns="0" bIns="0" rtlCol="0" anchor="ctr"/>
           <a:lstStyle/>
           <a:p>
-            <a:pPr indent="0" marL="0">
+            <a:pPr marL="0" indent="0">
               <a:lnSpc>
                 <a:spcPct val="135000"/>
               </a:lnSpc>
@@ -18107,7 +18345,7 @@
             <a:endParaRPr lang="en-US" sz="1250" dirty="0"/>
           </a:p>
           <a:p>
-            <a:pPr indent="0" marL="0">
+            <a:pPr marL="0" indent="0">
               <a:lnSpc>
                 <a:spcPct val="135000"/>
               </a:lnSpc>
@@ -18127,7 +18365,7 @@
             <a:endParaRPr lang="en-US" sz="1250" dirty="0"/>
           </a:p>
           <a:p>
-            <a:pPr indent="0" marL="0">
+            <a:pPr marL="0" indent="0">
               <a:lnSpc>
                 <a:spcPct val="135000"/>
               </a:lnSpc>
@@ -18147,7 +18385,7 @@
             <a:endParaRPr lang="en-US" sz="1250" dirty="0"/>
           </a:p>
           <a:p>
-            <a:pPr indent="0" marL="0">
+            <a:pPr marL="0" indent="0">
               <a:lnSpc>
                 <a:spcPct val="135000"/>
               </a:lnSpc>
@@ -18167,7 +18405,7 @@
             <a:endParaRPr lang="en-US" sz="1250" dirty="0"/>
           </a:p>
           <a:p>
-            <a:pPr indent="0" marL="0">
+            <a:pPr marL="0" indent="0">
               <a:lnSpc>
                 <a:spcPct val="135000"/>
               </a:lnSpc>
@@ -18187,7 +18425,7 @@
             <a:endParaRPr lang="en-US" sz="1250" dirty="0"/>
           </a:p>
           <a:p>
-            <a:pPr indent="0" marL="0">
+            <a:pPr marL="0" indent="0">
               <a:lnSpc>
                 <a:spcPct val="135000"/>
               </a:lnSpc>
@@ -18252,7 +18490,7 @@
           <a:bodyPr wrap="square" lIns="0" tIns="0" rIns="0" bIns="0" rtlCol="0" anchor="ctr"/>
           <a:lstStyle/>
           <a:p>
-            <a:pPr indent="0" marL="0">
+            <a:pPr marL="0" indent="0">
               <a:lnSpc>
                 <a:spcPct val="130000"/>
               </a:lnSpc>
@@ -18299,7 +18537,7 @@
             <a:prstDash val="solid"/>
           </a:ln>
           <a:effectLst>
-            <a:outerShdw sx="100000" sy="100000" kx="0" ky="0" algn="bl" rotWithShape="0" blurRad="101600" dist="25400" dir="5400000">
+            <a:outerShdw blurRad="101600" dist="25400" dir="5400000" algn="bl" rotWithShape="0">
               <a:srgbClr val="9AA9BA">
                 <a:alpha val="18000"/>
               </a:srgbClr>
@@ -18348,7 +18586,7 @@
           <a:bodyPr wrap="square" lIns="0" tIns="0" rIns="0" bIns="0" rtlCol="0" anchor="ctr"/>
           <a:lstStyle/>
           <a:p>
-            <a:pPr algn="ctr" indent="0" marL="0">
+            <a:pPr marL="0" indent="0" algn="ctr">
               <a:buNone/>
             </a:pPr>
             <a:r>
@@ -18387,7 +18625,7 @@
           <a:bodyPr wrap="square" lIns="0" tIns="0" rIns="0" bIns="0" rtlCol="0" anchor="ctr"/>
           <a:lstStyle/>
           <a:p>
-            <a:pPr indent="0" marL="0">
+            <a:pPr marL="0" indent="0">
               <a:buNone/>
             </a:pPr>
             <a:r>
@@ -18426,7 +18664,7 @@
           <a:bodyPr wrap="square" lIns="0" tIns="0" rIns="0" bIns="0" rtlCol="0" anchor="ctr"/>
           <a:lstStyle/>
           <a:p>
-            <a:pPr indent="0" marL="0">
+            <a:pPr marL="0" indent="0">
               <a:buNone/>
             </a:pPr>
             <a:r>
@@ -18465,7 +18703,7 @@
           <a:bodyPr wrap="square" lIns="0" tIns="0" rIns="0" bIns="0" rtlCol="0" anchor="ctr"/>
           <a:lstStyle/>
           <a:p>
-            <a:pPr indent="0" marL="0">
+            <a:pPr marL="0" indent="0">
               <a:lnSpc>
                 <a:spcPct val="120000"/>
               </a:lnSpc>
@@ -18534,7 +18772,7 @@
           <a:bodyPr wrap="square" lIns="0" tIns="0" rIns="0" bIns="0" rtlCol="0" anchor="ctr"/>
           <a:lstStyle/>
           <a:p>
-            <a:pPr algn="ctr" indent="0" marL="0">
+            <a:pPr marL="0" indent="0" algn="ctr">
               <a:buNone/>
             </a:pPr>
             <a:r>
@@ -18600,7 +18838,7 @@
           <a:bodyPr wrap="square" lIns="0" tIns="0" rIns="0" bIns="0" rtlCol="0" anchor="ctr"/>
           <a:lstStyle/>
           <a:p>
-            <a:pPr algn="ctr" indent="0" marL="0">
+            <a:pPr marL="0" indent="0" algn="ctr">
               <a:buNone/>
             </a:pPr>
             <a:r>
@@ -18666,7 +18904,7 @@
           <a:bodyPr wrap="square" lIns="0" tIns="0" rIns="0" bIns="0" rtlCol="0" anchor="ctr"/>
           <a:lstStyle/>
           <a:p>
-            <a:pPr algn="ctr" indent="0" marL="0">
+            <a:pPr marL="0" indent="0" algn="ctr">
               <a:buNone/>
             </a:pPr>
             <a:r>
@@ -18729,7 +18967,7 @@
           <a:bodyPr wrap="square" lIns="0" tIns="0" rIns="0" bIns="0" rtlCol="0" anchor="ctr"/>
           <a:lstStyle/>
           <a:p>
-            <a:pPr indent="0" marL="0">
+            <a:pPr marL="0" indent="0">
               <a:buNone/>
             </a:pPr>
             <a:r>
@@ -18773,7 +19011,7 @@
             <a:prstDash val="solid"/>
           </a:ln>
           <a:effectLst>
-            <a:outerShdw sx="100000" sy="100000" kx="0" ky="0" algn="bl" rotWithShape="0" blurRad="101600" dist="25400" dir="5400000">
+            <a:outerShdw blurRad="101600" dist="25400" dir="5400000" algn="bl" rotWithShape="0">
               <a:srgbClr val="9AA9BA">
                 <a:alpha val="18000"/>
               </a:srgbClr>
@@ -18822,7 +19060,7 @@
           <a:bodyPr wrap="square" lIns="0" tIns="0" rIns="0" bIns="0" rtlCol="0" anchor="ctr"/>
           <a:lstStyle/>
           <a:p>
-            <a:pPr algn="ctr" indent="0" marL="0">
+            <a:pPr marL="0" indent="0" algn="ctr">
               <a:buNone/>
             </a:pPr>
             <a:r>
@@ -18861,7 +19099,7 @@
           <a:bodyPr wrap="square" lIns="0" tIns="0" rIns="0" bIns="0" rtlCol="0" anchor="ctr"/>
           <a:lstStyle/>
           <a:p>
-            <a:pPr indent="0" marL="0">
+            <a:pPr marL="0" indent="0">
               <a:buNone/>
             </a:pPr>
             <a:r>
@@ -18900,7 +19138,7 @@
           <a:bodyPr wrap="square" lIns="0" tIns="0" rIns="0" bIns="0" rtlCol="0" anchor="ctr"/>
           <a:lstStyle/>
           <a:p>
-            <a:pPr indent="0" marL="0">
+            <a:pPr marL="0" indent="0">
               <a:buNone/>
             </a:pPr>
             <a:r>
@@ -18939,7 +19177,7 @@
           <a:bodyPr wrap="square" lIns="0" tIns="0" rIns="0" bIns="0" rtlCol="0" anchor="ctr"/>
           <a:lstStyle/>
           <a:p>
-            <a:pPr indent="0" marL="0">
+            <a:pPr marL="0" indent="0">
               <a:lnSpc>
                 <a:spcPct val="120000"/>
               </a:lnSpc>
@@ -19008,7 +19246,7 @@
           <a:bodyPr wrap="square" lIns="0" tIns="0" rIns="0" bIns="0" rtlCol="0" anchor="ctr"/>
           <a:lstStyle/>
           <a:p>
-            <a:pPr algn="ctr" indent="0" marL="0">
+            <a:pPr marL="0" indent="0" algn="ctr">
               <a:buNone/>
             </a:pPr>
             <a:r>
@@ -19074,7 +19312,7 @@
           <a:bodyPr wrap="square" lIns="0" tIns="0" rIns="0" bIns="0" rtlCol="0" anchor="ctr"/>
           <a:lstStyle/>
           <a:p>
-            <a:pPr algn="ctr" indent="0" marL="0">
+            <a:pPr marL="0" indent="0" algn="ctr">
               <a:buNone/>
             </a:pPr>
             <a:r>
@@ -19140,7 +19378,7 @@
           <a:bodyPr wrap="square" lIns="0" tIns="0" rIns="0" bIns="0" rtlCol="0" anchor="ctr"/>
           <a:lstStyle/>
           <a:p>
-            <a:pPr algn="ctr" indent="0" marL="0">
+            <a:pPr marL="0" indent="0" algn="ctr">
               <a:buNone/>
             </a:pPr>
             <a:r>
@@ -19203,7 +19441,7 @@
           <a:bodyPr wrap="square" lIns="0" tIns="0" rIns="0" bIns="0" rtlCol="0" anchor="ctr"/>
           <a:lstStyle/>
           <a:p>
-            <a:pPr indent="0" marL="0">
+            <a:pPr marL="0" indent="0">
               <a:buNone/>
             </a:pPr>
             <a:r>
@@ -19242,7 +19480,7 @@
           <a:bodyPr wrap="square" lIns="0" tIns="0" rIns="0" bIns="0" rtlCol="0" anchor="ctr"/>
           <a:lstStyle/>
           <a:p>
-            <a:pPr algn="r" indent="0" marL="0">
+            <a:pPr marL="0" indent="0" algn="r">
               <a:buNone/>
             </a:pPr>
             <a:r>
@@ -19281,7 +19519,7 @@
           <a:bodyPr wrap="square" lIns="0" tIns="0" rIns="0" bIns="0" rtlCol="0" anchor="ctr"/>
           <a:lstStyle/>
           <a:p>
-            <a:pPr indent="0" marL="0">
+            <a:pPr marL="0" indent="0">
               <a:buNone/>
             </a:pPr>
             <a:r>
@@ -19315,6 +19553,7 @@
         <a:solidFill>
           <a:srgbClr val="F7F9FC"/>
         </a:solidFill>
+        <a:effectLst/>
       </p:bgPr>
     </p:bg>
     <p:spTree>
@@ -19352,11 +19591,11 @@
           <a:bodyPr wrap="square" lIns="0" tIns="0" rIns="0" bIns="0" rtlCol="0" anchor="ctr"/>
           <a:lstStyle/>
           <a:p>
-            <a:pPr algn="l" indent="0" marL="0">
-              <a:buNone/>
-            </a:pPr>
-            <a:r>
-              <a:rPr lang="en-US" sz="1300" b="1" spc="200" kern="0" dirty="0">
+            <a:pPr marL="0" indent="0" algn="l">
+              <a:buNone/>
+            </a:pPr>
+            <a:r>
+              <a:rPr lang="en-US" sz="1300" b="1" kern="0" spc="200" dirty="0">
                 <a:solidFill>
                   <a:srgbClr val="0088A3"/>
                 </a:solidFill>
@@ -19391,7 +19630,7 @@
           <a:bodyPr wrap="square" lIns="0" tIns="0" rIns="0" bIns="0" rtlCol="0" anchor="ctr"/>
           <a:lstStyle/>
           <a:p>
-            <a:pPr algn="l" indent="0" marL="0">
+            <a:pPr marL="0" indent="0" algn="l">
               <a:buNone/>
             </a:pPr>
             <a:r>
@@ -19430,7 +19669,7 @@
           <a:bodyPr wrap="square" lIns="0" tIns="0" rIns="0" bIns="0" rtlCol="0" anchor="ctr"/>
           <a:lstStyle/>
           <a:p>
-            <a:pPr indent="0" marL="0">
+            <a:pPr marL="0" indent="0">
               <a:lnSpc>
                 <a:spcPct val="130000"/>
               </a:lnSpc>
@@ -19492,7 +19731,7 @@
           <a:bodyPr wrap="square" lIns="0" tIns="0" rIns="0" bIns="0" rtlCol="0" anchor="ctr"/>
           <a:lstStyle/>
           <a:p>
-            <a:pPr algn="ctr" indent="0" marL="0">
+            <a:pPr marL="0" indent="0" algn="ctr">
               <a:buNone/>
             </a:pPr>
             <a:r>
@@ -19531,7 +19770,7 @@
           <a:bodyPr wrap="square" lIns="0" tIns="0" rIns="0" bIns="0" rtlCol="0" anchor="ctr"/>
           <a:lstStyle/>
           <a:p>
-            <a:pPr indent="0" marL="0">
+            <a:pPr marL="0" indent="0">
               <a:buNone/>
             </a:pPr>
             <a:r>
@@ -19545,9 +19784,6 @@
               </a:rPr>
               <a:t>Fairness  </a:t>
             </a:r>
-            <a:pPr indent="0" marL="0">
-              <a:buNone/>
-            </a:pPr>
             <a:r>
               <a:rPr lang="en-US" sz="1250" dirty="0">
                 <a:solidFill>
@@ -19604,7 +19840,7 @@
           <a:bodyPr wrap="square" lIns="0" tIns="0" rIns="0" bIns="0" rtlCol="0" anchor="ctr"/>
           <a:lstStyle/>
           <a:p>
-            <a:pPr algn="ctr" indent="0" marL="0">
+            <a:pPr marL="0" indent="0" algn="ctr">
               <a:buNone/>
             </a:pPr>
             <a:r>
@@ -19643,7 +19879,7 @@
           <a:bodyPr wrap="square" lIns="0" tIns="0" rIns="0" bIns="0" rtlCol="0" anchor="ctr"/>
           <a:lstStyle/>
           <a:p>
-            <a:pPr indent="0" marL="0">
+            <a:pPr marL="0" indent="0">
               <a:buNone/>
             </a:pPr>
             <a:r>
@@ -19657,9 +19893,6 @@
               </a:rPr>
               <a:t>ArrayDeque  </a:t>
             </a:r>
-            <a:pPr indent="0" marL="0">
-              <a:buNone/>
-            </a:pPr>
             <a:r>
               <a:rPr lang="en-US" sz="1250" dirty="0">
                 <a:solidFill>
@@ -19716,7 +19949,7 @@
           <a:bodyPr wrap="square" lIns="0" tIns="0" rIns="0" bIns="0" rtlCol="0" anchor="ctr"/>
           <a:lstStyle/>
           <a:p>
-            <a:pPr algn="ctr" indent="0" marL="0">
+            <a:pPr marL="0" indent="0" algn="ctr">
               <a:buNone/>
             </a:pPr>
             <a:r>
@@ -19755,7 +19988,7 @@
           <a:bodyPr wrap="square" lIns="0" tIns="0" rIns="0" bIns="0" rtlCol="0" anchor="ctr"/>
           <a:lstStyle/>
           <a:p>
-            <a:pPr indent="0" marL="0">
+            <a:pPr marL="0" indent="0">
               <a:buNone/>
             </a:pPr>
             <a:r>
@@ -19769,9 +20002,6 @@
               </a:rPr>
               <a:t>Real-time Ready  </a:t>
             </a:r>
-            <a:pPr indent="0" marL="0">
-              <a:buNone/>
-            </a:pPr>
             <a:r>
               <a:rPr lang="en-US" sz="1250" dirty="0">
                 <a:solidFill>
@@ -19813,7 +20043,7 @@
             <a:prstDash val="solid"/>
           </a:ln>
           <a:effectLst>
-            <a:outerShdw sx="100000" sy="100000" kx="0" ky="0" algn="bl" rotWithShape="0" blurRad="101600" dist="25400" dir="5400000">
+            <a:outerShdw blurRad="101600" dist="25400" dir="5400000" algn="bl" rotWithShape="0">
               <a:srgbClr val="9AA9BA">
                 <a:alpha val="18000"/>
               </a:srgbClr>
@@ -19842,7 +20072,7 @@
           <a:bodyPr wrap="square" lIns="0" tIns="0" rIns="0" bIns="0" rtlCol="0" anchor="ctr"/>
           <a:lstStyle/>
           <a:p>
-            <a:pPr algn="ctr" indent="0" marL="0">
+            <a:pPr marL="0" indent="0" algn="ctr">
               <a:buNone/>
             </a:pPr>
             <a:r>
@@ -19881,7 +20111,7 @@
           <a:bodyPr wrap="square" lIns="0" tIns="0" rIns="0" bIns="0" rtlCol="0" anchor="ctr"/>
           <a:lstStyle/>
           <a:p>
-            <a:pPr algn="ctr" indent="0" marL="0">
+            <a:pPr marL="0" indent="0" algn="ctr">
               <a:buNone/>
             </a:pPr>
             <a:r>
@@ -19943,7 +20173,7 @@
           <a:bodyPr wrap="square" lIns="0" tIns="0" rIns="0" bIns="0" rtlCol="0" anchor="ctr"/>
           <a:lstStyle/>
           <a:p>
-            <a:pPr algn="ctr" indent="0" marL="0">
+            <a:pPr marL="0" indent="0" algn="ctr">
               <a:buNone/>
             </a:pPr>
             <a:r>
@@ -19982,7 +20212,7 @@
           <a:bodyPr wrap="square" lIns="0" tIns="0" rIns="0" bIns="0" rtlCol="0" anchor="ctr"/>
           <a:lstStyle/>
           <a:p>
-            <a:pPr algn="ctr" indent="0" marL="0">
+            <a:pPr marL="0" indent="0" algn="ctr">
               <a:buNone/>
             </a:pPr>
             <a:r>
@@ -20021,7 +20251,7 @@
           <a:bodyPr wrap="square" lIns="0" tIns="0" rIns="0" bIns="0" rtlCol="0" anchor="ctr"/>
           <a:lstStyle/>
           <a:p>
-            <a:pPr algn="ctr" indent="0" marL="0">
+            <a:pPr marL="0" indent="0" algn="ctr">
               <a:buNone/>
             </a:pPr>
             <a:r>
@@ -20060,7 +20290,7 @@
           <a:bodyPr wrap="square" lIns="0" tIns="0" rIns="0" bIns="0" rtlCol="0" anchor="ctr"/>
           <a:lstStyle/>
           <a:p>
-            <a:pPr algn="r" indent="0" marL="0">
+            <a:pPr marL="0" indent="0" algn="r">
               <a:buNone/>
             </a:pPr>
             <a:r>
@@ -20099,7 +20329,7 @@
           <a:bodyPr wrap="square" lIns="0" tIns="0" rIns="0" bIns="0" rtlCol="0" anchor="ctr"/>
           <a:lstStyle/>
           <a:p>
-            <a:pPr indent="0" marL="0">
+            <a:pPr marL="0" indent="0">
               <a:buNone/>
             </a:pPr>
             <a:r>
@@ -20133,6 +20363,7 @@
         <a:solidFill>
           <a:srgbClr val="F7F9FC"/>
         </a:solidFill>
+        <a:effectLst/>
       </p:bgPr>
     </p:bg>
     <p:spTree>
@@ -20170,11 +20401,11 @@
           <a:bodyPr wrap="square" lIns="0" tIns="0" rIns="0" bIns="0" rtlCol="0" anchor="ctr"/>
           <a:lstStyle/>
           <a:p>
-            <a:pPr algn="l" indent="0" marL="0">
-              <a:buNone/>
-            </a:pPr>
-            <a:r>
-              <a:rPr lang="en-US" sz="1300" b="1" spc="200" kern="0" dirty="0">
+            <a:pPr marL="0" indent="0" algn="l">
+              <a:buNone/>
+            </a:pPr>
+            <a:r>
+              <a:rPr lang="en-US" sz="1300" b="1" kern="0" spc="200" dirty="0">
                 <a:solidFill>
                   <a:srgbClr val="0088A3"/>
                 </a:solidFill>
@@ -20209,7 +20440,7 @@
           <a:bodyPr wrap="square" lIns="0" tIns="0" rIns="0" bIns="0" rtlCol="0" anchor="ctr"/>
           <a:lstStyle/>
           <a:p>
-            <a:pPr algn="l" indent="0" marL="0">
+            <a:pPr marL="0" indent="0" algn="l">
               <a:buNone/>
             </a:pPr>
             <a:r>
@@ -20253,7 +20484,7 @@
             <a:prstDash val="solid"/>
           </a:ln>
           <a:effectLst>
-            <a:outerShdw sx="100000" sy="100000" kx="0" ky="0" algn="bl" rotWithShape="0" blurRad="101600" dist="25400" dir="5400000">
+            <a:outerShdw blurRad="101600" dist="25400" dir="5400000" algn="bl" rotWithShape="0">
               <a:srgbClr val="9AA9BA">
                 <a:alpha val="18000"/>
               </a:srgbClr>
@@ -20302,7 +20533,7 @@
           <a:bodyPr wrap="square" lIns="0" tIns="0" rIns="0" bIns="0" rtlCol="0" anchor="ctr"/>
           <a:lstStyle/>
           <a:p>
-            <a:pPr algn="ctr" indent="0" marL="0">
+            <a:pPr marL="0" indent="0" algn="ctr">
               <a:buNone/>
             </a:pPr>
             <a:r>
@@ -20341,7 +20572,7 @@
           <a:bodyPr wrap="square" lIns="0" tIns="0" rIns="0" bIns="0" rtlCol="0" anchor="ctr"/>
           <a:lstStyle/>
           <a:p>
-            <a:pPr algn="ctr" indent="0" marL="0">
+            <a:pPr marL="0" indent="0" algn="ctr">
               <a:buNone/>
             </a:pPr>
             <a:r>
@@ -20380,7 +20611,7 @@
           <a:bodyPr wrap="square" lIns="0" tIns="0" rIns="0" bIns="0" rtlCol="0" anchor="ctr"/>
           <a:lstStyle/>
           <a:p>
-            <a:pPr algn="ctr" indent="0" marL="0">
+            <a:pPr marL="0" indent="0" algn="ctr">
               <a:lnSpc>
                 <a:spcPct val="120000"/>
               </a:lnSpc>
@@ -20451,7 +20682,7 @@
             <a:prstDash val="solid"/>
           </a:ln>
           <a:effectLst>
-            <a:outerShdw sx="100000" sy="100000" kx="0" ky="0" algn="bl" rotWithShape="0" blurRad="101600" dist="25400" dir="5400000">
+            <a:outerShdw blurRad="101600" dist="25400" dir="5400000" algn="bl" rotWithShape="0">
               <a:srgbClr val="9AA9BA">
                 <a:alpha val="18000"/>
               </a:srgbClr>
@@ -20500,7 +20731,7 @@
           <a:bodyPr wrap="square" lIns="0" tIns="0" rIns="0" bIns="0" rtlCol="0" anchor="ctr"/>
           <a:lstStyle/>
           <a:p>
-            <a:pPr algn="ctr" indent="0" marL="0">
+            <a:pPr marL="0" indent="0" algn="ctr">
               <a:buNone/>
             </a:pPr>
             <a:r>
@@ -20539,7 +20770,7 @@
           <a:bodyPr wrap="square" lIns="0" tIns="0" rIns="0" bIns="0" rtlCol="0" anchor="ctr"/>
           <a:lstStyle/>
           <a:p>
-            <a:pPr algn="ctr" indent="0" marL="0">
+            <a:pPr marL="0" indent="0" algn="ctr">
               <a:buNone/>
             </a:pPr>
             <a:r>
@@ -20578,7 +20809,7 @@
           <a:bodyPr wrap="square" lIns="0" tIns="0" rIns="0" bIns="0" rtlCol="0" anchor="ctr"/>
           <a:lstStyle/>
           <a:p>
-            <a:pPr algn="ctr" indent="0" marL="0">
+            <a:pPr marL="0" indent="0" algn="ctr">
               <a:lnSpc>
                 <a:spcPct val="120000"/>
               </a:lnSpc>
@@ -20649,7 +20880,7 @@
             <a:prstDash val="solid"/>
           </a:ln>
           <a:effectLst>
-            <a:outerShdw sx="100000" sy="100000" kx="0" ky="0" algn="bl" rotWithShape="0" blurRad="101600" dist="25400" dir="5400000">
+            <a:outerShdw blurRad="101600" dist="25400" dir="5400000" algn="bl" rotWithShape="0">
               <a:srgbClr val="9AA9BA">
                 <a:alpha val="18000"/>
               </a:srgbClr>
@@ -20698,7 +20929,7 @@
           <a:bodyPr wrap="square" lIns="0" tIns="0" rIns="0" bIns="0" rtlCol="0" anchor="ctr"/>
           <a:lstStyle/>
           <a:p>
-            <a:pPr algn="ctr" indent="0" marL="0">
+            <a:pPr marL="0" indent="0" algn="ctr">
               <a:buNone/>
             </a:pPr>
             <a:r>
@@ -20737,7 +20968,7 @@
           <a:bodyPr wrap="square" lIns="0" tIns="0" rIns="0" bIns="0" rtlCol="0" anchor="ctr"/>
           <a:lstStyle/>
           <a:p>
-            <a:pPr algn="ctr" indent="0" marL="0">
+            <a:pPr marL="0" indent="0" algn="ctr">
               <a:buNone/>
             </a:pPr>
             <a:r>
@@ -20776,7 +21007,7 @@
           <a:bodyPr wrap="square" lIns="0" tIns="0" rIns="0" bIns="0" rtlCol="0" anchor="ctr"/>
           <a:lstStyle/>
           <a:p>
-            <a:pPr algn="ctr" indent="0" marL="0">
+            <a:pPr marL="0" indent="0" algn="ctr">
               <a:lnSpc>
                 <a:spcPct val="120000"/>
               </a:lnSpc>
@@ -20847,7 +21078,7 @@
             <a:prstDash val="solid"/>
           </a:ln>
           <a:effectLst>
-            <a:outerShdw sx="100000" sy="100000" kx="0" ky="0" algn="bl" rotWithShape="0" blurRad="101600" dist="25400" dir="5400000">
+            <a:outerShdw blurRad="101600" dist="25400" dir="5400000" algn="bl" rotWithShape="0">
               <a:srgbClr val="9AA9BA">
                 <a:alpha val="18000"/>
               </a:srgbClr>
@@ -20896,7 +21127,7 @@
           <a:bodyPr wrap="square" lIns="0" tIns="0" rIns="0" bIns="0" rtlCol="0" anchor="ctr"/>
           <a:lstStyle/>
           <a:p>
-            <a:pPr algn="ctr" indent="0" marL="0">
+            <a:pPr marL="0" indent="0" algn="ctr">
               <a:buNone/>
             </a:pPr>
             <a:r>
@@ -20935,7 +21166,7 @@
           <a:bodyPr wrap="square" lIns="0" tIns="0" rIns="0" bIns="0" rtlCol="0" anchor="ctr"/>
           <a:lstStyle/>
           <a:p>
-            <a:pPr algn="ctr" indent="0" marL="0">
+            <a:pPr marL="0" indent="0" algn="ctr">
               <a:buNone/>
             </a:pPr>
             <a:r>
@@ -20974,7 +21205,7 @@
           <a:bodyPr wrap="square" lIns="0" tIns="0" rIns="0" bIns="0" rtlCol="0" anchor="ctr"/>
           <a:lstStyle/>
           <a:p>
-            <a:pPr algn="ctr" indent="0" marL="0">
+            <a:pPr marL="0" indent="0" algn="ctr">
               <a:lnSpc>
                 <a:spcPct val="120000"/>
               </a:lnSpc>
@@ -21021,7 +21252,7 @@
             <a:prstDash val="solid"/>
           </a:ln>
           <a:effectLst>
-            <a:outerShdw sx="100000" sy="100000" kx="0" ky="0" algn="bl" rotWithShape="0" blurRad="101600" dist="25400" dir="5400000">
+            <a:outerShdw blurRad="101600" dist="25400" dir="5400000" algn="bl" rotWithShape="0">
               <a:srgbClr val="9AA9BA">
                 <a:alpha val="18000"/>
               </a:srgbClr>
@@ -21050,7 +21281,7 @@
           <a:bodyPr wrap="square" lIns="0" tIns="0" rIns="0" bIns="0" rtlCol="0" anchor="ctr"/>
           <a:lstStyle/>
           <a:p>
-            <a:pPr indent="0" marL="0">
+            <a:pPr marL="0" indent="0">
               <a:buNone/>
             </a:pPr>
             <a:r>
@@ -21089,7 +21320,7 @@
           <a:bodyPr wrap="square" lIns="0" tIns="0" rIns="0" bIns="0" rtlCol="0" anchor="ctr"/>
           <a:lstStyle/>
           <a:p>
-            <a:pPr indent="0" marL="0">
+            <a:pPr marL="0" indent="0">
               <a:lnSpc>
                 <a:spcPct val="122000"/>
               </a:lnSpc>
@@ -21109,7 +21340,7 @@
             <a:endParaRPr lang="en-US" sz="1150" dirty="0"/>
           </a:p>
           <a:p>
-            <a:pPr indent="0" marL="0">
+            <a:pPr marL="0" indent="0">
               <a:lnSpc>
                 <a:spcPct val="122000"/>
               </a:lnSpc>
@@ -21129,7 +21360,7 @@
             <a:endParaRPr lang="en-US" sz="1150" dirty="0"/>
           </a:p>
           <a:p>
-            <a:pPr indent="0" marL="0">
+            <a:pPr marL="0" indent="0">
               <a:lnSpc>
                 <a:spcPct val="122000"/>
               </a:lnSpc>
@@ -21149,7 +21380,7 @@
             <a:endParaRPr lang="en-US" sz="1150" dirty="0"/>
           </a:p>
           <a:p>
-            <a:pPr indent="0" marL="0">
+            <a:pPr marL="0" indent="0">
               <a:lnSpc>
                 <a:spcPct val="122000"/>
               </a:lnSpc>
@@ -21169,7 +21400,7 @@
             <a:endParaRPr lang="en-US" sz="1150" dirty="0"/>
           </a:p>
           <a:p>
-            <a:pPr indent="0" marL="0">
+            <a:pPr marL="0" indent="0">
               <a:lnSpc>
                 <a:spcPct val="122000"/>
               </a:lnSpc>
@@ -21189,7 +21420,7 @@
             <a:endParaRPr lang="en-US" sz="1150" dirty="0"/>
           </a:p>
           <a:p>
-            <a:pPr indent="0" marL="0">
+            <a:pPr marL="0" indent="0">
               <a:lnSpc>
                 <a:spcPct val="122000"/>
               </a:lnSpc>
@@ -21209,7 +21440,7 @@
             <a:endParaRPr lang="en-US" sz="1150" dirty="0"/>
           </a:p>
           <a:p>
-            <a:pPr indent="0" marL="0">
+            <a:pPr marL="0" indent="0">
               <a:lnSpc>
                 <a:spcPct val="122000"/>
               </a:lnSpc>
@@ -21229,7 +21460,7 @@
             <a:endParaRPr lang="en-US" sz="1150" dirty="0"/>
           </a:p>
           <a:p>
-            <a:pPr indent="0" marL="0">
+            <a:pPr marL="0" indent="0">
               <a:lnSpc>
                 <a:spcPct val="122000"/>
               </a:lnSpc>
@@ -21249,7 +21480,7 @@
             <a:endParaRPr lang="en-US" sz="1150" dirty="0"/>
           </a:p>
           <a:p>
-            <a:pPr indent="0" marL="0">
+            <a:pPr marL="0" indent="0">
               <a:lnSpc>
                 <a:spcPct val="122000"/>
               </a:lnSpc>
@@ -21269,7 +21500,7 @@
             <a:endParaRPr lang="en-US" sz="1150" dirty="0"/>
           </a:p>
           <a:p>
-            <a:pPr indent="0" marL="0">
+            <a:pPr marL="0" indent="0">
               <a:lnSpc>
                 <a:spcPct val="122000"/>
               </a:lnSpc>
@@ -21311,7 +21542,7 @@
           <a:bodyPr wrap="square" lIns="0" tIns="0" rIns="0" bIns="0" rtlCol="0" anchor="ctr"/>
           <a:lstStyle/>
           <a:p>
-            <a:pPr algn="r" indent="0" marL="0">
+            <a:pPr marL="0" indent="0" algn="r">
               <a:buNone/>
             </a:pPr>
             <a:r>
@@ -21350,7 +21581,7 @@
           <a:bodyPr wrap="square" lIns="0" tIns="0" rIns="0" bIns="0" rtlCol="0" anchor="ctr"/>
           <a:lstStyle/>
           <a:p>
-            <a:pPr indent="0" marL="0">
+            <a:pPr marL="0" indent="0">
               <a:buNone/>
             </a:pPr>
             <a:r>
@@ -21384,6 +21615,7 @@
         <a:solidFill>
           <a:srgbClr val="F7F9FC"/>
         </a:solidFill>
+        <a:effectLst/>
       </p:bgPr>
     </p:bg>
     <p:spTree>
@@ -21421,11 +21653,11 @@
           <a:bodyPr wrap="square" lIns="0" tIns="0" rIns="0" bIns="0" rtlCol="0" anchor="ctr"/>
           <a:lstStyle/>
           <a:p>
-            <a:pPr algn="l" indent="0" marL="0">
-              <a:buNone/>
-            </a:pPr>
-            <a:r>
-              <a:rPr lang="en-US" sz="1300" b="1" spc="200" kern="0" dirty="0">
+            <a:pPr marL="0" indent="0" algn="l">
+              <a:buNone/>
+            </a:pPr>
+            <a:r>
+              <a:rPr lang="en-US" sz="1300" b="1" kern="0" spc="200" dirty="0">
                 <a:solidFill>
                   <a:srgbClr val="0088A3"/>
                 </a:solidFill>
@@ -21460,7 +21692,7 @@
           <a:bodyPr wrap="square" lIns="0" tIns="0" rIns="0" bIns="0" rtlCol="0" anchor="ctr"/>
           <a:lstStyle/>
           <a:p>
-            <a:pPr algn="l" indent="0" marL="0">
+            <a:pPr marL="0" indent="0" algn="l">
               <a:buNone/>
             </a:pPr>
             <a:r>
@@ -21504,7 +21736,7 @@
             <a:prstDash val="solid"/>
           </a:ln>
           <a:effectLst>
-            <a:outerShdw sx="100000" sy="100000" kx="0" ky="0" algn="bl" rotWithShape="0" blurRad="101600" dist="25400" dir="5400000">
+            <a:outerShdw blurRad="101600" dist="25400" dir="5400000" algn="bl" rotWithShape="0">
               <a:srgbClr val="9AA9BA">
                 <a:alpha val="18000"/>
               </a:srgbClr>
@@ -21553,7 +21785,7 @@
           <a:bodyPr wrap="square" lIns="0" tIns="0" rIns="0" bIns="0" rtlCol="0" anchor="ctr"/>
           <a:lstStyle/>
           <a:p>
-            <a:pPr algn="ctr" indent="0" marL="0">
+            <a:pPr marL="0" indent="0" algn="ctr">
               <a:buNone/>
             </a:pPr>
             <a:r>
@@ -21592,7 +21824,7 @@
           <a:bodyPr wrap="square" lIns="0" tIns="0" rIns="0" bIns="0" rtlCol="0" anchor="ctr"/>
           <a:lstStyle/>
           <a:p>
-            <a:pPr algn="ctr" indent="0" marL="0">
+            <a:pPr marL="0" indent="0" algn="ctr">
               <a:buNone/>
             </a:pPr>
             <a:r>
@@ -21631,7 +21863,7 @@
           <a:bodyPr wrap="square" lIns="0" tIns="0" rIns="0" bIns="0" rtlCol="0" anchor="ctr"/>
           <a:lstStyle/>
           <a:p>
-            <a:pPr algn="ctr" indent="0" marL="0">
+            <a:pPr marL="0" indent="0" algn="ctr">
               <a:lnSpc>
                 <a:spcPct val="120000"/>
               </a:lnSpc>
@@ -21702,7 +21934,7 @@
             <a:prstDash val="solid"/>
           </a:ln>
           <a:effectLst>
-            <a:outerShdw sx="100000" sy="100000" kx="0" ky="0" algn="bl" rotWithShape="0" blurRad="101600" dist="25400" dir="5400000">
+            <a:outerShdw blurRad="101600" dist="25400" dir="5400000" algn="bl" rotWithShape="0">
               <a:srgbClr val="9AA9BA">
                 <a:alpha val="18000"/>
               </a:srgbClr>
@@ -21751,7 +21983,7 @@
           <a:bodyPr wrap="square" lIns="0" tIns="0" rIns="0" bIns="0" rtlCol="0" anchor="ctr"/>
           <a:lstStyle/>
           <a:p>
-            <a:pPr algn="ctr" indent="0" marL="0">
+            <a:pPr marL="0" indent="0" algn="ctr">
               <a:buNone/>
             </a:pPr>
             <a:r>
@@ -21790,7 +22022,7 @@
           <a:bodyPr wrap="square" lIns="0" tIns="0" rIns="0" bIns="0" rtlCol="0" anchor="ctr"/>
           <a:lstStyle/>
           <a:p>
-            <a:pPr algn="ctr" indent="0" marL="0">
+            <a:pPr marL="0" indent="0" algn="ctr">
               <a:buNone/>
             </a:pPr>
             <a:r>
@@ -21829,7 +22061,7 @@
           <a:bodyPr wrap="square" lIns="0" tIns="0" rIns="0" bIns="0" rtlCol="0" anchor="ctr"/>
           <a:lstStyle/>
           <a:p>
-            <a:pPr algn="ctr" indent="0" marL="0">
+            <a:pPr marL="0" indent="0" algn="ctr">
               <a:lnSpc>
                 <a:spcPct val="120000"/>
               </a:lnSpc>
@@ -21900,7 +22132,7 @@
             <a:prstDash val="solid"/>
           </a:ln>
           <a:effectLst>
-            <a:outerShdw sx="100000" sy="100000" kx="0" ky="0" algn="bl" rotWithShape="0" blurRad="101600" dist="25400" dir="5400000">
+            <a:outerShdw blurRad="101600" dist="25400" dir="5400000" algn="bl" rotWithShape="0">
               <a:srgbClr val="9AA9BA">
                 <a:alpha val="18000"/>
               </a:srgbClr>
@@ -21949,7 +22181,7 @@
           <a:bodyPr wrap="square" lIns="0" tIns="0" rIns="0" bIns="0" rtlCol="0" anchor="ctr"/>
           <a:lstStyle/>
           <a:p>
-            <a:pPr algn="ctr" indent="0" marL="0">
+            <a:pPr marL="0" indent="0" algn="ctr">
               <a:buNone/>
             </a:pPr>
             <a:r>
@@ -21988,7 +22220,7 @@
           <a:bodyPr wrap="square" lIns="0" tIns="0" rIns="0" bIns="0" rtlCol="0" anchor="ctr"/>
           <a:lstStyle/>
           <a:p>
-            <a:pPr algn="ctr" indent="0" marL="0">
+            <a:pPr marL="0" indent="0" algn="ctr">
               <a:buNone/>
             </a:pPr>
             <a:r>
@@ -22027,7 +22259,7 @@
           <a:bodyPr wrap="square" lIns="0" tIns="0" rIns="0" bIns="0" rtlCol="0" anchor="ctr"/>
           <a:lstStyle/>
           <a:p>
-            <a:pPr algn="ctr" indent="0" marL="0">
+            <a:pPr marL="0" indent="0" algn="ctr">
               <a:lnSpc>
                 <a:spcPct val="120000"/>
               </a:lnSpc>
@@ -22098,7 +22330,7 @@
             <a:prstDash val="solid"/>
           </a:ln>
           <a:effectLst>
-            <a:outerShdw sx="100000" sy="100000" kx="0" ky="0" algn="bl" rotWithShape="0" blurRad="101600" dist="25400" dir="5400000">
+            <a:outerShdw blurRad="101600" dist="25400" dir="5400000" algn="bl" rotWithShape="0">
               <a:srgbClr val="9AA9BA">
                 <a:alpha val="18000"/>
               </a:srgbClr>
@@ -22147,7 +22379,7 @@
           <a:bodyPr wrap="square" lIns="0" tIns="0" rIns="0" bIns="0" rtlCol="0" anchor="ctr"/>
           <a:lstStyle/>
           <a:p>
-            <a:pPr algn="ctr" indent="0" marL="0">
+            <a:pPr marL="0" indent="0" algn="ctr">
               <a:buNone/>
             </a:pPr>
             <a:r>
@@ -22186,7 +22418,7 @@
           <a:bodyPr wrap="square" lIns="0" tIns="0" rIns="0" bIns="0" rtlCol="0" anchor="ctr"/>
           <a:lstStyle/>
           <a:p>
-            <a:pPr algn="ctr" indent="0" marL="0">
+            <a:pPr marL="0" indent="0" algn="ctr">
               <a:buNone/>
             </a:pPr>
             <a:r>
@@ -22225,7 +22457,7 @@
           <a:bodyPr wrap="square" lIns="0" tIns="0" rIns="0" bIns="0" rtlCol="0" anchor="ctr"/>
           <a:lstStyle/>
           <a:p>
-            <a:pPr algn="ctr" indent="0" marL="0">
+            <a:pPr marL="0" indent="0" algn="ctr">
               <a:lnSpc>
                 <a:spcPct val="120000"/>
               </a:lnSpc>
@@ -22272,7 +22504,7 @@
             <a:prstDash val="solid"/>
           </a:ln>
           <a:effectLst>
-            <a:outerShdw sx="100000" sy="100000" kx="0" ky="0" algn="bl" rotWithShape="0" blurRad="101600" dist="25400" dir="5400000">
+            <a:outerShdw blurRad="101600" dist="25400" dir="5400000" algn="bl" rotWithShape="0">
               <a:srgbClr val="9AA9BA">
                 <a:alpha val="18000"/>
               </a:srgbClr>
@@ -22301,7 +22533,7 @@
           <a:bodyPr wrap="square" lIns="0" tIns="0" rIns="0" bIns="0" rtlCol="0" anchor="ctr"/>
           <a:lstStyle/>
           <a:p>
-            <a:pPr indent="0" marL="0">
+            <a:pPr marL="0" indent="0">
               <a:buNone/>
             </a:pPr>
             <a:r>
@@ -22340,7 +22572,7 @@
           <a:bodyPr wrap="square" lIns="0" tIns="0" rIns="0" bIns="0" rtlCol="0" anchor="ctr"/>
           <a:lstStyle/>
           <a:p>
-            <a:pPr indent="0" marL="0">
+            <a:pPr marL="0" indent="0">
               <a:lnSpc>
                 <a:spcPct val="130000"/>
               </a:lnSpc>
@@ -22360,7 +22592,7 @@
             <a:endParaRPr lang="en-US" sz="1200" dirty="0"/>
           </a:p>
           <a:p>
-            <a:pPr indent="0" marL="0">
+            <a:pPr marL="0" indent="0">
               <a:lnSpc>
                 <a:spcPct val="130000"/>
               </a:lnSpc>
@@ -22380,7 +22612,7 @@
             <a:endParaRPr lang="en-US" sz="1200" dirty="0"/>
           </a:p>
           <a:p>
-            <a:pPr indent="0" marL="0">
+            <a:pPr marL="0" indent="0">
               <a:lnSpc>
                 <a:spcPct val="130000"/>
               </a:lnSpc>
@@ -22400,7 +22632,7 @@
             <a:endParaRPr lang="en-US" sz="1200" dirty="0"/>
           </a:p>
           <a:p>
-            <a:pPr indent="0" marL="0">
+            <a:pPr marL="0" indent="0">
               <a:lnSpc>
                 <a:spcPct val="130000"/>
               </a:lnSpc>
@@ -22420,7 +22652,7 @@
             <a:endParaRPr lang="en-US" sz="1200" dirty="0"/>
           </a:p>
           <a:p>
-            <a:pPr indent="0" marL="0">
+            <a:pPr marL="0" indent="0">
               <a:lnSpc>
                 <a:spcPct val="130000"/>
               </a:lnSpc>
@@ -22440,7 +22672,7 @@
             <a:endParaRPr lang="en-US" sz="1200" dirty="0"/>
           </a:p>
           <a:p>
-            <a:pPr indent="0" marL="0">
+            <a:pPr marL="0" indent="0">
               <a:lnSpc>
                 <a:spcPct val="130000"/>
               </a:lnSpc>
@@ -22482,7 +22714,7 @@
           <a:bodyPr wrap="square" lIns="0" tIns="0" rIns="0" bIns="0" rtlCol="0" anchor="ctr"/>
           <a:lstStyle/>
           <a:p>
-            <a:pPr algn="r" indent="0" marL="0">
+            <a:pPr marL="0" indent="0" algn="r">
               <a:buNone/>
             </a:pPr>
             <a:r>
@@ -22521,7 +22753,7 @@
           <a:bodyPr wrap="square" lIns="0" tIns="0" rIns="0" bIns="0" rtlCol="0" anchor="ctr"/>
           <a:lstStyle/>
           <a:p>
-            <a:pPr indent="0" marL="0">
+            <a:pPr marL="0" indent="0">
               <a:buNone/>
             </a:pPr>
             <a:r>
@@ -22555,6 +22787,7 @@
         <a:solidFill>
           <a:srgbClr val="F7F9FC"/>
         </a:solidFill>
+        <a:effectLst/>
       </p:bgPr>
     </p:bg>
     <p:spTree>
@@ -22592,11 +22825,11 @@
           <a:bodyPr wrap="square" lIns="0" tIns="0" rIns="0" bIns="0" rtlCol="0" anchor="ctr"/>
           <a:lstStyle/>
           <a:p>
-            <a:pPr algn="l" indent="0" marL="0">
-              <a:buNone/>
-            </a:pPr>
-            <a:r>
-              <a:rPr lang="en-US" sz="1300" b="1" spc="200" kern="0" dirty="0">
+            <a:pPr marL="0" indent="0" algn="l">
+              <a:buNone/>
+            </a:pPr>
+            <a:r>
+              <a:rPr lang="en-US" sz="1300" b="1" kern="0" spc="200" dirty="0">
                 <a:solidFill>
                   <a:srgbClr val="0088A3"/>
                 </a:solidFill>
@@ -22631,7 +22864,7 @@
           <a:bodyPr wrap="square" lIns="0" tIns="0" rIns="0" bIns="0" rtlCol="0" anchor="ctr"/>
           <a:lstStyle/>
           <a:p>
-            <a:pPr algn="l" indent="0" marL="0">
+            <a:pPr marL="0" indent="0" algn="l">
               <a:buNone/>
             </a:pPr>
             <a:r>
@@ -22684,7 +22917,7 @@
                     <a:bodyPr/>
                     <a:lstStyle/>
                     <a:p>
-                      <a:pPr algn="ctr" indent="0" marL="0">
+                      <a:pPr marL="0" indent="0" algn="ctr">
                         <a:buNone/>
                       </a:pPr>
                       <a:r>
@@ -22705,7 +22938,7 @@
                       </a:endParaRPr>
                     </a:p>
                   </a:txBody>
-                  <a:tcPr marL="91440" marR="91440" marT="45720" marB="45720" anchor="ctr">
+                  <a:tcPr anchor="ctr">
                     <a:lnL w="9525" cap="flat" cmpd="sng" algn="ctr">
                       <a:solidFill>
                         <a:srgbClr val="DDE6EF"/>
@@ -22752,7 +22985,7 @@
                     <a:bodyPr/>
                     <a:lstStyle/>
                     <a:p>
-                      <a:pPr algn="l" indent="0" marL="0">
+                      <a:pPr marL="0" indent="0" algn="l">
                         <a:buNone/>
                       </a:pPr>
                       <a:r>
@@ -22773,7 +23006,7 @@
                       </a:endParaRPr>
                     </a:p>
                   </a:txBody>
-                  <a:tcPr marL="91440" marR="91440" marT="45720" marB="45720" anchor="ctr">
+                  <a:tcPr anchor="ctr">
                     <a:lnL w="9525" cap="flat" cmpd="sng" algn="ctr">
                       <a:solidFill>
                         <a:srgbClr val="DDE6EF"/>
@@ -22820,7 +23053,7 @@
                     <a:bodyPr/>
                     <a:lstStyle/>
                     <a:p>
-                      <a:pPr algn="l" indent="0" marL="0">
+                      <a:pPr marL="0" indent="0" algn="l">
                         <a:buNone/>
                       </a:pPr>
                       <a:r>
@@ -22841,7 +23074,7 @@
                       </a:endParaRPr>
                     </a:p>
                   </a:txBody>
-                  <a:tcPr marL="91440" marR="91440" marT="45720" marB="45720" anchor="ctr">
+                  <a:tcPr anchor="ctr">
                     <a:lnL w="9525" cap="flat" cmpd="sng" algn="ctr">
                       <a:solidFill>
                         <a:srgbClr val="DDE6EF"/>
@@ -22888,7 +23121,7 @@
                     <a:bodyPr/>
                     <a:lstStyle/>
                     <a:p>
-                      <a:pPr algn="l" indent="0" marL="0">
+                      <a:pPr marL="0" indent="0" algn="l">
                         <a:buNone/>
                       </a:pPr>
                       <a:r>
@@ -22909,7 +23142,7 @@
                       </a:endParaRPr>
                     </a:p>
                   </a:txBody>
-                  <a:tcPr marL="91440" marR="91440" marT="45720" marB="45720" anchor="ctr">
+                  <a:tcPr anchor="ctr">
                     <a:lnL w="9525" cap="flat" cmpd="sng" algn="ctr">
                       <a:solidFill>
                         <a:srgbClr val="DDE6EF"/>
@@ -22956,7 +23189,7 @@
                     <a:bodyPr/>
                     <a:lstStyle/>
                     <a:p>
-                      <a:pPr algn="l" indent="0" marL="0">
+                      <a:pPr marL="0" indent="0" algn="l">
                         <a:buNone/>
                       </a:pPr>
                       <a:r>
@@ -22977,7 +23210,7 @@
                       </a:endParaRPr>
                     </a:p>
                   </a:txBody>
-                  <a:tcPr marL="91440" marR="91440" marT="45720" marB="45720" anchor="ctr">
+                  <a:tcPr anchor="ctr">
                     <a:lnL w="9525" cap="flat" cmpd="sng" algn="ctr">
                       <a:solidFill>
                         <a:srgbClr val="DDE6EF"/>
@@ -23026,7 +23259,7 @@
                     <a:bodyPr/>
                     <a:lstStyle/>
                     <a:p>
-                      <a:pPr algn="ctr" indent="0" marL="0">
+                      <a:pPr marL="0" indent="0" algn="ctr">
                         <a:buNone/>
                       </a:pPr>
                       <a:r>
@@ -23047,7 +23280,7 @@
                       </a:endParaRPr>
                     </a:p>
                   </a:txBody>
-                  <a:tcPr marL="91440" marR="91440" marT="45720" marB="45720" anchor="ctr">
+                  <a:tcPr anchor="ctr">
                     <a:lnL w="9525" cap="flat" cmpd="sng" algn="ctr">
                       <a:solidFill>
                         <a:srgbClr val="DDE6EF"/>
@@ -23094,7 +23327,7 @@
                     <a:bodyPr/>
                     <a:lstStyle/>
                     <a:p>
-                      <a:pPr algn="l" indent="0" marL="0">
+                      <a:pPr marL="0" indent="0" algn="l">
                         <a:buNone/>
                       </a:pPr>
                       <a:r>
@@ -23115,7 +23348,7 @@
                       </a:endParaRPr>
                     </a:p>
                   </a:txBody>
-                  <a:tcPr marL="91440" marR="91440" marT="45720" marB="45720" anchor="ctr">
+                  <a:tcPr anchor="ctr">
                     <a:lnL w="9525" cap="flat" cmpd="sng" algn="ctr">
                       <a:solidFill>
                         <a:srgbClr val="DDE6EF"/>
@@ -23162,7 +23395,7 @@
                     <a:bodyPr/>
                     <a:lstStyle/>
                     <a:p>
-                      <a:pPr algn="l" indent="0" marL="0">
+                      <a:pPr marL="0" indent="0" algn="l">
                         <a:buNone/>
                       </a:pPr>
                       <a:r>
@@ -23183,7 +23416,7 @@
                       </a:endParaRPr>
                     </a:p>
                   </a:txBody>
-                  <a:tcPr marL="91440" marR="91440" marT="45720" marB="45720" anchor="ctr">
+                  <a:tcPr anchor="ctr">
                     <a:lnL w="9525" cap="flat" cmpd="sng" algn="ctr">
                       <a:solidFill>
                         <a:srgbClr val="DDE6EF"/>
@@ -23230,7 +23463,7 @@
                     <a:bodyPr/>
                     <a:lstStyle/>
                     <a:p>
-                      <a:pPr algn="l" indent="0" marL="0">
+                      <a:pPr marL="0" indent="0" algn="l">
                         <a:buNone/>
                       </a:pPr>
                       <a:r>
@@ -23251,7 +23484,7 @@
                       </a:endParaRPr>
                     </a:p>
                   </a:txBody>
-                  <a:tcPr marL="91440" marR="91440" marT="45720" marB="45720" anchor="ctr">
+                  <a:tcPr anchor="ctr">
                     <a:lnL w="9525" cap="flat" cmpd="sng" algn="ctr">
                       <a:solidFill>
                         <a:srgbClr val="DDE6EF"/>
@@ -23298,7 +23531,7 @@
                     <a:bodyPr/>
                     <a:lstStyle/>
                     <a:p>
-                      <a:pPr algn="l" indent="0" marL="0">
+                      <a:pPr marL="0" indent="0" algn="l">
                         <a:buNone/>
                       </a:pPr>
                       <a:r>
@@ -23319,7 +23552,7 @@
                       </a:endParaRPr>
                     </a:p>
                   </a:txBody>
-                  <a:tcPr marL="91440" marR="91440" marT="45720" marB="45720" anchor="ctr">
+                  <a:tcPr anchor="ctr">
                     <a:lnL w="9525" cap="flat" cmpd="sng" algn="ctr">
                       <a:solidFill>
                         <a:srgbClr val="DDE6EF"/>
@@ -23368,7 +23601,7 @@
                     <a:bodyPr/>
                     <a:lstStyle/>
                     <a:p>
-                      <a:pPr algn="ctr" indent="0" marL="0">
+                      <a:pPr marL="0" indent="0" algn="ctr">
                         <a:buNone/>
                       </a:pPr>
                       <a:r>
@@ -23389,7 +23622,7 @@
                       </a:endParaRPr>
                     </a:p>
                   </a:txBody>
-                  <a:tcPr marL="91440" marR="91440" marT="45720" marB="45720" anchor="ctr">
+                  <a:tcPr anchor="ctr">
                     <a:lnL w="9525" cap="flat" cmpd="sng" algn="ctr">
                       <a:solidFill>
                         <a:srgbClr val="DDE6EF"/>
@@ -23436,7 +23669,7 @@
                     <a:bodyPr/>
                     <a:lstStyle/>
                     <a:p>
-                      <a:pPr algn="l" indent="0" marL="0">
+                      <a:pPr marL="0" indent="0" algn="l">
                         <a:buNone/>
                       </a:pPr>
                       <a:r>
@@ -23457,7 +23690,7 @@
                       </a:endParaRPr>
                     </a:p>
                   </a:txBody>
-                  <a:tcPr marL="91440" marR="91440" marT="45720" marB="45720" anchor="ctr">
+                  <a:tcPr anchor="ctr">
                     <a:lnL w="9525" cap="flat" cmpd="sng" algn="ctr">
                       <a:solidFill>
                         <a:srgbClr val="DDE6EF"/>
@@ -23504,7 +23737,7 @@
                     <a:bodyPr/>
                     <a:lstStyle/>
                     <a:p>
-                      <a:pPr algn="l" indent="0" marL="0">
+                      <a:pPr marL="0" indent="0" algn="l">
                         <a:buNone/>
                       </a:pPr>
                       <a:r>
@@ -23525,7 +23758,7 @@
                       </a:endParaRPr>
                     </a:p>
                   </a:txBody>
-                  <a:tcPr marL="91440" marR="91440" marT="45720" marB="45720" anchor="ctr">
+                  <a:tcPr anchor="ctr">
                     <a:lnL w="9525" cap="flat" cmpd="sng" algn="ctr">
                       <a:solidFill>
                         <a:srgbClr val="DDE6EF"/>
@@ -23572,7 +23805,7 @@
                     <a:bodyPr/>
                     <a:lstStyle/>
                     <a:p>
-                      <a:pPr algn="l" indent="0" marL="0">
+                      <a:pPr marL="0" indent="0" algn="l">
                         <a:buNone/>
                       </a:pPr>
                       <a:r>
@@ -23593,7 +23826,7 @@
                       </a:endParaRPr>
                     </a:p>
                   </a:txBody>
-                  <a:tcPr marL="91440" marR="91440" marT="45720" marB="45720" anchor="ctr">
+                  <a:tcPr anchor="ctr">
                     <a:lnL w="9525" cap="flat" cmpd="sng" algn="ctr">
                       <a:solidFill>
                         <a:srgbClr val="DDE6EF"/>
@@ -23640,7 +23873,7 @@
                     <a:bodyPr/>
                     <a:lstStyle/>
                     <a:p>
-                      <a:pPr algn="l" indent="0" marL="0">
+                      <a:pPr marL="0" indent="0" algn="l">
                         <a:buNone/>
                       </a:pPr>
                       <a:r>
@@ -23661,7 +23894,7 @@
                       </a:endParaRPr>
                     </a:p>
                   </a:txBody>
-                  <a:tcPr marL="91440" marR="91440" marT="45720" marB="45720" anchor="ctr">
+                  <a:tcPr anchor="ctr">
                     <a:lnL w="9525" cap="flat" cmpd="sng" algn="ctr">
                       <a:solidFill>
                         <a:srgbClr val="DDE6EF"/>
@@ -23710,7 +23943,7 @@
                     <a:bodyPr/>
                     <a:lstStyle/>
                     <a:p>
-                      <a:pPr algn="ctr" indent="0" marL="0">
+                      <a:pPr marL="0" indent="0" algn="ctr">
                         <a:buNone/>
                       </a:pPr>
                       <a:r>
@@ -23731,7 +23964,7 @@
                       </a:endParaRPr>
                     </a:p>
                   </a:txBody>
-                  <a:tcPr marL="91440" marR="91440" marT="45720" marB="45720" anchor="ctr">
+                  <a:tcPr anchor="ctr">
                     <a:lnL w="9525" cap="flat" cmpd="sng" algn="ctr">
                       <a:solidFill>
                         <a:srgbClr val="DDE6EF"/>
@@ -23778,7 +24011,7 @@
                     <a:bodyPr/>
                     <a:lstStyle/>
                     <a:p>
-                      <a:pPr algn="l" indent="0" marL="0">
+                      <a:pPr marL="0" indent="0" algn="l">
                         <a:buNone/>
                       </a:pPr>
                       <a:r>
@@ -23799,7 +24032,7 @@
                       </a:endParaRPr>
                     </a:p>
                   </a:txBody>
-                  <a:tcPr marL="91440" marR="91440" marT="45720" marB="45720" anchor="ctr">
+                  <a:tcPr anchor="ctr">
                     <a:lnL w="9525" cap="flat" cmpd="sng" algn="ctr">
                       <a:solidFill>
                         <a:srgbClr val="DDE6EF"/>
@@ -23846,7 +24079,7 @@
                     <a:bodyPr/>
                     <a:lstStyle/>
                     <a:p>
-                      <a:pPr algn="l" indent="0" marL="0">
+                      <a:pPr marL="0" indent="0" algn="l">
                         <a:buNone/>
                       </a:pPr>
                       <a:r>
@@ -23867,7 +24100,7 @@
                       </a:endParaRPr>
                     </a:p>
                   </a:txBody>
-                  <a:tcPr marL="91440" marR="91440" marT="45720" marB="45720" anchor="ctr">
+                  <a:tcPr anchor="ctr">
                     <a:lnL w="9525" cap="flat" cmpd="sng" algn="ctr">
                       <a:solidFill>
                         <a:srgbClr val="DDE6EF"/>
@@ -23914,7 +24147,7 @@
                     <a:bodyPr/>
                     <a:lstStyle/>
                     <a:p>
-                      <a:pPr algn="l" indent="0" marL="0">
+                      <a:pPr marL="0" indent="0" algn="l">
                         <a:buNone/>
                       </a:pPr>
                       <a:r>
@@ -23935,7 +24168,7 @@
                       </a:endParaRPr>
                     </a:p>
                   </a:txBody>
-                  <a:tcPr marL="91440" marR="91440" marT="45720" marB="45720" anchor="ctr">
+                  <a:tcPr anchor="ctr">
                     <a:lnL w="9525" cap="flat" cmpd="sng" algn="ctr">
                       <a:solidFill>
                         <a:srgbClr val="DDE6EF"/>
@@ -23982,7 +24215,7 @@
                     <a:bodyPr/>
                     <a:lstStyle/>
                     <a:p>
-                      <a:pPr algn="l" indent="0" marL="0">
+                      <a:pPr marL="0" indent="0" algn="l">
                         <a:buNone/>
                       </a:pPr>
                       <a:r>
@@ -24003,7 +24236,7 @@
                       </a:endParaRPr>
                     </a:p>
                   </a:txBody>
-                  <a:tcPr marL="91440" marR="91440" marT="45720" marB="45720" anchor="ctr">
+                  <a:tcPr anchor="ctr">
                     <a:lnL w="9525" cap="flat" cmpd="sng" algn="ctr">
                       <a:solidFill>
                         <a:srgbClr val="DDE6EF"/>
@@ -24052,7 +24285,7 @@
                     <a:bodyPr/>
                     <a:lstStyle/>
                     <a:p>
-                      <a:pPr algn="ctr" indent="0" marL="0">
+                      <a:pPr marL="0" indent="0" algn="ctr">
                         <a:buNone/>
                       </a:pPr>
                       <a:r>
@@ -24073,7 +24306,7 @@
                       </a:endParaRPr>
                     </a:p>
                   </a:txBody>
-                  <a:tcPr marL="91440" marR="91440" marT="45720" marB="45720" anchor="ctr">
+                  <a:tcPr anchor="ctr">
                     <a:lnL w="9525" cap="flat" cmpd="sng" algn="ctr">
                       <a:solidFill>
                         <a:srgbClr val="DDE6EF"/>
@@ -24120,7 +24353,7 @@
                     <a:bodyPr/>
                     <a:lstStyle/>
                     <a:p>
-                      <a:pPr algn="l" indent="0" marL="0">
+                      <a:pPr marL="0" indent="0" algn="l">
                         <a:buNone/>
                       </a:pPr>
                       <a:r>
@@ -24141,7 +24374,7 @@
                       </a:endParaRPr>
                     </a:p>
                   </a:txBody>
-                  <a:tcPr marL="91440" marR="91440" marT="45720" marB="45720" anchor="ctr">
+                  <a:tcPr anchor="ctr">
                     <a:lnL w="9525" cap="flat" cmpd="sng" algn="ctr">
                       <a:solidFill>
                         <a:srgbClr val="DDE6EF"/>
@@ -24188,7 +24421,7 @@
                     <a:bodyPr/>
                     <a:lstStyle/>
                     <a:p>
-                      <a:pPr algn="l" indent="0" marL="0">
+                      <a:pPr marL="0" indent="0" algn="l">
                         <a:buNone/>
                       </a:pPr>
                       <a:r>
@@ -24209,7 +24442,7 @@
                       </a:endParaRPr>
                     </a:p>
                   </a:txBody>
-                  <a:tcPr marL="91440" marR="91440" marT="45720" marB="45720" anchor="ctr">
+                  <a:tcPr anchor="ctr">
                     <a:lnL w="9525" cap="flat" cmpd="sng" algn="ctr">
                       <a:solidFill>
                         <a:srgbClr val="DDE6EF"/>
@@ -24256,7 +24489,7 @@
                     <a:bodyPr/>
                     <a:lstStyle/>
                     <a:p>
-                      <a:pPr algn="l" indent="0" marL="0">
+                      <a:pPr marL="0" indent="0" algn="l">
                         <a:buNone/>
                       </a:pPr>
                       <a:r>
@@ -24277,7 +24510,7 @@
                       </a:endParaRPr>
                     </a:p>
                   </a:txBody>
-                  <a:tcPr marL="91440" marR="91440" marT="45720" marB="45720" anchor="ctr">
+                  <a:tcPr anchor="ctr">
                     <a:lnL w="9525" cap="flat" cmpd="sng" algn="ctr">
                       <a:solidFill>
                         <a:srgbClr val="DDE6EF"/>
@@ -24324,7 +24557,7 @@
                     <a:bodyPr/>
                     <a:lstStyle/>
                     <a:p>
-                      <a:pPr algn="l" indent="0" marL="0">
+                      <a:pPr marL="0" indent="0" algn="l">
                         <a:buNone/>
                       </a:pPr>
                       <a:r>
@@ -24345,7 +24578,7 @@
                       </a:endParaRPr>
                     </a:p>
                   </a:txBody>
-                  <a:tcPr marL="91440" marR="91440" marT="45720" marB="45720" anchor="ctr">
+                  <a:tcPr anchor="ctr">
                     <a:lnL w="9525" cap="flat" cmpd="sng" algn="ctr">
                       <a:solidFill>
                         <a:srgbClr val="DDE6EF"/>
@@ -24394,7 +24627,7 @@
                     <a:bodyPr/>
                     <a:lstStyle/>
                     <a:p>
-                      <a:pPr algn="ctr" indent="0" marL="0">
+                      <a:pPr marL="0" indent="0" algn="ctr">
                         <a:buNone/>
                       </a:pPr>
                       <a:r>
@@ -24415,7 +24648,7 @@
                       </a:endParaRPr>
                     </a:p>
                   </a:txBody>
-                  <a:tcPr marL="91440" marR="91440" marT="45720" marB="45720" anchor="ctr">
+                  <a:tcPr anchor="ctr">
                     <a:lnL w="9525" cap="flat" cmpd="sng" algn="ctr">
                       <a:solidFill>
                         <a:srgbClr val="DDE6EF"/>
@@ -24462,7 +24695,7 @@
                     <a:bodyPr/>
                     <a:lstStyle/>
                     <a:p>
-                      <a:pPr algn="l" indent="0" marL="0">
+                      <a:pPr marL="0" indent="0" algn="l">
                         <a:buNone/>
                       </a:pPr>
                       <a:r>
@@ -24483,7 +24716,7 @@
                       </a:endParaRPr>
                     </a:p>
                   </a:txBody>
-                  <a:tcPr marL="91440" marR="91440" marT="45720" marB="45720" anchor="ctr">
+                  <a:tcPr anchor="ctr">
                     <a:lnL w="9525" cap="flat" cmpd="sng" algn="ctr">
                       <a:solidFill>
                         <a:srgbClr val="DDE6EF"/>
@@ -24530,7 +24763,7 @@
                     <a:bodyPr/>
                     <a:lstStyle/>
                     <a:p>
-                      <a:pPr algn="l" indent="0" marL="0">
+                      <a:pPr marL="0" indent="0" algn="l">
                         <a:buNone/>
                       </a:pPr>
                       <a:r>
@@ -24551,7 +24784,7 @@
                       </a:endParaRPr>
                     </a:p>
                   </a:txBody>
-                  <a:tcPr marL="91440" marR="91440" marT="45720" marB="45720" anchor="ctr">
+                  <a:tcPr anchor="ctr">
                     <a:lnL w="9525" cap="flat" cmpd="sng" algn="ctr">
                       <a:solidFill>
                         <a:srgbClr val="DDE6EF"/>
@@ -24598,7 +24831,7 @@
                     <a:bodyPr/>
                     <a:lstStyle/>
                     <a:p>
-                      <a:pPr algn="l" indent="0" marL="0">
+                      <a:pPr marL="0" indent="0" algn="l">
                         <a:buNone/>
                       </a:pPr>
                       <a:r>
@@ -24619,7 +24852,7 @@
                       </a:endParaRPr>
                     </a:p>
                   </a:txBody>
-                  <a:tcPr marL="91440" marR="91440" marT="45720" marB="45720" anchor="ctr">
+                  <a:tcPr anchor="ctr">
                     <a:lnL w="9525" cap="flat" cmpd="sng" algn="ctr">
                       <a:solidFill>
                         <a:srgbClr val="DDE6EF"/>
@@ -24666,7 +24899,7 @@
                     <a:bodyPr/>
                     <a:lstStyle/>
                     <a:p>
-                      <a:pPr algn="l" indent="0" marL="0">
+                      <a:pPr marL="0" indent="0" algn="l">
                         <a:buNone/>
                       </a:pPr>
                       <a:r>
@@ -24687,7 +24920,7 @@
                       </a:endParaRPr>
                     </a:p>
                   </a:txBody>
-                  <a:tcPr marL="91440" marR="91440" marT="45720" marB="45720" anchor="ctr">
+                  <a:tcPr anchor="ctr">
                     <a:lnL w="9525" cap="flat" cmpd="sng" algn="ctr">
                       <a:solidFill>
                         <a:srgbClr val="DDE6EF"/>
@@ -24736,7 +24969,7 @@
                     <a:bodyPr/>
                     <a:lstStyle/>
                     <a:p>
-                      <a:pPr algn="ctr" indent="0" marL="0">
+                      <a:pPr marL="0" indent="0" algn="ctr">
                         <a:buNone/>
                       </a:pPr>
                       <a:r>
@@ -24757,7 +24990,7 @@
                       </a:endParaRPr>
                     </a:p>
                   </a:txBody>
-                  <a:tcPr marL="91440" marR="91440" marT="45720" marB="45720" anchor="ctr">
+                  <a:tcPr anchor="ctr">
                     <a:lnL w="9525" cap="flat" cmpd="sng" algn="ctr">
                       <a:solidFill>
                         <a:srgbClr val="DDE6EF"/>
@@ -24804,7 +25037,7 @@
                     <a:bodyPr/>
                     <a:lstStyle/>
                     <a:p>
-                      <a:pPr algn="l" indent="0" marL="0">
+                      <a:pPr marL="0" indent="0" algn="l">
                         <a:buNone/>
                       </a:pPr>
                       <a:r>
@@ -24825,7 +25058,7 @@
                       </a:endParaRPr>
                     </a:p>
                   </a:txBody>
-                  <a:tcPr marL="91440" marR="91440" marT="45720" marB="45720" anchor="ctr">
+                  <a:tcPr anchor="ctr">
                     <a:lnL w="9525" cap="flat" cmpd="sng" algn="ctr">
                       <a:solidFill>
                         <a:srgbClr val="DDE6EF"/>
@@ -24872,7 +25105,7 @@
                     <a:bodyPr/>
                     <a:lstStyle/>
                     <a:p>
-                      <a:pPr algn="l" indent="0" marL="0">
+                      <a:pPr marL="0" indent="0" algn="l">
                         <a:buNone/>
                       </a:pPr>
                       <a:r>
@@ -24893,7 +25126,7 @@
                       </a:endParaRPr>
                     </a:p>
                   </a:txBody>
-                  <a:tcPr marL="91440" marR="91440" marT="45720" marB="45720" anchor="ctr">
+                  <a:tcPr anchor="ctr">
                     <a:lnL w="9525" cap="flat" cmpd="sng" algn="ctr">
                       <a:solidFill>
                         <a:srgbClr val="DDE6EF"/>
@@ -24940,7 +25173,7 @@
                     <a:bodyPr/>
                     <a:lstStyle/>
                     <a:p>
-                      <a:pPr algn="l" indent="0" marL="0">
+                      <a:pPr marL="0" indent="0" algn="l">
                         <a:buNone/>
                       </a:pPr>
                       <a:r>
@@ -24961,7 +25194,7 @@
                       </a:endParaRPr>
                     </a:p>
                   </a:txBody>
-                  <a:tcPr marL="91440" marR="91440" marT="45720" marB="45720" anchor="ctr">
+                  <a:tcPr anchor="ctr">
                     <a:lnL w="9525" cap="flat" cmpd="sng" algn="ctr">
                       <a:solidFill>
                         <a:srgbClr val="DDE6EF"/>
@@ -25008,7 +25241,7 @@
                     <a:bodyPr/>
                     <a:lstStyle/>
                     <a:p>
-                      <a:pPr algn="l" indent="0" marL="0">
+                      <a:pPr marL="0" indent="0" algn="l">
                         <a:buNone/>
                       </a:pPr>
                       <a:r>
@@ -25029,7 +25262,7 @@
                       </a:endParaRPr>
                     </a:p>
                   </a:txBody>
-                  <a:tcPr marL="91440" marR="91440" marT="45720" marB="45720" anchor="ctr">
+                  <a:tcPr anchor="ctr">
                     <a:lnL w="9525" cap="flat" cmpd="sng" algn="ctr">
                       <a:solidFill>
                         <a:srgbClr val="DDE6EF"/>
@@ -25078,7 +25311,7 @@
                     <a:bodyPr/>
                     <a:lstStyle/>
                     <a:p>
-                      <a:pPr algn="ctr" indent="0" marL="0">
+                      <a:pPr marL="0" indent="0" algn="ctr">
                         <a:buNone/>
                       </a:pPr>
                       <a:r>
@@ -25099,7 +25332,7 @@
                       </a:endParaRPr>
                     </a:p>
                   </a:txBody>
-                  <a:tcPr marL="91440" marR="91440" marT="45720" marB="45720" anchor="ctr">
+                  <a:tcPr anchor="ctr">
                     <a:lnL w="9525" cap="flat" cmpd="sng" algn="ctr">
                       <a:solidFill>
                         <a:srgbClr val="DDE6EF"/>
@@ -25146,7 +25379,7 @@
                     <a:bodyPr/>
                     <a:lstStyle/>
                     <a:p>
-                      <a:pPr algn="l" indent="0" marL="0">
+                      <a:pPr marL="0" indent="0" algn="l">
                         <a:buNone/>
                       </a:pPr>
                       <a:r>
@@ -25167,7 +25400,7 @@
                       </a:endParaRPr>
                     </a:p>
                   </a:txBody>
-                  <a:tcPr marL="91440" marR="91440" marT="45720" marB="45720" anchor="ctr">
+                  <a:tcPr anchor="ctr">
                     <a:lnL w="9525" cap="flat" cmpd="sng" algn="ctr">
                       <a:solidFill>
                         <a:srgbClr val="DDE6EF"/>
@@ -25214,7 +25447,7 @@
                     <a:bodyPr/>
                     <a:lstStyle/>
                     <a:p>
-                      <a:pPr algn="l" indent="0" marL="0">
+                      <a:pPr marL="0" indent="0" algn="l">
                         <a:buNone/>
                       </a:pPr>
                       <a:r>
@@ -25235,7 +25468,7 @@
                       </a:endParaRPr>
                     </a:p>
                   </a:txBody>
-                  <a:tcPr marL="91440" marR="91440" marT="45720" marB="45720" anchor="ctr">
+                  <a:tcPr anchor="ctr">
                     <a:lnL w="9525" cap="flat" cmpd="sng" algn="ctr">
                       <a:solidFill>
                         <a:srgbClr val="DDE6EF"/>
@@ -25282,7 +25515,7 @@
                     <a:bodyPr/>
                     <a:lstStyle/>
                     <a:p>
-                      <a:pPr algn="l" indent="0" marL="0">
+                      <a:pPr marL="0" indent="0" algn="l">
                         <a:buNone/>
                       </a:pPr>
                       <a:r>
@@ -25303,7 +25536,7 @@
                       </a:endParaRPr>
                     </a:p>
                   </a:txBody>
-                  <a:tcPr marL="91440" marR="91440" marT="45720" marB="45720" anchor="ctr">
+                  <a:tcPr anchor="ctr">
                     <a:lnL w="9525" cap="flat" cmpd="sng" algn="ctr">
                       <a:solidFill>
                         <a:srgbClr val="DDE6EF"/>
@@ -25350,7 +25583,7 @@
                     <a:bodyPr/>
                     <a:lstStyle/>
                     <a:p>
-                      <a:pPr algn="l" indent="0" marL="0">
+                      <a:pPr marL="0" indent="0" algn="l">
                         <a:buNone/>
                       </a:pPr>
                       <a:r>
@@ -25371,7 +25604,7 @@
                       </a:endParaRPr>
                     </a:p>
                   </a:txBody>
-                  <a:tcPr marL="91440" marR="91440" marT="45720" marB="45720" anchor="ctr">
+                  <a:tcPr anchor="ctr">
                     <a:lnL w="9525" cap="flat" cmpd="sng" algn="ctr">
                       <a:solidFill>
                         <a:srgbClr val="DDE6EF"/>
@@ -25439,7 +25672,7 @@
           <a:bodyPr wrap="square" lIns="0" tIns="0" rIns="0" bIns="0" rtlCol="0" anchor="ctr"/>
           <a:lstStyle/>
           <a:p>
-            <a:pPr indent="0" marL="0">
+            <a:pPr marL="0" indent="0">
               <a:lnSpc>
                 <a:spcPct val="120000"/>
               </a:lnSpc>
@@ -25481,7 +25714,7 @@
           <a:bodyPr wrap="square" lIns="0" tIns="0" rIns="0" bIns="0" rtlCol="0" anchor="ctr"/>
           <a:lstStyle/>
           <a:p>
-            <a:pPr indent="0" marL="0">
+            <a:pPr marL="0" indent="0">
               <a:buNone/>
             </a:pPr>
             <a:r>
@@ -25545,7 +25778,7 @@
           <a:bodyPr wrap="square" lIns="0" tIns="0" rIns="0" bIns="0" rtlCol="0" anchor="ctr"/>
           <a:lstStyle/>
           <a:p>
-            <a:pPr algn="ctr" indent="0" marL="0">
+            <a:pPr marL="0" indent="0" algn="ctr">
               <a:buNone/>
             </a:pPr>
             <a:r>
@@ -25584,7 +25817,7 @@
           <a:bodyPr wrap="square" lIns="0" tIns="0" rIns="0" bIns="0" rtlCol="0" anchor="ctr"/>
           <a:lstStyle/>
           <a:p>
-            <a:pPr algn="ctr" indent="0" marL="0">
+            <a:pPr marL="0" indent="0" algn="ctr">
               <a:buNone/>
             </a:pPr>
             <a:r>
@@ -25604,7 +25837,7 @@
       </p:sp>
       <p:sp>
         <p:nvSpPr>
-          <p:cNvPr id="10" name="Shape 7"/>
+          <p:cNvPr id="4" name="Shape 7"/>
           <p:cNvSpPr/>
           <p:nvPr/>
         </p:nvSpPr>
@@ -25648,7 +25881,7 @@
           <a:bodyPr wrap="square" lIns="0" tIns="0" rIns="0" bIns="0" rtlCol="0" anchor="ctr"/>
           <a:lstStyle/>
           <a:p>
-            <a:pPr algn="ctr" indent="0" marL="0">
+            <a:pPr marL="0" indent="0" algn="ctr">
               <a:buNone/>
             </a:pPr>
             <a:r>
@@ -25687,7 +25920,7 @@
           <a:bodyPr wrap="square" lIns="0" tIns="0" rIns="0" bIns="0" rtlCol="0" anchor="ctr"/>
           <a:lstStyle/>
           <a:p>
-            <a:pPr algn="ctr" indent="0" marL="0">
+            <a:pPr marL="0" indent="0" algn="ctr">
               <a:buNone/>
             </a:pPr>
             <a:r>
@@ -25751,7 +25984,7 @@
           <a:bodyPr wrap="square" lIns="0" tIns="0" rIns="0" bIns="0" rtlCol="0" anchor="ctr"/>
           <a:lstStyle/>
           <a:p>
-            <a:pPr algn="ctr" indent="0" marL="0">
+            <a:pPr marL="0" indent="0" algn="ctr">
               <a:buNone/>
             </a:pPr>
             <a:r>
@@ -25790,7 +26023,7 @@
           <a:bodyPr wrap="square" lIns="0" tIns="0" rIns="0" bIns="0" rtlCol="0" anchor="ctr"/>
           <a:lstStyle/>
           <a:p>
-            <a:pPr algn="ctr" indent="0" marL="0">
+            <a:pPr marL="0" indent="0" algn="ctr">
               <a:buNone/>
             </a:pPr>
             <a:r>
@@ -25854,7 +26087,7 @@
           <a:bodyPr wrap="square" lIns="0" tIns="0" rIns="0" bIns="0" rtlCol="0" anchor="ctr"/>
           <a:lstStyle/>
           <a:p>
-            <a:pPr algn="ctr" indent="0" marL="0">
+            <a:pPr marL="0" indent="0" algn="ctr">
               <a:buNone/>
             </a:pPr>
             <a:r>
@@ -25893,7 +26126,7 @@
           <a:bodyPr wrap="square" lIns="0" tIns="0" rIns="0" bIns="0" rtlCol="0" anchor="ctr"/>
           <a:lstStyle/>
           <a:p>
-            <a:pPr algn="ctr" indent="0" marL="0">
+            <a:pPr marL="0" indent="0" algn="ctr">
               <a:buNone/>
             </a:pPr>
             <a:r>
@@ -25932,7 +26165,7 @@
           <a:bodyPr wrap="square" lIns="0" tIns="0" rIns="0" bIns="0" rtlCol="0" anchor="ctr"/>
           <a:lstStyle/>
           <a:p>
-            <a:pPr algn="ctr" indent="0" marL="0">
+            <a:pPr marL="0" indent="0" algn="ctr">
               <a:buNone/>
             </a:pPr>
             <a:r>
@@ -25976,7 +26209,7 @@
             <a:prstDash val="solid"/>
           </a:ln>
           <a:effectLst>
-            <a:outerShdw sx="100000" sy="100000" kx="0" ky="0" algn="bl" rotWithShape="0" blurRad="101600" dist="25400" dir="5400000">
+            <a:outerShdw blurRad="101600" dist="25400" dir="5400000" algn="bl" rotWithShape="0">
               <a:srgbClr val="9AA9BA">
                 <a:alpha val="18000"/>
               </a:srgbClr>
@@ -26005,7 +26238,7 @@
           <a:bodyPr wrap="square" lIns="0" tIns="0" rIns="0" bIns="0" rtlCol="0" anchor="ctr"/>
           <a:lstStyle/>
           <a:p>
-            <a:pPr indent="0" marL="0">
+            <a:pPr marL="0" indent="0">
               <a:buNone/>
             </a:pPr>
             <a:r>
@@ -26025,7 +26258,7 @@
       </p:sp>
       <p:graphicFrame>
         <p:nvGraphicFramePr>
-          <p:cNvPr id="19" name="Table 1"/>
+          <p:cNvPr id="22" name="Table 1"/>
           <p:cNvGraphicFramePr>
             <a:graphicFrameLocks noGrp="1"/>
           </p:cNvGraphicFramePr>
@@ -26056,7 +26289,7 @@
                     <a:bodyPr/>
                     <a:lstStyle/>
                     <a:p>
-                      <a:pPr algn="ctr" indent="0" marL="0">
+                      <a:pPr marL="0" indent="0" algn="ctr">
                         <a:buNone/>
                       </a:pPr>
                       <a:r>
@@ -26070,7 +26303,7 @@
                       <a:endParaRPr lang="en-US" sz="1100" dirty="0"/>
                     </a:p>
                   </a:txBody>
-                  <a:tcPr marL="91440" marR="91440" marT="45720" marB="45720" anchor="ctr">
+                  <a:tcPr anchor="ctr">
                     <a:lnL w="9525" cap="flat" cmpd="sng" algn="ctr">
                       <a:solidFill>
                         <a:srgbClr val="DDE6EF"/>
@@ -26117,7 +26350,7 @@
                     <a:bodyPr/>
                     <a:lstStyle/>
                     <a:p>
-                      <a:pPr algn="ctr" indent="0" marL="0">
+                      <a:pPr marL="0" indent="0" algn="ctr">
                         <a:buNone/>
                       </a:pPr>
                       <a:r>
@@ -26131,7 +26364,7 @@
                       <a:endParaRPr lang="en-US" sz="1100" dirty="0"/>
                     </a:p>
                   </a:txBody>
-                  <a:tcPr marL="91440" marR="91440" marT="45720" marB="45720" anchor="ctr">
+                  <a:tcPr anchor="ctr">
                     <a:lnL w="9525" cap="flat" cmpd="sng" algn="ctr">
                       <a:solidFill>
                         <a:srgbClr val="DDE6EF"/>
@@ -26178,7 +26411,7 @@
                     <a:bodyPr/>
                     <a:lstStyle/>
                     <a:p>
-                      <a:pPr algn="ctr" indent="0" marL="0">
+                      <a:pPr marL="0" indent="0" algn="ctr">
                         <a:buNone/>
                       </a:pPr>
                       <a:r>
@@ -26192,7 +26425,7 @@
                       <a:endParaRPr lang="en-US" sz="1100" dirty="0"/>
                     </a:p>
                   </a:txBody>
-                  <a:tcPr marL="91440" marR="91440" marT="45720" marB="45720" anchor="ctr">
+                  <a:tcPr anchor="ctr">
                     <a:lnL w="9525" cap="flat" cmpd="sng" algn="ctr">
                       <a:solidFill>
                         <a:srgbClr val="DDE6EF"/>
@@ -26241,7 +26474,7 @@
                     <a:bodyPr/>
                     <a:lstStyle/>
                     <a:p>
-                      <a:pPr algn="ctr" indent="0" marL="0">
+                      <a:pPr marL="0" indent="0" algn="ctr">
                         <a:buNone/>
                       </a:pPr>
                       <a:r>
@@ -26255,7 +26488,7 @@
                       <a:endParaRPr lang="en-US" sz="1100" dirty="0"/>
                     </a:p>
                   </a:txBody>
-                  <a:tcPr marL="91440" marR="91440" marT="45720" marB="45720" anchor="ctr">
+                  <a:tcPr anchor="ctr">
                     <a:lnL w="9525" cap="flat" cmpd="sng" algn="ctr">
                       <a:solidFill>
                         <a:srgbClr val="DDE6EF"/>
@@ -26302,7 +26535,7 @@
                     <a:bodyPr/>
                     <a:lstStyle/>
                     <a:p>
-                      <a:pPr algn="ctr" indent="0" marL="0">
+                      <a:pPr marL="0" indent="0" algn="ctr">
                         <a:buNone/>
                       </a:pPr>
                       <a:r>
@@ -26316,7 +26549,7 @@
                       <a:endParaRPr lang="en-US" sz="1100" dirty="0"/>
                     </a:p>
                   </a:txBody>
-                  <a:tcPr marL="91440" marR="91440" marT="45720" marB="45720" anchor="ctr">
+                  <a:tcPr anchor="ctr">
                     <a:lnL w="9525" cap="flat" cmpd="sng" algn="ctr">
                       <a:solidFill>
                         <a:srgbClr val="DDE6EF"/>
@@ -26363,7 +26596,7 @@
                     <a:bodyPr/>
                     <a:lstStyle/>
                     <a:p>
-                      <a:pPr algn="ctr" indent="0" marL="0">
+                      <a:pPr marL="0" indent="0" algn="ctr">
                         <a:buNone/>
                       </a:pPr>
                       <a:r>
@@ -26377,7 +26610,7 @@
                       <a:endParaRPr lang="en-US" sz="1100" dirty="0"/>
                     </a:p>
                   </a:txBody>
-                  <a:tcPr marL="91440" marR="91440" marT="45720" marB="45720" anchor="ctr">
+                  <a:tcPr anchor="ctr">
                     <a:lnL w="9525" cap="flat" cmpd="sng" algn="ctr">
                       <a:solidFill>
                         <a:srgbClr val="DDE6EF"/>
@@ -26426,7 +26659,7 @@
                     <a:bodyPr/>
                     <a:lstStyle/>
                     <a:p>
-                      <a:pPr algn="ctr" indent="0" marL="0">
+                      <a:pPr marL="0" indent="0" algn="ctr">
                         <a:buNone/>
                       </a:pPr>
                       <a:r>
@@ -26440,7 +26673,7 @@
                       <a:endParaRPr lang="en-US" sz="1100" dirty="0"/>
                     </a:p>
                   </a:txBody>
-                  <a:tcPr marL="91440" marR="91440" marT="45720" marB="45720" anchor="ctr">
+                  <a:tcPr anchor="ctr">
                     <a:lnL w="9525" cap="flat" cmpd="sng" algn="ctr">
                       <a:solidFill>
                         <a:srgbClr val="DDE6EF"/>
@@ -26487,7 +26720,7 @@
                     <a:bodyPr/>
                     <a:lstStyle/>
                     <a:p>
-                      <a:pPr algn="ctr" indent="0" marL="0">
+                      <a:pPr marL="0" indent="0" algn="ctr">
                         <a:buNone/>
                       </a:pPr>
                       <a:r>
@@ -26501,7 +26734,7 @@
                       <a:endParaRPr lang="en-US" sz="1100" dirty="0"/>
                     </a:p>
                   </a:txBody>
-                  <a:tcPr marL="91440" marR="91440" marT="45720" marB="45720" anchor="ctr">
+                  <a:tcPr anchor="ctr">
                     <a:lnL w="9525" cap="flat" cmpd="sng" algn="ctr">
                       <a:solidFill>
                         <a:srgbClr val="DDE6EF"/>
@@ -26548,7 +26781,7 @@
                     <a:bodyPr/>
                     <a:lstStyle/>
                     <a:p>
-                      <a:pPr algn="ctr" indent="0" marL="0">
+                      <a:pPr marL="0" indent="0" algn="ctr">
                         <a:buNone/>
                       </a:pPr>
                       <a:r>
@@ -26562,7 +26795,7 @@
                       <a:endParaRPr lang="en-US" sz="1100" dirty="0"/>
                     </a:p>
                   </a:txBody>
-                  <a:tcPr marL="91440" marR="91440" marT="45720" marB="45720" anchor="ctr">
+                  <a:tcPr anchor="ctr">
                     <a:lnL w="9525" cap="flat" cmpd="sng" algn="ctr">
                       <a:solidFill>
                         <a:srgbClr val="DDE6EF"/>
@@ -26611,7 +26844,7 @@
                     <a:bodyPr/>
                     <a:lstStyle/>
                     <a:p>
-                      <a:pPr algn="ctr" indent="0" marL="0">
+                      <a:pPr marL="0" indent="0" algn="ctr">
                         <a:buNone/>
                       </a:pPr>
                       <a:r>
@@ -26625,7 +26858,7 @@
                       <a:endParaRPr lang="en-US" sz="1100" dirty="0"/>
                     </a:p>
                   </a:txBody>
-                  <a:tcPr marL="91440" marR="91440" marT="45720" marB="45720" anchor="ctr">
+                  <a:tcPr anchor="ctr">
                     <a:lnL w="9525" cap="flat" cmpd="sng" algn="ctr">
                       <a:solidFill>
                         <a:srgbClr val="DDE6EF"/>
@@ -26672,7 +26905,7 @@
                     <a:bodyPr/>
                     <a:lstStyle/>
                     <a:p>
-                      <a:pPr algn="ctr" indent="0" marL="0">
+                      <a:pPr marL="0" indent="0" algn="ctr">
                         <a:buNone/>
                       </a:pPr>
                       <a:r>
@@ -26686,7 +26919,7 @@
                       <a:endParaRPr lang="en-US" sz="1100" dirty="0"/>
                     </a:p>
                   </a:txBody>
-                  <a:tcPr marL="91440" marR="91440" marT="45720" marB="45720" anchor="ctr">
+                  <a:tcPr anchor="ctr">
                     <a:lnL w="9525" cap="flat" cmpd="sng" algn="ctr">
                       <a:solidFill>
                         <a:srgbClr val="DDE6EF"/>
@@ -26733,7 +26966,7 @@
                     <a:bodyPr/>
                     <a:lstStyle/>
                     <a:p>
-                      <a:pPr algn="ctr" indent="0" marL="0">
+                      <a:pPr marL="0" indent="0" algn="ctr">
                         <a:buNone/>
                       </a:pPr>
                       <a:r>
@@ -26747,7 +26980,7 @@
                       <a:endParaRPr lang="en-US" sz="1100" dirty="0"/>
                     </a:p>
                   </a:txBody>
-                  <a:tcPr marL="91440" marR="91440" marT="45720" marB="45720" anchor="ctr">
+                  <a:tcPr anchor="ctr">
                     <a:lnL w="9525" cap="flat" cmpd="sng" algn="ctr">
                       <a:solidFill>
                         <a:srgbClr val="DDE6EF"/>
@@ -26796,7 +27029,7 @@
                     <a:bodyPr/>
                     <a:lstStyle/>
                     <a:p>
-                      <a:pPr algn="ctr" indent="0" marL="0">
+                      <a:pPr marL="0" indent="0" algn="ctr">
                         <a:buNone/>
                       </a:pPr>
                       <a:r>
@@ -26810,7 +27043,7 @@
                       <a:endParaRPr lang="en-US" sz="1100" dirty="0"/>
                     </a:p>
                   </a:txBody>
-                  <a:tcPr marL="91440" marR="91440" marT="45720" marB="45720" anchor="ctr">
+                  <a:tcPr anchor="ctr">
                     <a:lnL w="9525" cap="flat" cmpd="sng" algn="ctr">
                       <a:solidFill>
                         <a:srgbClr val="DDE6EF"/>
@@ -26857,7 +27090,7 @@
                     <a:bodyPr/>
                     <a:lstStyle/>
                     <a:p>
-                      <a:pPr algn="ctr" indent="0" marL="0">
+                      <a:pPr marL="0" indent="0" algn="ctr">
                         <a:buNone/>
                       </a:pPr>
                       <a:r>
@@ -26871,7 +27104,7 @@
                       <a:endParaRPr lang="en-US" sz="1100" dirty="0"/>
                     </a:p>
                   </a:txBody>
-                  <a:tcPr marL="91440" marR="91440" marT="45720" marB="45720" anchor="ctr">
+                  <a:tcPr anchor="ctr">
                     <a:lnL w="9525" cap="flat" cmpd="sng" algn="ctr">
                       <a:solidFill>
                         <a:srgbClr val="DDE6EF"/>
@@ -26918,7 +27151,7 @@
                     <a:bodyPr/>
                     <a:lstStyle/>
                     <a:p>
-                      <a:pPr algn="ctr" indent="0" marL="0">
+                      <a:pPr marL="0" indent="0" algn="ctr">
                         <a:buNone/>
                       </a:pPr>
                       <a:r>
@@ -26932,7 +27165,7 @@
                       <a:endParaRPr lang="en-US" sz="1100" dirty="0"/>
                     </a:p>
                   </a:txBody>
-                  <a:tcPr marL="91440" marR="91440" marT="45720" marB="45720" anchor="ctr">
+                  <a:tcPr anchor="ctr">
                     <a:lnL w="9525" cap="flat" cmpd="sng" algn="ctr">
                       <a:solidFill>
                         <a:srgbClr val="DDE6EF"/>
@@ -27000,7 +27233,7 @@
           <a:bodyPr wrap="square" lIns="0" tIns="0" rIns="0" bIns="0" rtlCol="0" anchor="ctr"/>
           <a:lstStyle/>
           <a:p>
-            <a:pPr indent="0" marL="0">
+            <a:pPr marL="0" indent="0">
               <a:lnSpc>
                 <a:spcPct val="140000"/>
               </a:lnSpc>
@@ -27020,7 +27253,7 @@
             <a:endParaRPr lang="en-US" sz="1200" dirty="0"/>
           </a:p>
           <a:p>
-            <a:pPr indent="0" marL="0">
+            <a:pPr marL="0" indent="0">
               <a:lnSpc>
                 <a:spcPct val="140000"/>
               </a:lnSpc>
@@ -27062,7 +27295,7 @@
           <a:bodyPr wrap="square" lIns="0" tIns="0" rIns="0" bIns="0" rtlCol="0" anchor="ctr"/>
           <a:lstStyle/>
           <a:p>
-            <a:pPr algn="r" indent="0" marL="0">
+            <a:pPr marL="0" indent="0" algn="r">
               <a:buNone/>
             </a:pPr>
             <a:r>
@@ -27101,7 +27334,7 @@
           <a:bodyPr wrap="square" lIns="0" tIns="0" rIns="0" bIns="0" rtlCol="0" anchor="ctr"/>
           <a:lstStyle/>
           <a:p>
-            <a:pPr indent="0" marL="0">
+            <a:pPr marL="0" indent="0">
               <a:buNone/>
             </a:pPr>
             <a:r>
@@ -27420,4 +27653,265 @@
     </a:ext>
   </a:extLst>
 </a:theme>
+</file>
+
+<file path=ppt/theme/theme2.xml><?xml version="1.0" encoding="utf-8"?>
+<a:theme xmlns:a="http://schemas.openxmlformats.org/drawingml/2006/main" name="ธีมของ Office">
+  <a:themeElements>
+    <a:clrScheme name="Office">
+      <a:dk1>
+        <a:sysClr val="windowText" lastClr="000000"/>
+      </a:dk1>
+      <a:lt1>
+        <a:sysClr val="window" lastClr="FFFFFF"/>
+      </a:lt1>
+      <a:dk2>
+        <a:srgbClr val="44546A"/>
+      </a:dk2>
+      <a:lt2>
+        <a:srgbClr val="E7E6E6"/>
+      </a:lt2>
+      <a:accent1>
+        <a:srgbClr val="5B9BD5"/>
+      </a:accent1>
+      <a:accent2>
+        <a:srgbClr val="ED7D31"/>
+      </a:accent2>
+      <a:accent3>
+        <a:srgbClr val="A5A5A5"/>
+      </a:accent3>
+      <a:accent4>
+        <a:srgbClr val="FFC000"/>
+      </a:accent4>
+      <a:accent5>
+        <a:srgbClr val="4472C4"/>
+      </a:accent5>
+      <a:accent6>
+        <a:srgbClr val="70AD47"/>
+      </a:accent6>
+      <a:hlink>
+        <a:srgbClr val="0563C1"/>
+      </a:hlink>
+      <a:folHlink>
+        <a:srgbClr val="954F72"/>
+      </a:folHlink>
+    </a:clrScheme>
+    <a:fontScheme name="Office">
+      <a:majorFont>
+        <a:latin typeface="Calibri Light" panose="020F0302020204030204"/>
+        <a:ea typeface=""/>
+        <a:cs typeface=""/>
+        <a:font script="Jpan" typeface="ＭＳ Ｐゴシック"/>
+        <a:font script="Hang" typeface="맑은 고딕"/>
+        <a:font script="Hans" typeface="宋体"/>
+        <a:font script="Hant" typeface="新細明體"/>
+        <a:font script="Arab" typeface="Times New Roman"/>
+        <a:font script="Hebr" typeface="Times New Roman"/>
+        <a:font script="Thai" typeface="Angsana New"/>
+        <a:font script="Ethi" typeface="Nyala"/>
+        <a:font script="Beng" typeface="Vrinda"/>
+        <a:font script="Gujr" typeface="Shruti"/>
+        <a:font script="Khmr" typeface="MoolBoran"/>
+        <a:font script="Knda" typeface="Tunga"/>
+        <a:font script="Guru" typeface="Raavi"/>
+        <a:font script="Cans" typeface="Euphemia"/>
+        <a:font script="Cher" typeface="Plantagenet Cherokee"/>
+        <a:font script="Yiii" typeface="Microsoft Yi Baiti"/>
+        <a:font script="Tibt" typeface="Microsoft Himalaya"/>
+        <a:font script="Thaa" typeface="MV Boli"/>
+        <a:font script="Deva" typeface="Mangal"/>
+        <a:font script="Telu" typeface="Gautami"/>
+        <a:font script="Taml" typeface="Latha"/>
+        <a:font script="Syrc" typeface="Estrangelo Edessa"/>
+        <a:font script="Orya" typeface="Kalinga"/>
+        <a:font script="Mlym" typeface="Kartika"/>
+        <a:font script="Laoo" typeface="DokChampa"/>
+        <a:font script="Sinh" typeface="Iskoola Pota"/>
+        <a:font script="Mong" typeface="Mongolian Baiti"/>
+        <a:font script="Viet" typeface="Times New Roman"/>
+        <a:font script="Uigh" typeface="Microsoft Uighur"/>
+        <a:font script="Geor" typeface="Sylfaen"/>
+      </a:majorFont>
+      <a:minorFont>
+        <a:latin typeface="Calibri" panose="020F0502020204030204"/>
+        <a:ea typeface=""/>
+        <a:cs typeface=""/>
+        <a:font script="Jpan" typeface="ＭＳ Ｐゴシック"/>
+        <a:font script="Hang" typeface="맑은 고딕"/>
+        <a:font script="Hans" typeface="宋体"/>
+        <a:font script="Hant" typeface="新細明體"/>
+        <a:font script="Arab" typeface="Arial"/>
+        <a:font script="Hebr" typeface="Arial"/>
+        <a:font script="Thai" typeface="Cordia New"/>
+        <a:font script="Ethi" typeface="Nyala"/>
+        <a:font script="Beng" typeface="Vrinda"/>
+        <a:font script="Gujr" typeface="Shruti"/>
+        <a:font script="Khmr" typeface="DaunPenh"/>
+        <a:font script="Knda" typeface="Tunga"/>
+        <a:font script="Guru" typeface="Raavi"/>
+        <a:font script="Cans" typeface="Euphemia"/>
+        <a:font script="Cher" typeface="Plantagenet Cherokee"/>
+        <a:font script="Yiii" typeface="Microsoft Yi Baiti"/>
+        <a:font script="Tibt" typeface="Microsoft Himalaya"/>
+        <a:font script="Thaa" typeface="MV Boli"/>
+        <a:font script="Deva" typeface="Mangal"/>
+        <a:font script="Telu" typeface="Gautami"/>
+        <a:font script="Taml" typeface="Latha"/>
+        <a:font script="Syrc" typeface="Estrangelo Edessa"/>
+        <a:font script="Orya" typeface="Kalinga"/>
+        <a:font script="Mlym" typeface="Kartika"/>
+        <a:font script="Laoo" typeface="DokChampa"/>
+        <a:font script="Sinh" typeface="Iskoola Pota"/>
+        <a:font script="Mong" typeface="Mongolian Baiti"/>
+        <a:font script="Viet" typeface="Arial"/>
+        <a:font script="Uigh" typeface="Microsoft Uighur"/>
+        <a:font script="Geor" typeface="Sylfaen"/>
+      </a:minorFont>
+    </a:fontScheme>
+    <a:fmtScheme name="Office">
+      <a:fillStyleLst>
+        <a:solidFill>
+          <a:schemeClr val="phClr"/>
+        </a:solidFill>
+        <a:gradFill rotWithShape="1">
+          <a:gsLst>
+            <a:gs pos="0">
+              <a:schemeClr val="phClr">
+                <a:lumMod val="110000"/>
+                <a:satMod val="105000"/>
+                <a:tint val="67000"/>
+              </a:schemeClr>
+            </a:gs>
+            <a:gs pos="50000">
+              <a:schemeClr val="phClr">
+                <a:lumMod val="105000"/>
+                <a:satMod val="103000"/>
+                <a:tint val="73000"/>
+              </a:schemeClr>
+            </a:gs>
+            <a:gs pos="100000">
+              <a:schemeClr val="phClr">
+                <a:lumMod val="105000"/>
+                <a:satMod val="109000"/>
+                <a:tint val="81000"/>
+              </a:schemeClr>
+            </a:gs>
+          </a:gsLst>
+          <a:lin ang="5400000" scaled="0"/>
+        </a:gradFill>
+        <a:gradFill rotWithShape="1">
+          <a:gsLst>
+            <a:gs pos="0">
+              <a:schemeClr val="phClr">
+                <a:satMod val="103000"/>
+                <a:lumMod val="102000"/>
+                <a:tint val="94000"/>
+              </a:schemeClr>
+            </a:gs>
+            <a:gs pos="50000">
+              <a:schemeClr val="phClr">
+                <a:satMod val="110000"/>
+                <a:lumMod val="100000"/>
+                <a:shade val="100000"/>
+              </a:schemeClr>
+            </a:gs>
+            <a:gs pos="100000">
+              <a:schemeClr val="phClr">
+                <a:lumMod val="99000"/>
+                <a:satMod val="120000"/>
+                <a:shade val="78000"/>
+              </a:schemeClr>
+            </a:gs>
+          </a:gsLst>
+          <a:lin ang="5400000" scaled="0"/>
+        </a:gradFill>
+      </a:fillStyleLst>
+      <a:lnStyleLst>
+        <a:ln w="6350" cap="flat" cmpd="sng" algn="ctr">
+          <a:solidFill>
+            <a:schemeClr val="phClr"/>
+          </a:solidFill>
+          <a:prstDash val="solid"/>
+          <a:miter lim="800000"/>
+        </a:ln>
+        <a:ln w="12700" cap="flat" cmpd="sng" algn="ctr">
+          <a:solidFill>
+            <a:schemeClr val="phClr"/>
+          </a:solidFill>
+          <a:prstDash val="solid"/>
+          <a:miter lim="800000"/>
+        </a:ln>
+        <a:ln w="19050" cap="flat" cmpd="sng" algn="ctr">
+          <a:solidFill>
+            <a:schemeClr val="phClr"/>
+          </a:solidFill>
+          <a:prstDash val="solid"/>
+          <a:miter lim="800000"/>
+        </a:ln>
+      </a:lnStyleLst>
+      <a:effectStyleLst>
+        <a:effectStyle>
+          <a:effectLst/>
+        </a:effectStyle>
+        <a:effectStyle>
+          <a:effectLst/>
+        </a:effectStyle>
+        <a:effectStyle>
+          <a:effectLst>
+            <a:outerShdw blurRad="57150" dist="19050" dir="5400000" algn="ctr" rotWithShape="0">
+              <a:srgbClr val="000000">
+                <a:alpha val="63000"/>
+              </a:srgbClr>
+            </a:outerShdw>
+          </a:effectLst>
+        </a:effectStyle>
+      </a:effectStyleLst>
+      <a:bgFillStyleLst>
+        <a:solidFill>
+          <a:schemeClr val="phClr"/>
+        </a:solidFill>
+        <a:solidFill>
+          <a:schemeClr val="phClr">
+            <a:tint val="95000"/>
+            <a:satMod val="170000"/>
+          </a:schemeClr>
+        </a:solidFill>
+        <a:gradFill rotWithShape="1">
+          <a:gsLst>
+            <a:gs pos="0">
+              <a:schemeClr val="phClr">
+                <a:tint val="93000"/>
+                <a:satMod val="150000"/>
+                <a:shade val="98000"/>
+                <a:lumMod val="102000"/>
+              </a:schemeClr>
+            </a:gs>
+            <a:gs pos="50000">
+              <a:schemeClr val="phClr">
+                <a:tint val="98000"/>
+                <a:satMod val="130000"/>
+                <a:shade val="90000"/>
+                <a:lumMod val="103000"/>
+              </a:schemeClr>
+            </a:gs>
+            <a:gs pos="100000">
+              <a:schemeClr val="phClr">
+                <a:shade val="63000"/>
+                <a:satMod val="120000"/>
+              </a:schemeClr>
+            </a:gs>
+          </a:gsLst>
+          <a:lin ang="5400000" scaled="0"/>
+        </a:gradFill>
+      </a:bgFillStyleLst>
+    </a:fmtScheme>
+  </a:themeElements>
+  <a:objectDefaults/>
+  <a:extraClrSchemeLst/>
+  <a:extLst>
+    <a:ext uri="{05A4C25C-085E-4340-85A3-A5531E510DB2}">
+      <thm15:themeFamily xmlns:thm15="http://schemas.microsoft.com/office/thememl/2012/main" name="Office Theme" id="{62F939B6-93AF-4DB8-9C6B-D6C7DFDC589F}" vid="{4A3C46E8-61CC-4603-A589-7422A47A8E4A}"/>
+    </a:ext>
+  </a:extLst>
+</a:theme>
 </file>